--- a/Vidhya_Majee___VOIS_Major_Project_PPT_Seasonal_Agriculture_Performance_Analysis.pptx
+++ b/Vidhya_Majee___VOIS_Major_Project_PPT_Seasonal_Agriculture_Performance_Analysis.pptx
@@ -190,7 +190,7 @@
 <p1510:revInfo xmlns:a="http://schemas.openxmlformats.org/drawingml/2006/main" xmlns:r="http://schemas.openxmlformats.org/officeDocument/2006/relationships" xmlns:p1510="http://schemas.microsoft.com/office/powerpoint/2015/10/main">
   <p1510:revLst>
     <p1510:client id="{32E4DB7F-1028-4FCE-B38E-CEEB6049508C}" v="109" dt="2026-09-04T06:23:28.678"/>
-    <p1510:client id="{EF730085-4CDC-4C53-9EAC-0409C9C577CF}" v="7" dt="2026-09-04T15:31:26.997"/>
+    <p1510:client id="{EF730085-4CDC-4C53-9EAC-0409C9C577CF}" v="12" dt="2026-09-04T17:28:45.093"/>
   </p1510:revLst>
 </p1510:revInfo>
 </file>
@@ -200,7 +200,7 @@
   <pc:docChgLst>
     <pc:chgData name="Vidhya Majee" userId="641a53838c14f1ed" providerId="LiveId" clId="{EF730085-4CDC-4C53-9EAC-0409C9C577CF}"/>
     <pc:docChg chg="undo custSel modSld">
-      <pc:chgData name="Vidhya Majee" userId="641a53838c14f1ed" providerId="LiveId" clId="{EF730085-4CDC-4C53-9EAC-0409C9C577CF}" dt="2026-09-04T15:42:28.926" v="208" actId="14100"/>
+      <pc:chgData name="Vidhya Majee" userId="641a53838c14f1ed" providerId="LiveId" clId="{EF730085-4CDC-4C53-9EAC-0409C9C577CF}" dt="2026-09-04T17:30:07.446" v="270" actId="14100"/>
       <pc:docMkLst>
         <pc:docMk/>
       </pc:docMkLst>
@@ -250,8 +250,8 @@
           </ac:spMkLst>
         </pc:spChg>
       </pc:sldChg>
-      <pc:sldChg chg="addSp modSp mod">
-        <pc:chgData name="Vidhya Majee" userId="641a53838c14f1ed" providerId="LiveId" clId="{EF730085-4CDC-4C53-9EAC-0409C9C577CF}" dt="2026-09-04T15:34:46.457" v="191" actId="14100"/>
+      <pc:sldChg chg="addSp delSp modSp mod">
+        <pc:chgData name="Vidhya Majee" userId="641a53838c14f1ed" providerId="LiveId" clId="{EF730085-4CDC-4C53-9EAC-0409C9C577CF}" dt="2026-09-04T17:24:57.527" v="218" actId="14100"/>
         <pc:sldMkLst>
           <pc:docMk/>
           <pc:sldMk cId="1086225493" sldId="339"/>
@@ -272,16 +272,24 @@
             <ac:spMk id="10" creationId="{B19D8AC7-3787-4ADB-9212-0808F015C2DD}"/>
           </ac:spMkLst>
         </pc:spChg>
-        <pc:picChg chg="add mod">
-          <ac:chgData name="Vidhya Majee" userId="641a53838c14f1ed" providerId="LiveId" clId="{EF730085-4CDC-4C53-9EAC-0409C9C577CF}" dt="2026-09-04T15:27:57.786" v="127" actId="14100"/>
+        <pc:picChg chg="add del mod">
+          <ac:chgData name="Vidhya Majee" userId="641a53838c14f1ed" providerId="LiveId" clId="{EF730085-4CDC-4C53-9EAC-0409C9C577CF}" dt="2026-09-04T17:23:59.560" v="209" actId="21"/>
           <ac:picMkLst>
             <pc:docMk/>
             <pc:sldMk cId="1086225493" sldId="339"/>
             <ac:picMk id="3" creationId="{6A20E020-0DCC-EC0B-745A-E7CAF08DEC57}"/>
           </ac:picMkLst>
         </pc:picChg>
+        <pc:picChg chg="add mod">
+          <ac:chgData name="Vidhya Majee" userId="641a53838c14f1ed" providerId="LiveId" clId="{EF730085-4CDC-4C53-9EAC-0409C9C577CF}" dt="2026-09-04T17:24:57.527" v="218" actId="14100"/>
+          <ac:picMkLst>
+            <pc:docMk/>
+            <pc:sldMk cId="1086225493" sldId="339"/>
+            <ac:picMk id="6" creationId="{2C2A25F1-FA1A-B5DA-0933-B92A3A547E9C}"/>
+          </ac:picMkLst>
+        </pc:picChg>
         <pc:picChg chg="mod">
-          <ac:chgData name="Vidhya Majee" userId="641a53838c14f1ed" providerId="LiveId" clId="{EF730085-4CDC-4C53-9EAC-0409C9C577CF}" dt="2026-09-04T15:28:02.365" v="128" actId="14100"/>
+          <ac:chgData name="Vidhya Majee" userId="641a53838c14f1ed" providerId="LiveId" clId="{EF730085-4CDC-4C53-9EAC-0409C9C577CF}" dt="2026-09-04T17:24:48.013" v="217" actId="14100"/>
           <ac:picMkLst>
             <pc:docMk/>
             <pc:sldMk cId="1086225493" sldId="339"/>
@@ -289,8 +297,8 @@
           </ac:picMkLst>
         </pc:picChg>
       </pc:sldChg>
-      <pc:sldChg chg="addSp modSp mod">
-        <pc:chgData name="Vidhya Majee" userId="641a53838c14f1ed" providerId="LiveId" clId="{EF730085-4CDC-4C53-9EAC-0409C9C577CF}" dt="2026-09-04T15:39:17.921" v="201" actId="14100"/>
+      <pc:sldChg chg="addSp delSp modSp mod">
+        <pc:chgData name="Vidhya Majee" userId="641a53838c14f1ed" providerId="LiveId" clId="{EF730085-4CDC-4C53-9EAC-0409C9C577CF}" dt="2026-09-04T17:26:15.171" v="232" actId="14100"/>
         <pc:sldMkLst>
           <pc:docMk/>
           <pc:sldMk cId="3849627828" sldId="340"/>
@@ -311,16 +319,24 @@
             <ac:spMk id="10" creationId="{3A64DB11-806F-1A4C-E0D5-D745D29CED50}"/>
           </ac:spMkLst>
         </pc:spChg>
-        <pc:picChg chg="add mod">
-          <ac:chgData name="Vidhya Majee" userId="641a53838c14f1ed" providerId="LiveId" clId="{EF730085-4CDC-4C53-9EAC-0409C9C577CF}" dt="2026-09-04T15:39:17.921" v="201" actId="14100"/>
+        <pc:picChg chg="add del mod">
+          <ac:chgData name="Vidhya Majee" userId="641a53838c14f1ed" providerId="LiveId" clId="{EF730085-4CDC-4C53-9EAC-0409C9C577CF}" dt="2026-09-04T17:25:06.267" v="219" actId="21"/>
           <ac:picMkLst>
             <pc:docMk/>
             <pc:sldMk cId="3849627828" sldId="340"/>
             <ac:picMk id="3" creationId="{05A88067-6EAB-0184-9A59-326B2A156DC3}"/>
           </ac:picMkLst>
         </pc:picChg>
+        <pc:picChg chg="add mod">
+          <ac:chgData name="Vidhya Majee" userId="641a53838c14f1ed" providerId="LiveId" clId="{EF730085-4CDC-4C53-9EAC-0409C9C577CF}" dt="2026-09-04T17:26:15.171" v="232" actId="14100"/>
+          <ac:picMkLst>
+            <pc:docMk/>
+            <pc:sldMk cId="3849627828" sldId="340"/>
+            <ac:picMk id="6" creationId="{2F30A252-44E9-8505-87BC-C34142D0730E}"/>
+          </ac:picMkLst>
+        </pc:picChg>
         <pc:picChg chg="mod">
-          <ac:chgData name="Vidhya Majee" userId="641a53838c14f1ed" providerId="LiveId" clId="{EF730085-4CDC-4C53-9EAC-0409C9C577CF}" dt="2026-09-04T15:39:05.287" v="199" actId="14100"/>
+          <ac:chgData name="Vidhya Majee" userId="641a53838c14f1ed" providerId="LiveId" clId="{EF730085-4CDC-4C53-9EAC-0409C9C577CF}" dt="2026-09-04T17:26:12.220" v="231" actId="14100"/>
           <ac:picMkLst>
             <pc:docMk/>
             <pc:sldMk cId="3849627828" sldId="340"/>
@@ -343,8 +359,8 @@
           </ac:spMkLst>
         </pc:spChg>
       </pc:sldChg>
-      <pc:sldChg chg="addSp modSp mod">
-        <pc:chgData name="Vidhya Majee" userId="641a53838c14f1ed" providerId="LiveId" clId="{EF730085-4CDC-4C53-9EAC-0409C9C577CF}" dt="2026-09-04T15:35:11.472" v="194" actId="14100"/>
+      <pc:sldChg chg="addSp delSp modSp mod">
+        <pc:chgData name="Vidhya Majee" userId="641a53838c14f1ed" providerId="LiveId" clId="{EF730085-4CDC-4C53-9EAC-0409C9C577CF}" dt="2026-09-04T17:27:12.316" v="239" actId="14100"/>
         <pc:sldMkLst>
           <pc:docMk/>
           <pc:sldMk cId="1698901770" sldId="344"/>
@@ -365,12 +381,20 @@
             <ac:spMk id="10" creationId="{B6E3B1C7-6A8B-23EE-6251-DC1067C6ADE9}"/>
           </ac:spMkLst>
         </pc:spChg>
-        <pc:picChg chg="add mod">
-          <ac:chgData name="Vidhya Majee" userId="641a53838c14f1ed" providerId="LiveId" clId="{EF730085-4CDC-4C53-9EAC-0409C9C577CF}" dt="2026-09-04T15:28:43.377" v="133" actId="14100"/>
+        <pc:picChg chg="add del mod">
+          <ac:chgData name="Vidhya Majee" userId="641a53838c14f1ed" providerId="LiveId" clId="{EF730085-4CDC-4C53-9EAC-0409C9C577CF}" dt="2026-09-04T17:26:33.831" v="233" actId="21"/>
           <ac:picMkLst>
             <pc:docMk/>
             <pc:sldMk cId="1698901770" sldId="344"/>
             <ac:picMk id="3" creationId="{10190294-024A-3D73-2FE2-7FAB215FA91C}"/>
+          </ac:picMkLst>
+        </pc:picChg>
+        <pc:picChg chg="add mod">
+          <ac:chgData name="Vidhya Majee" userId="641a53838c14f1ed" providerId="LiveId" clId="{EF730085-4CDC-4C53-9EAC-0409C9C577CF}" dt="2026-09-04T17:27:12.316" v="239" actId="14100"/>
+          <ac:picMkLst>
+            <pc:docMk/>
+            <pc:sldMk cId="1698901770" sldId="344"/>
+            <ac:picMk id="6" creationId="{51FDB9BA-71B1-6032-392F-E88769C65372}"/>
           </ac:picMkLst>
         </pc:picChg>
         <pc:picChg chg="mod">
@@ -382,8 +406,8 @@
           </ac:picMkLst>
         </pc:picChg>
       </pc:sldChg>
-      <pc:sldChg chg="addSp modSp mod">
-        <pc:chgData name="Vidhya Majee" userId="641a53838c14f1ed" providerId="LiveId" clId="{EF730085-4CDC-4C53-9EAC-0409C9C577CF}" dt="2026-09-04T15:41:48.188" v="206" actId="14100"/>
+      <pc:sldChg chg="addSp delSp modSp mod">
+        <pc:chgData name="Vidhya Majee" userId="641a53838c14f1ed" providerId="LiveId" clId="{EF730085-4CDC-4C53-9EAC-0409C9C577CF}" dt="2026-09-04T17:28:21.648" v="253" actId="14100"/>
         <pc:sldMkLst>
           <pc:docMk/>
           <pc:sldMk cId="1903979828" sldId="345"/>
@@ -404,16 +428,24 @@
             <ac:spMk id="10" creationId="{2B7B89A1-9444-8322-CADC-42D31D698FA8}"/>
           </ac:spMkLst>
         </pc:spChg>
-        <pc:picChg chg="add mod">
-          <ac:chgData name="Vidhya Majee" userId="641a53838c14f1ed" providerId="LiveId" clId="{EF730085-4CDC-4C53-9EAC-0409C9C577CF}" dt="2026-09-04T15:30:33.091" v="153" actId="14100"/>
+        <pc:picChg chg="add del mod">
+          <ac:chgData name="Vidhya Majee" userId="641a53838c14f1ed" providerId="LiveId" clId="{EF730085-4CDC-4C53-9EAC-0409C9C577CF}" dt="2026-09-04T17:27:29.479" v="241" actId="21"/>
           <ac:picMkLst>
             <pc:docMk/>
             <pc:sldMk cId="1903979828" sldId="345"/>
             <ac:picMk id="3" creationId="{5BBABFA1-2CA4-7131-AAA2-CA9FC72AB107}"/>
           </ac:picMkLst>
         </pc:picChg>
+        <pc:picChg chg="add mod">
+          <ac:chgData name="Vidhya Majee" userId="641a53838c14f1ed" providerId="LiveId" clId="{EF730085-4CDC-4C53-9EAC-0409C9C577CF}" dt="2026-09-04T17:28:21.648" v="253" actId="14100"/>
+          <ac:picMkLst>
+            <pc:docMk/>
+            <pc:sldMk cId="1903979828" sldId="345"/>
+            <ac:picMk id="6" creationId="{2B2FE8B7-133B-379D-A522-7692D12DEBEC}"/>
+          </ac:picMkLst>
+        </pc:picChg>
         <pc:picChg chg="mod">
-          <ac:chgData name="Vidhya Majee" userId="641a53838c14f1ed" providerId="LiveId" clId="{EF730085-4CDC-4C53-9EAC-0409C9C577CF}" dt="2026-09-04T15:41:48.188" v="206" actId="14100"/>
+          <ac:chgData name="Vidhya Majee" userId="641a53838c14f1ed" providerId="LiveId" clId="{EF730085-4CDC-4C53-9EAC-0409C9C577CF}" dt="2026-09-04T17:28:08.080" v="251" actId="14100"/>
           <ac:picMkLst>
             <pc:docMk/>
             <pc:sldMk cId="1903979828" sldId="345"/>
@@ -421,8 +453,8 @@
           </ac:picMkLst>
         </pc:picChg>
       </pc:sldChg>
-      <pc:sldChg chg="addSp modSp mod">
-        <pc:chgData name="Vidhya Majee" userId="641a53838c14f1ed" providerId="LiveId" clId="{EF730085-4CDC-4C53-9EAC-0409C9C577CF}" dt="2026-09-04T15:33:55.460" v="190" actId="14100"/>
+      <pc:sldChg chg="addSp delSp modSp mod">
+        <pc:chgData name="Vidhya Majee" userId="641a53838c14f1ed" providerId="LiveId" clId="{EF730085-4CDC-4C53-9EAC-0409C9C577CF}" dt="2026-09-04T17:30:07.446" v="270" actId="14100"/>
         <pc:sldMkLst>
           <pc:docMk/>
           <pc:sldMk cId="1421522261" sldId="346"/>
@@ -443,12 +475,20 @@
             <ac:spMk id="10" creationId="{F85C769B-425A-FE3B-E47A-3B747985DC52}"/>
           </ac:spMkLst>
         </pc:spChg>
-        <pc:picChg chg="add mod">
-          <ac:chgData name="Vidhya Majee" userId="641a53838c14f1ed" providerId="LiveId" clId="{EF730085-4CDC-4C53-9EAC-0409C9C577CF}" dt="2026-09-04T15:33:41.577" v="189" actId="14100"/>
+        <pc:picChg chg="add del mod">
+          <ac:chgData name="Vidhya Majee" userId="641a53838c14f1ed" providerId="LiveId" clId="{EF730085-4CDC-4C53-9EAC-0409C9C577CF}" dt="2026-09-04T17:28:31.429" v="254" actId="21"/>
           <ac:picMkLst>
             <pc:docMk/>
             <pc:sldMk cId="1421522261" sldId="346"/>
             <ac:picMk id="3" creationId="{B631DD34-0E3C-2138-50C5-4F6D0FE55733}"/>
+          </ac:picMkLst>
+        </pc:picChg>
+        <pc:picChg chg="add mod">
+          <ac:chgData name="Vidhya Majee" userId="641a53838c14f1ed" providerId="LiveId" clId="{EF730085-4CDC-4C53-9EAC-0409C9C577CF}" dt="2026-09-04T17:30:07.446" v="270" actId="14100"/>
+          <ac:picMkLst>
+            <pc:docMk/>
+            <pc:sldMk cId="1421522261" sldId="346"/>
+            <ac:picMk id="6" creationId="{CD471A0B-5B5B-36F7-9E86-233E06345336}"/>
           </ac:picMkLst>
         </pc:picChg>
         <pc:picChg chg="mod">
@@ -12046,10 +12086,10 @@
       </p:pic>
       <p:pic>
         <p:nvPicPr>
-          <p:cNvPr id="3" name="Picture 2">
+          <p:cNvPr id="6" name="Picture 5">
             <a:extLst>
               <a:ext uri="{FF2B5EF4-FFF2-40B4-BE49-F238E27FC236}">
-                <a16:creationId xmlns:a16="http://schemas.microsoft.com/office/drawing/2014/main" id="{B631DD34-0E3C-2138-50C5-4F6D0FE55733}"/>
+                <a16:creationId xmlns:a16="http://schemas.microsoft.com/office/drawing/2014/main" id="{CD471A0B-5B5B-36F7-9E86-233E06345336}"/>
               </a:ext>
             </a:extLst>
           </p:cNvPr>
@@ -12066,8 +12106,8 @@
         </p:blipFill>
         <p:spPr>
           <a:xfrm>
-            <a:off x="8370407" y="1353670"/>
-            <a:ext cx="3821592" cy="5504329"/>
+            <a:off x="8337176" y="2447365"/>
+            <a:ext cx="3832729" cy="4303060"/>
           </a:xfrm>
           <a:prstGeom prst="rect">
             <a:avLst/>
@@ -20312,7 +20352,7 @@
         <p:spPr>
           <a:xfrm>
             <a:off x="1" y="1275371"/>
-            <a:ext cx="9246636" cy="5489323"/>
+            <a:ext cx="9144262" cy="5489323"/>
           </a:xfrm>
           <a:prstGeom prst="rect">
             <a:avLst/>
@@ -20321,10 +20361,10 @@
       </p:pic>
       <p:pic>
         <p:nvPicPr>
-          <p:cNvPr id="3" name="Picture 2">
+          <p:cNvPr id="6" name="Picture 5">
             <a:extLst>
               <a:ext uri="{FF2B5EF4-FFF2-40B4-BE49-F238E27FC236}">
-                <a16:creationId xmlns:a16="http://schemas.microsoft.com/office/drawing/2014/main" id="{6A20E020-0DCC-EC0B-745A-E7CAF08DEC57}"/>
+                <a16:creationId xmlns:a16="http://schemas.microsoft.com/office/drawing/2014/main" id="{2C2A25F1-FA1A-B5DA-0933-B92A3A547E9C}"/>
               </a:ext>
             </a:extLst>
           </p:cNvPr>
@@ -20341,8 +20381,8 @@
         </p:blipFill>
         <p:spPr>
           <a:xfrm>
-            <a:off x="9035774" y="866158"/>
-            <a:ext cx="3190383" cy="5991842"/>
+            <a:off x="9144263" y="1138519"/>
+            <a:ext cx="3047736" cy="5719482"/>
           </a:xfrm>
           <a:prstGeom prst="rect">
             <a:avLst/>
@@ -21474,7 +21514,7 @@
         <p:spPr>
           <a:xfrm>
             <a:off x="1" y="1492898"/>
-            <a:ext cx="8928846" cy="5172062"/>
+            <a:ext cx="8695764" cy="5172062"/>
           </a:xfrm>
           <a:prstGeom prst="rect">
             <a:avLst/>
@@ -21483,10 +21523,10 @@
       </p:pic>
       <p:pic>
         <p:nvPicPr>
-          <p:cNvPr id="3" name="Picture 2">
+          <p:cNvPr id="6" name="Picture 5">
             <a:extLst>
               <a:ext uri="{FF2B5EF4-FFF2-40B4-BE49-F238E27FC236}">
-                <a16:creationId xmlns:a16="http://schemas.microsoft.com/office/drawing/2014/main" id="{05A88067-6EAB-0184-9A59-326B2A156DC3}"/>
+                <a16:creationId xmlns:a16="http://schemas.microsoft.com/office/drawing/2014/main" id="{2F30A252-44E9-8505-87BC-C34142D0730E}"/>
               </a:ext>
             </a:extLst>
           </p:cNvPr>
@@ -21503,8 +21543,8 @@
         </p:blipFill>
         <p:spPr>
           <a:xfrm>
-            <a:off x="8928847" y="1275371"/>
-            <a:ext cx="3263153" cy="5553684"/>
+            <a:off x="8695765" y="1492898"/>
+            <a:ext cx="3496234" cy="5293069"/>
           </a:xfrm>
           <a:prstGeom prst="rect">
             <a:avLst/>
@@ -22645,10 +22685,10 @@
       </p:pic>
       <p:pic>
         <p:nvPicPr>
-          <p:cNvPr id="3" name="Picture 2">
+          <p:cNvPr id="6" name="Picture 5">
             <a:extLst>
               <a:ext uri="{FF2B5EF4-FFF2-40B4-BE49-F238E27FC236}">
-                <a16:creationId xmlns:a16="http://schemas.microsoft.com/office/drawing/2014/main" id="{10190294-024A-3D73-2FE2-7FAB215FA91C}"/>
+                <a16:creationId xmlns:a16="http://schemas.microsoft.com/office/drawing/2014/main" id="{51FDB9BA-71B1-6032-392F-E88769C65372}"/>
               </a:ext>
             </a:extLst>
           </p:cNvPr>
@@ -22665,8 +22705,8 @@
         </p:blipFill>
         <p:spPr>
           <a:xfrm>
-            <a:off x="8848441" y="999864"/>
-            <a:ext cx="3343283" cy="5858136"/>
+            <a:off x="8848441" y="1859502"/>
+            <a:ext cx="3343283" cy="4805458"/>
           </a:xfrm>
           <a:prstGeom prst="rect">
             <a:avLst/>
@@ -23799,8 +23839,8 @@
         </p:blipFill>
         <p:spPr>
           <a:xfrm>
-            <a:off x="-1" y="1694330"/>
-            <a:ext cx="8527459" cy="5091951"/>
+            <a:off x="0" y="1694330"/>
+            <a:ext cx="8808098" cy="5091951"/>
           </a:xfrm>
           <a:prstGeom prst="rect">
             <a:avLst/>
@@ -23809,10 +23849,10 @@
       </p:pic>
       <p:pic>
         <p:nvPicPr>
-          <p:cNvPr id="3" name="Picture 2">
+          <p:cNvPr id="6" name="Picture 5">
             <a:extLst>
               <a:ext uri="{FF2B5EF4-FFF2-40B4-BE49-F238E27FC236}">
-                <a16:creationId xmlns:a16="http://schemas.microsoft.com/office/drawing/2014/main" id="{5BBABFA1-2CA4-7131-AAA2-CA9FC72AB107}"/>
+                <a16:creationId xmlns:a16="http://schemas.microsoft.com/office/drawing/2014/main" id="{2B2FE8B7-133B-379D-A522-7692D12DEBEC}"/>
               </a:ext>
             </a:extLst>
           </p:cNvPr>
@@ -23829,8 +23869,8 @@
         </p:blipFill>
         <p:spPr>
           <a:xfrm>
-            <a:off x="8552329" y="1380565"/>
-            <a:ext cx="3639670" cy="5405716"/>
+            <a:off x="7511142" y="3429001"/>
+            <a:ext cx="4680857" cy="3357280"/>
           </a:xfrm>
           <a:prstGeom prst="rect">
             <a:avLst/>
@@ -25377,21 +25417,21 @@
 </file>
 
 <file path=customXml/item2.xml><?xml version="1.0" encoding="utf-8"?>
+<?mso-contentType ?>
+<FormTemplates xmlns="http://schemas.microsoft.com/sharepoint/v3/contenttype/forms">
+  <Display>DocumentLibraryForm</Display>
+  <Edit>DocumentLibraryForm</Edit>
+  <New>DocumentLibraryForm</New>
+</FormTemplates>
+</file>
+
+<file path=customXml/item3.xml><?xml version="1.0" encoding="utf-8"?>
 <p:properties xmlns:p="http://schemas.microsoft.com/office/2006/metadata/properties" xmlns:xsi="http://www.w3.org/2001/XMLSchema-instance" xmlns:pc="http://schemas.microsoft.com/office/infopath/2007/PartnerControls">
   <documentManagement>
     <Status xmlns="71af3243-3dd4-4a8d-8c0d-dd76da1f02a5">Not started</Status>
     <MediaServiceKeyPoints xmlns="71af3243-3dd4-4a8d-8c0d-dd76da1f02a5" xsi:nil="true"/>
   </documentManagement>
 </p:properties>
-</file>
-
-<file path=customXml/item3.xml><?xml version="1.0" encoding="utf-8"?>
-<?mso-contentType ?>
-<FormTemplates xmlns="http://schemas.microsoft.com/sharepoint/v3/contenttype/forms">
-  <Display>DocumentLibraryForm</Display>
-  <Edit>DocumentLibraryForm</Edit>
-  <New>DocumentLibraryForm</New>
-</FormTemplates>
 </file>
 
 <file path=customXml/itemProps1.xml><?xml version="1.0" encoding="utf-8"?>
@@ -25414,6 +25454,14 @@
 </file>
 
 <file path=customXml/itemProps2.xml><?xml version="1.0" encoding="utf-8"?>
+<ds:datastoreItem xmlns:ds="http://schemas.openxmlformats.org/officeDocument/2006/customXml" ds:itemID="{05D99ABA-76CE-4A8E-B5F0-C051B96628DE}">
+  <ds:schemaRefs>
+    <ds:schemaRef ds:uri="http://schemas.microsoft.com/sharepoint/v3/contenttype/forms"/>
+  </ds:schemaRefs>
+</ds:datastoreItem>
+</file>
+
+<file path=customXml/itemProps3.xml><?xml version="1.0" encoding="utf-8"?>
 <ds:datastoreItem xmlns:ds="http://schemas.openxmlformats.org/officeDocument/2006/customXml" ds:itemID="{4DEA9014-ED64-4558-B1E1-D03F0EE32BEB}">
   <ds:schemaRefs>
     <ds:schemaRef ds:uri="http://schemas.microsoft.com/office/2006/metadata/properties"/>
@@ -25421,12 +25469,4 @@
     <ds:schemaRef ds:uri="71af3243-3dd4-4a8d-8c0d-dd76da1f02a5"/>
   </ds:schemaRefs>
 </ds:datastoreItem>
-</file>
-
-<file path=customXml/itemProps3.xml><?xml version="1.0" encoding="utf-8"?>
-<ds:datastoreItem xmlns:ds="http://schemas.openxmlformats.org/officeDocument/2006/customXml" ds:itemID="{05D99ABA-76CE-4A8E-B5F0-C051B96628DE}">
-  <ds:schemaRefs>
-    <ds:schemaRef ds:uri="http://schemas.microsoft.com/sharepoint/v3/contenttype/forms"/>
-  </ds:schemaRefs>
-</ds:datastoreItem>
 </file>
--- a/Vidhya_Majee___VOIS_Major_Project_PPT_Seasonal_Agriculture_Performance_Analysis.pptx
+++ b/Vidhya_Majee___VOIS_Major_Project_PPT_Seasonal_Agriculture_Performance_Analysis.pptx
@@ -200,7 +200,7 @@
   <pc:docChgLst>
     <pc:chgData name="Vidhya Majee" userId="641a53838c14f1ed" providerId="LiveId" clId="{EF730085-4CDC-4C53-9EAC-0409C9C577CF}"/>
     <pc:docChg chg="undo custSel modSld">
-      <pc:chgData name="Vidhya Majee" userId="641a53838c14f1ed" providerId="LiveId" clId="{EF730085-4CDC-4C53-9EAC-0409C9C577CF}" dt="2026-09-04T17:30:07.446" v="270" actId="14100"/>
+      <pc:chgData name="Vidhya Majee" userId="641a53838c14f1ed" providerId="LiveId" clId="{EF730085-4CDC-4C53-9EAC-0409C9C577CF}" dt="2026-09-05T04:44:15.495" v="288" actId="27636"/>
       <pc:docMkLst>
         <pc:docMk/>
       </pc:docMkLst>
@@ -345,13 +345,36 @@
         </pc:picChg>
       </pc:sldChg>
       <pc:sldChg chg="modSp mod">
-        <pc:chgData name="Vidhya Majee" userId="641a53838c14f1ed" providerId="LiveId" clId="{EF730085-4CDC-4C53-9EAC-0409C9C577CF}" dt="2026-09-04T15:40:57.929" v="204"/>
+        <pc:chgData name="Vidhya Majee" userId="641a53838c14f1ed" providerId="LiveId" clId="{EF730085-4CDC-4C53-9EAC-0409C9C577CF}" dt="2026-09-05T04:42:35.817" v="276" actId="27636"/>
+        <pc:sldMkLst>
+          <pc:docMk/>
+          <pc:sldMk cId="776828144" sldId="341"/>
+        </pc:sldMkLst>
+        <pc:spChg chg="mod">
+          <ac:chgData name="Vidhya Majee" userId="641a53838c14f1ed" providerId="LiveId" clId="{EF730085-4CDC-4C53-9EAC-0409C9C577CF}" dt="2026-09-05T04:42:31" v="274" actId="14100"/>
+          <ac:spMkLst>
+            <pc:docMk/>
+            <pc:sldMk cId="776828144" sldId="341"/>
+            <ac:spMk id="4" creationId="{9B097C2C-D75A-31D4-CD9F-366F39CDE51D}"/>
+          </ac:spMkLst>
+        </pc:spChg>
+        <pc:spChg chg="mod">
+          <ac:chgData name="Vidhya Majee" userId="641a53838c14f1ed" providerId="LiveId" clId="{EF730085-4CDC-4C53-9EAC-0409C9C577CF}" dt="2026-09-05T04:42:35.817" v="276" actId="27636"/>
+          <ac:spMkLst>
+            <pc:docMk/>
+            <pc:sldMk cId="776828144" sldId="341"/>
+            <ac:spMk id="21" creationId="{00000000-0000-0000-0000-000000000000}"/>
+          </ac:spMkLst>
+        </pc:spChg>
+      </pc:sldChg>
+      <pc:sldChg chg="modSp mod">
+        <pc:chgData name="Vidhya Majee" userId="641a53838c14f1ed" providerId="LiveId" clId="{EF730085-4CDC-4C53-9EAC-0409C9C577CF}" dt="2026-09-05T04:44:15.495" v="288" actId="27636"/>
         <pc:sldMkLst>
           <pc:docMk/>
           <pc:sldMk cId="3863610428" sldId="342"/>
         </pc:sldMkLst>
         <pc:spChg chg="mod">
-          <ac:chgData name="Vidhya Majee" userId="641a53838c14f1ed" providerId="LiveId" clId="{EF730085-4CDC-4C53-9EAC-0409C9C577CF}" dt="2026-09-04T15:40:57.929" v="204"/>
+          <ac:chgData name="Vidhya Majee" userId="641a53838c14f1ed" providerId="LiveId" clId="{EF730085-4CDC-4C53-9EAC-0409C9C577CF}" dt="2026-09-05T04:44:15.495" v="288" actId="27636"/>
           <ac:spMkLst>
             <pc:docMk/>
             <pc:sldMk cId="3863610428" sldId="342"/>
@@ -599,7 +622,7 @@
           <a:p>
             <a:fld id="{EF1077DB-935E-4A0A-947A-D283B9F9F452}" type="datetimeFigureOut">
               <a:rPr lang="en-US" smtClean="0"/>
-              <a:t>9/4/2026</a:t>
+              <a:t>9/5/2026</a:t>
             </a:fld>
             <a:endParaRPr lang="en-US" dirty="0"/>
           </a:p>
@@ -776,7 +799,7 @@
           <a:p>
             <a:fld id="{2D9EC30E-1A71-4188-9BE7-E2A64929A436}" type="datetimeFigureOut">
               <a:rPr lang="en-US" noProof="0" smtClean="0"/>
-              <a:t>9/4/2026</a:t>
+              <a:t>9/5/2026</a:t>
             </a:fld>
             <a:endParaRPr lang="en-US" noProof="0" dirty="0"/>
           </a:p>
@@ -1873,7 +1896,7 @@
             <a:fld id="{B61BEF0D-F0BB-DE4B-95CE-6DB70DBA9567}" type="datetimeFigureOut">
               <a:rPr lang="en-US" smtClean="0"/>
               <a:pPr/>
-              <a:t>9/4/2026</a:t>
+              <a:t>9/5/2026</a:t>
             </a:fld>
             <a:endParaRPr lang="en-US" dirty="0"/>
           </a:p>
@@ -2127,7 +2150,7 @@
             <a:fld id="{B61BEF0D-F0BB-DE4B-95CE-6DB70DBA9567}" type="datetimeFigureOut">
               <a:rPr lang="en-US" smtClean="0"/>
               <a:pPr/>
-              <a:t>9/4/2026</a:t>
+              <a:t>9/5/2026</a:t>
             </a:fld>
             <a:endParaRPr lang="en-US" dirty="0"/>
           </a:p>
@@ -2444,7 +2467,7 @@
             <a:fld id="{B61BEF0D-F0BB-DE4B-95CE-6DB70DBA9567}" type="datetimeFigureOut">
               <a:rPr lang="en-US" smtClean="0"/>
               <a:pPr/>
-              <a:t>9/4/2026</a:t>
+              <a:t>9/5/2026</a:t>
             </a:fld>
             <a:endParaRPr lang="en-US" dirty="0"/>
           </a:p>
@@ -2780,7 +2803,7 @@
             <a:fld id="{B61BEF0D-F0BB-DE4B-95CE-6DB70DBA9567}" type="datetimeFigureOut">
               <a:rPr lang="en-US" smtClean="0"/>
               <a:pPr/>
-              <a:t>9/4/2026</a:t>
+              <a:t>9/5/2026</a:t>
             </a:fld>
             <a:endParaRPr lang="en-US" dirty="0"/>
           </a:p>
@@ -3097,7 +3120,7 @@
             <a:fld id="{B61BEF0D-F0BB-DE4B-95CE-6DB70DBA9567}" type="datetimeFigureOut">
               <a:rPr lang="en-US" smtClean="0"/>
               <a:pPr/>
-              <a:t>9/4/2026</a:t>
+              <a:t>9/5/2026</a:t>
             </a:fld>
             <a:endParaRPr lang="en-US" dirty="0"/>
           </a:p>
@@ -3493,7 +3516,7 @@
             <a:fld id="{B61BEF0D-F0BB-DE4B-95CE-6DB70DBA9567}" type="datetimeFigureOut">
               <a:rPr lang="en-US" smtClean="0"/>
               <a:pPr/>
-              <a:t>9/4/2026</a:t>
+              <a:t>9/5/2026</a:t>
             </a:fld>
             <a:endParaRPr lang="en-US" dirty="0"/>
           </a:p>
@@ -3665,7 +3688,7 @@
           <a:p>
             <a:fld id="{55C6B4A9-1611-4792-9094-5F34BCA07E0B}" type="datetimeFigureOut">
               <a:rPr lang="en-US" smtClean="0"/>
-              <a:t>9/4/2026</a:t>
+              <a:t>9/5/2026</a:t>
             </a:fld>
             <a:endParaRPr lang="en-US" dirty="0"/>
           </a:p>
@@ -3847,7 +3870,7 @@
             <a:fld id="{B61BEF0D-F0BB-DE4B-95CE-6DB70DBA9567}" type="datetimeFigureOut">
               <a:rPr lang="en-US" smtClean="0"/>
               <a:pPr/>
-              <a:t>9/4/2026</a:t>
+              <a:t>9/5/2026</a:t>
             </a:fld>
             <a:endParaRPr lang="en-US" dirty="0"/>
           </a:p>
@@ -5576,7 +5599,7 @@
             <a:fld id="{B61BEF0D-F0BB-DE4B-95CE-6DB70DBA9567}" type="datetimeFigureOut">
               <a:rPr lang="en-US" smtClean="0"/>
               <a:pPr/>
-              <a:t>9/4/2026</a:t>
+              <a:t>9/5/2026</a:t>
             </a:fld>
             <a:endParaRPr lang="en-US" dirty="0"/>
           </a:p>
@@ -7311,7 +7334,7 @@
             <a:fld id="{B61BEF0D-F0BB-DE4B-95CE-6DB70DBA9567}" type="datetimeFigureOut">
               <a:rPr lang="en-US" smtClean="0"/>
               <a:pPr/>
-              <a:t>9/4/2026</a:t>
+              <a:t>9/5/2026</a:t>
             </a:fld>
             <a:endParaRPr lang="en-US" dirty="0"/>
           </a:p>
@@ -7545,7 +7568,7 @@
           <a:p>
             <a:fld id="{EB712588-04B1-427B-82EE-E8DB90309F08}" type="datetimeFigureOut">
               <a:rPr lang="en-US" smtClean="0"/>
-              <a:t>9/4/2026</a:t>
+              <a:t>9/5/2026</a:t>
             </a:fld>
             <a:endParaRPr lang="en-US" dirty="0"/>
           </a:p>
@@ -7921,7 +7944,7 @@
             <a:fld id="{B61BEF0D-F0BB-DE4B-95CE-6DB70DBA9567}" type="datetimeFigureOut">
               <a:rPr lang="en-US" smtClean="0"/>
               <a:pPr/>
-              <a:t>9/4/2026</a:t>
+              <a:t>9/5/2026</a:t>
             </a:fld>
             <a:endParaRPr lang="en-US" dirty="0"/>
           </a:p>
@@ -8047,7 +8070,7 @@
             <a:fld id="{B61BEF0D-F0BB-DE4B-95CE-6DB70DBA9567}" type="datetimeFigureOut">
               <a:rPr lang="en-US" smtClean="0"/>
               <a:pPr/>
-              <a:t>9/4/2026</a:t>
+              <a:t>9/5/2026</a:t>
             </a:fld>
             <a:endParaRPr lang="en-US" dirty="0"/>
           </a:p>
@@ -8145,7 +8168,7 @@
             <a:fld id="{B61BEF0D-F0BB-DE4B-95CE-6DB70DBA9567}" type="datetimeFigureOut">
               <a:rPr lang="en-US" smtClean="0"/>
               <a:pPr/>
-              <a:t>9/4/2026</a:t>
+              <a:t>9/5/2026</a:t>
             </a:fld>
             <a:endParaRPr lang="en-US" dirty="0"/>
           </a:p>
@@ -8402,7 +8425,7 @@
           <a:p>
             <a:fld id="{42A54C80-263E-416B-A8E0-580EDEADCBDC}" type="datetimeFigureOut">
               <a:rPr lang="en-US" smtClean="0"/>
-              <a:t>9/4/2026</a:t>
+              <a:t>9/5/2026</a:t>
             </a:fld>
             <a:endParaRPr lang="en-US" dirty="0"/>
           </a:p>
@@ -8710,7 +8733,7 @@
             <a:fld id="{B61BEF0D-F0BB-DE4B-95CE-6DB70DBA9567}" type="datetimeFigureOut">
               <a:rPr lang="en-US" smtClean="0"/>
               <a:pPr/>
-              <a:t>9/4/2026</a:t>
+              <a:t>9/5/2026</a:t>
             </a:fld>
             <a:endParaRPr lang="en-US" dirty="0"/>
           </a:p>
@@ -9414,7 +9437,7 @@
             <a:fld id="{B61BEF0D-F0BB-DE4B-95CE-6DB70DBA9567}" type="datetimeFigureOut">
               <a:rPr lang="en-US" smtClean="0"/>
               <a:pPr/>
-              <a:t>9/4/2026</a:t>
+              <a:t>9/5/2026</a:t>
             </a:fld>
             <a:endParaRPr lang="en-US" dirty="0"/>
           </a:p>
@@ -9625,7 +9648,7 @@
                 </a:solidFill>
               </a:rPr>
               <a:pPr/>
-              <a:t>9/4/2026</a:t>
+              <a:t>9/5/2026</a:t>
             </a:fld>
             <a:endParaRPr lang="en-US" sz="1100" dirty="0">
               <a:solidFill>
@@ -12655,8 +12678,8 @@
         </p:nvSpPr>
         <p:spPr>
           <a:xfrm>
-            <a:off x="675957" y="370589"/>
-            <a:ext cx="4735798" cy="830997"/>
+            <a:off x="675957" y="286871"/>
+            <a:ext cx="4735798" cy="842683"/>
           </a:xfrm>
         </p:spPr>
         <p:txBody>
@@ -13194,13 +13217,13 @@
         </p:nvSpPr>
         <p:spPr>
           <a:xfrm>
-            <a:off x="675957" y="1275371"/>
-            <a:ext cx="8300000" cy="4924629"/>
+            <a:off x="675957" y="1129553"/>
+            <a:ext cx="8300000" cy="5253318"/>
           </a:xfrm>
         </p:spPr>
         <p:txBody>
           <a:bodyPr>
-            <a:normAutofit lnSpcReduction="10000"/>
+            <a:normAutofit/>
           </a:bodyPr>
           <a:lstStyle/>
           <a:p>
@@ -14249,19 +14272,31 @@
         </p:nvSpPr>
         <p:spPr>
           <a:xfrm>
-            <a:off x="320982" y="2501153"/>
-            <a:ext cx="9405723" cy="1497105"/>
+            <a:off x="320982" y="2277035"/>
+            <a:ext cx="9405723" cy="1721223"/>
           </a:xfrm>
         </p:spPr>
         <p:txBody>
           <a:bodyPr>
-            <a:normAutofit lnSpcReduction="10000"/>
+            <a:normAutofit fontScale="85000" lnSpcReduction="10000"/>
           </a:bodyPr>
           <a:lstStyle/>
           <a:p>
             <a:r>
-              <a:rPr lang="en-US" sz="2000" u="sng" dirty="0">
-                <a:hlinkClick r:id="rId3"/>
+              <a:rPr lang="en-US" sz="3200" b="1" dirty="0">
+                <a:solidFill>
+                  <a:schemeClr val="accent1">
+                    <a:lumMod val="50000"/>
+                  </a:schemeClr>
+                </a:solidFill>
+                <a:latin typeface="Arial Rounded MT Bold" panose="020F0704030504030204" pitchFamily="34" charset="0"/>
+                <a:hlinkClick r:id="rId3">
+                  <a:extLst>
+                    <a:ext uri="{A12FA001-AC4F-418D-AE19-62706E023703}">
+                      <ahyp:hlinkClr xmlns:ahyp="http://schemas.microsoft.com/office/drawing/2018/hyperlinkcolor" val="tx"/>
+                    </a:ext>
+                  </a:extLst>
+                </a:hlinkClick>
               </a:rPr>
               <a:t>https://github.com/Vidhya-Majee/seasonal-agriculture-performance-analysis</a:t>
             </a:r>
@@ -25417,21 +25452,21 @@
 </file>
 
 <file path=customXml/item2.xml><?xml version="1.0" encoding="utf-8"?>
+<p:properties xmlns:p="http://schemas.microsoft.com/office/2006/metadata/properties" xmlns:xsi="http://www.w3.org/2001/XMLSchema-instance" xmlns:pc="http://schemas.microsoft.com/office/infopath/2007/PartnerControls">
+  <documentManagement>
+    <Status xmlns="71af3243-3dd4-4a8d-8c0d-dd76da1f02a5">Not started</Status>
+    <MediaServiceKeyPoints xmlns="71af3243-3dd4-4a8d-8c0d-dd76da1f02a5" xsi:nil="true"/>
+  </documentManagement>
+</p:properties>
+</file>
+
+<file path=customXml/item3.xml><?xml version="1.0" encoding="utf-8"?>
 <?mso-contentType ?>
 <FormTemplates xmlns="http://schemas.microsoft.com/sharepoint/v3/contenttype/forms">
   <Display>DocumentLibraryForm</Display>
   <Edit>DocumentLibraryForm</Edit>
   <New>DocumentLibraryForm</New>
 </FormTemplates>
-</file>
-
-<file path=customXml/item3.xml><?xml version="1.0" encoding="utf-8"?>
-<p:properties xmlns:p="http://schemas.microsoft.com/office/2006/metadata/properties" xmlns:xsi="http://www.w3.org/2001/XMLSchema-instance" xmlns:pc="http://schemas.microsoft.com/office/infopath/2007/PartnerControls">
-  <documentManagement>
-    <Status xmlns="71af3243-3dd4-4a8d-8c0d-dd76da1f02a5">Not started</Status>
-    <MediaServiceKeyPoints xmlns="71af3243-3dd4-4a8d-8c0d-dd76da1f02a5" xsi:nil="true"/>
-  </documentManagement>
-</p:properties>
 </file>
 
 <file path=customXml/itemProps1.xml><?xml version="1.0" encoding="utf-8"?>
@@ -25454,14 +25489,6 @@
 </file>
 
 <file path=customXml/itemProps2.xml><?xml version="1.0" encoding="utf-8"?>
-<ds:datastoreItem xmlns:ds="http://schemas.openxmlformats.org/officeDocument/2006/customXml" ds:itemID="{05D99ABA-76CE-4A8E-B5F0-C051B96628DE}">
-  <ds:schemaRefs>
-    <ds:schemaRef ds:uri="http://schemas.microsoft.com/sharepoint/v3/contenttype/forms"/>
-  </ds:schemaRefs>
-</ds:datastoreItem>
-</file>
-
-<file path=customXml/itemProps3.xml><?xml version="1.0" encoding="utf-8"?>
 <ds:datastoreItem xmlns:ds="http://schemas.openxmlformats.org/officeDocument/2006/customXml" ds:itemID="{4DEA9014-ED64-4558-B1E1-D03F0EE32BEB}">
   <ds:schemaRefs>
     <ds:schemaRef ds:uri="http://schemas.microsoft.com/office/2006/metadata/properties"/>
@@ -25469,4 +25496,12 @@
     <ds:schemaRef ds:uri="71af3243-3dd4-4a8d-8c0d-dd76da1f02a5"/>
   </ds:schemaRefs>
 </ds:datastoreItem>
+</file>
+
+<file path=customXml/itemProps3.xml><?xml version="1.0" encoding="utf-8"?>
+<ds:datastoreItem xmlns:ds="http://schemas.openxmlformats.org/officeDocument/2006/customXml" ds:itemID="{05D99ABA-76CE-4A8E-B5F0-C051B96628DE}">
+  <ds:schemaRefs>
+    <ds:schemaRef ds:uri="http://schemas.microsoft.com/sharepoint/v3/contenttype/forms"/>
+  </ds:schemaRefs>
+</ds:datastoreItem>
 </file>
--- a/Vidhya_Majee___VOIS_Major_Project_PPT_Seasonal_Agriculture_Performance_Analysis.pptx
+++ b/Vidhya_Majee___VOIS_Major_Project_PPT_Seasonal_Agriculture_Performance_Analysis.pptx
@@ -190,7 +190,7 @@
 <p1510:revInfo xmlns:a="http://schemas.openxmlformats.org/drawingml/2006/main" xmlns:r="http://schemas.openxmlformats.org/officeDocument/2006/relationships" xmlns:p1510="http://schemas.microsoft.com/office/powerpoint/2015/10/main">
   <p1510:revLst>
     <p1510:client id="{32E4DB7F-1028-4FCE-B38E-CEEB6049508C}" v="109" dt="2026-09-04T06:23:28.678"/>
-    <p1510:client id="{EF730085-4CDC-4C53-9EAC-0409C9C577CF}" v="12" dt="2026-09-04T17:28:45.093"/>
+    <p1510:client id="{EF730085-4CDC-4C53-9EAC-0409C9C577CF}" v="19" dt="2026-09-05T04:57:55.863"/>
   </p1510:revLst>
 </p1510:revInfo>
 </file>
@@ -200,7 +200,7 @@
   <pc:docChgLst>
     <pc:chgData name="Vidhya Majee" userId="641a53838c14f1ed" providerId="LiveId" clId="{EF730085-4CDC-4C53-9EAC-0409C9C577CF}"/>
     <pc:docChg chg="undo custSel modSld">
-      <pc:chgData name="Vidhya Majee" userId="641a53838c14f1ed" providerId="LiveId" clId="{EF730085-4CDC-4C53-9EAC-0409C9C577CF}" dt="2026-09-05T04:44:15.495" v="288" actId="27636"/>
+      <pc:chgData name="Vidhya Majee" userId="641a53838c14f1ed" providerId="LiveId" clId="{EF730085-4CDC-4C53-9EAC-0409C9C577CF}" dt="2026-09-05T04:58:10.775" v="361" actId="20577"/>
       <pc:docMkLst>
         <pc:docMk/>
       </pc:docMkLst>
@@ -216,6 +216,36 @@
             <pc:docMk/>
             <pc:sldMk cId="3401748718" sldId="304"/>
             <ac:spMk id="3" creationId="{D88C20CF-C1EE-4092-B52D-FD4AB2AB2508}"/>
+          </ac:spMkLst>
+        </pc:spChg>
+      </pc:sldChg>
+      <pc:sldChg chg="modSp mod">
+        <pc:chgData name="Vidhya Majee" userId="641a53838c14f1ed" providerId="LiveId" clId="{EF730085-4CDC-4C53-9EAC-0409C9C577CF}" dt="2026-09-05T04:57:46.984" v="350" actId="20577"/>
+        <pc:sldMkLst>
+          <pc:docMk/>
+          <pc:sldMk cId="3696770303" sldId="315"/>
+        </pc:sldMkLst>
+        <pc:spChg chg="mod">
+          <ac:chgData name="Vidhya Majee" userId="641a53838c14f1ed" providerId="LiveId" clId="{EF730085-4CDC-4C53-9EAC-0409C9C577CF}" dt="2026-09-05T04:57:46.984" v="350" actId="20577"/>
+          <ac:spMkLst>
+            <pc:docMk/>
+            <pc:sldMk cId="3696770303" sldId="315"/>
+            <ac:spMk id="20" creationId="{00000000-0000-0000-0000-000000000000}"/>
+          </ac:spMkLst>
+        </pc:spChg>
+      </pc:sldChg>
+      <pc:sldChg chg="modSp mod">
+        <pc:chgData name="Vidhya Majee" userId="641a53838c14f1ed" providerId="LiveId" clId="{EF730085-4CDC-4C53-9EAC-0409C9C577CF}" dt="2026-09-05T04:57:55.895" v="356" actId="27636"/>
+        <pc:sldMkLst>
+          <pc:docMk/>
+          <pc:sldMk cId="48075006" sldId="329"/>
+        </pc:sldMkLst>
+        <pc:spChg chg="mod">
+          <ac:chgData name="Vidhya Majee" userId="641a53838c14f1ed" providerId="LiveId" clId="{EF730085-4CDC-4C53-9EAC-0409C9C577CF}" dt="2026-09-05T04:57:55.895" v="356" actId="27636"/>
+          <ac:spMkLst>
+            <pc:docMk/>
+            <pc:sldMk cId="48075006" sldId="329"/>
+            <ac:spMk id="2" creationId="{664E3B60-2780-459A-8583-F095D5E7463A}"/>
           </ac:spMkLst>
         </pc:spChg>
       </pc:sldChg>
@@ -344,14 +374,14 @@
           </ac:picMkLst>
         </pc:picChg>
       </pc:sldChg>
-      <pc:sldChg chg="modSp mod">
-        <pc:chgData name="Vidhya Majee" userId="641a53838c14f1ed" providerId="LiveId" clId="{EF730085-4CDC-4C53-9EAC-0409C9C577CF}" dt="2026-09-05T04:42:35.817" v="276" actId="27636"/>
+      <pc:sldChg chg="modSp mod modAnim">
+        <pc:chgData name="Vidhya Majee" userId="641a53838c14f1ed" providerId="LiveId" clId="{EF730085-4CDC-4C53-9EAC-0409C9C577CF}" dt="2026-09-05T04:58:10.775" v="361" actId="20577"/>
         <pc:sldMkLst>
           <pc:docMk/>
           <pc:sldMk cId="776828144" sldId="341"/>
         </pc:sldMkLst>
-        <pc:spChg chg="mod">
-          <ac:chgData name="Vidhya Majee" userId="641a53838c14f1ed" providerId="LiveId" clId="{EF730085-4CDC-4C53-9EAC-0409C9C577CF}" dt="2026-09-05T04:42:31" v="274" actId="14100"/>
+        <pc:spChg chg="mod modVis">
+          <ac:chgData name="Vidhya Majee" userId="641a53838c14f1ed" providerId="LiveId" clId="{EF730085-4CDC-4C53-9EAC-0409C9C577CF}" dt="2026-09-05T04:57:15.692" v="345" actId="14429"/>
           <ac:spMkLst>
             <pc:docMk/>
             <pc:sldMk cId="776828144" sldId="341"/>
@@ -359,22 +389,62 @@
           </ac:spMkLst>
         </pc:spChg>
         <pc:spChg chg="mod">
-          <ac:chgData name="Vidhya Majee" userId="641a53838c14f1ed" providerId="LiveId" clId="{EF730085-4CDC-4C53-9EAC-0409C9C577CF}" dt="2026-09-05T04:42:35.817" v="276" actId="27636"/>
+          <ac:chgData name="Vidhya Majee" userId="641a53838c14f1ed" providerId="LiveId" clId="{EF730085-4CDC-4C53-9EAC-0409C9C577CF}" dt="2026-09-05T04:56:24.473" v="340"/>
+          <ac:spMkLst>
+            <pc:docMk/>
+            <pc:sldMk cId="776828144" sldId="341"/>
+            <ac:spMk id="7" creationId="{B7444DDE-63A3-9721-77CC-C93FED110DAF}"/>
+          </ac:spMkLst>
+        </pc:spChg>
+        <pc:spChg chg="mod">
+          <ac:chgData name="Vidhya Majee" userId="641a53838c14f1ed" providerId="LiveId" clId="{EF730085-4CDC-4C53-9EAC-0409C9C577CF}" dt="2026-09-05T04:58:10.775" v="361" actId="20577"/>
           <ac:spMkLst>
             <pc:docMk/>
             <pc:sldMk cId="776828144" sldId="341"/>
             <ac:spMk id="21" creationId="{00000000-0000-0000-0000-000000000000}"/>
           </ac:spMkLst>
         </pc:spChg>
+        <pc:picChg chg="mod modVis">
+          <ac:chgData name="Vidhya Majee" userId="641a53838c14f1ed" providerId="LiveId" clId="{EF730085-4CDC-4C53-9EAC-0409C9C577CF}" dt="2026-09-05T04:57:13.476" v="343" actId="14429"/>
+          <ac:picMkLst>
+            <pc:docMk/>
+            <pc:sldMk cId="776828144" sldId="341"/>
+            <ac:picMk id="5" creationId="{04506C61-5206-F1DF-9994-DED24DFB1C65}"/>
+          </ac:picMkLst>
+        </pc:picChg>
       </pc:sldChg>
-      <pc:sldChg chg="modSp mod">
-        <pc:chgData name="Vidhya Majee" userId="641a53838c14f1ed" providerId="LiveId" clId="{EF730085-4CDC-4C53-9EAC-0409C9C577CF}" dt="2026-09-05T04:44:15.495" v="288" actId="27636"/>
+      <pc:sldChg chg="addSp delSp modSp mod">
+        <pc:chgData name="Vidhya Majee" userId="641a53838c14f1ed" providerId="LiveId" clId="{EF730085-4CDC-4C53-9EAC-0409C9C577CF}" dt="2026-09-05T04:55:39.860" v="335" actId="27636"/>
         <pc:sldMkLst>
           <pc:docMk/>
           <pc:sldMk cId="3863610428" sldId="342"/>
         </pc:sldMkLst>
+        <pc:spChg chg="add del mod">
+          <ac:chgData name="Vidhya Majee" userId="641a53838c14f1ed" providerId="LiveId" clId="{EF730085-4CDC-4C53-9EAC-0409C9C577CF}" dt="2026-09-05T04:52:58.723" v="294"/>
+          <ac:spMkLst>
+            <pc:docMk/>
+            <pc:sldMk cId="3863610428" sldId="342"/>
+            <ac:spMk id="3" creationId="{59BF2595-6E2B-F69D-79D0-CBC5E82539EA}"/>
+          </ac:spMkLst>
+        </pc:spChg>
         <pc:spChg chg="mod">
-          <ac:chgData name="Vidhya Majee" userId="641a53838c14f1ed" providerId="LiveId" clId="{EF730085-4CDC-4C53-9EAC-0409C9C577CF}" dt="2026-09-05T04:44:15.495" v="288" actId="27636"/>
+          <ac:chgData name="Vidhya Majee" userId="641a53838c14f1ed" providerId="LiveId" clId="{EF730085-4CDC-4C53-9EAC-0409C9C577CF}" dt="2026-09-05T04:55:39.860" v="335" actId="27636"/>
+          <ac:spMkLst>
+            <pc:docMk/>
+            <pc:sldMk cId="3863610428" sldId="342"/>
+            <ac:spMk id="4" creationId="{901A2257-2F98-CB88-038E-C0F1D0A1A363}"/>
+          </ac:spMkLst>
+        </pc:spChg>
+        <pc:spChg chg="add del mod">
+          <ac:chgData name="Vidhya Majee" userId="641a53838c14f1ed" providerId="LiveId" clId="{EF730085-4CDC-4C53-9EAC-0409C9C577CF}" dt="2026-09-05T04:54:30.209" v="314"/>
+          <ac:spMkLst>
+            <pc:docMk/>
+            <pc:sldMk cId="3863610428" sldId="342"/>
+            <ac:spMk id="9" creationId="{4A420573-6531-4414-340E-48E542C54C07}"/>
+          </ac:spMkLst>
+        </pc:spChg>
+        <pc:spChg chg="mod">
+          <ac:chgData name="Vidhya Majee" userId="641a53838c14f1ed" providerId="LiveId" clId="{EF730085-4CDC-4C53-9EAC-0409C9C577CF}" dt="2026-09-05T04:55:23.984" v="333" actId="14100"/>
           <ac:spMkLst>
             <pc:docMk/>
             <pc:sldMk cId="3863610428" sldId="342"/>
@@ -13239,7 +13309,7 @@
             </a:pPr>
             <a:r>
               <a:rPr lang="en-US" sz="2200" dirty="0"/>
-              <a:t>Predictive modeling (regression) to forecast seasonal profit or yield from environmental and input variables</a:t>
+              <a:t>Predictive modeling (regression) to forecast seasonal profit or yield from environmental and input variables.</a:t>
             </a:r>
           </a:p>
           <a:p>
@@ -13255,7 +13325,7 @@
             </a:pPr>
             <a:r>
               <a:rPr lang="en-US" sz="2200" dirty="0"/>
-              <a:t>Multi-year time-series data to study year-over-year seasonal trends, not just a single snapshot</a:t>
+              <a:t>Multi-year time-series data to study year-over-year seasonal trends, not just a single snapshot.</a:t>
             </a:r>
           </a:p>
           <a:p>
@@ -13271,7 +13341,23 @@
             </a:pPr>
             <a:r>
               <a:rPr lang="en-US" sz="2200" dirty="0"/>
-              <a:t>Interactive dashboard (Streamlit / Power BI) for agri-planners to filter dynamically by state, crop and season</a:t>
+              <a:t>Interactive dashboard (</a:t>
+            </a:r>
+            <a:r>
+              <a:rPr lang="en-US" sz="2200" dirty="0" err="1"/>
+              <a:t>Streamlit</a:t>
+            </a:r>
+            <a:r>
+              <a:rPr lang="en-US" sz="2200" dirty="0"/>
+              <a:t> / Power BI) for </a:t>
+            </a:r>
+            <a:r>
+              <a:rPr lang="en-US" sz="2200" dirty="0" err="1"/>
+              <a:t>agri</a:t>
+            </a:r>
+            <a:r>
+              <a:rPr lang="en-US" sz="2200" dirty="0"/>
+              <a:t>-planners to filter dynamically by state, crop and season.</a:t>
             </a:r>
           </a:p>
           <a:p>
@@ -13287,7 +13373,7 @@
             </a:pPr>
             <a:r>
               <a:rPr lang="en-US" sz="2200" dirty="0"/>
-              <a:t>District-level and satellite/weather API data for finer-grained seasonal risk modeling</a:t>
+              <a:t>District-level and satellite/weather API data for finer-grained seasonal risk modeling.</a:t>
             </a:r>
           </a:p>
           <a:p>
@@ -13303,7 +13389,7 @@
             </a:pPr>
             <a:r>
               <a:rPr lang="en-US" sz="2200" dirty="0"/>
-              <a:t>An early-warning system for high-risk season-crop-state combinations</a:t>
+              <a:t>An early-warning system for high-risk season-crop-state combinations.</a:t>
             </a:r>
           </a:p>
         </p:txBody>
@@ -13733,13 +13819,13 @@
         </p:nvSpPr>
         <p:spPr>
           <a:xfrm>
-            <a:off x="675957" y="370589"/>
-            <a:ext cx="4735798" cy="830997"/>
+            <a:off x="675957" y="535508"/>
+            <a:ext cx="4735798" cy="666078"/>
           </a:xfrm>
         </p:spPr>
         <p:txBody>
           <a:bodyPr>
-            <a:normAutofit/>
+            <a:normAutofit fontScale="90000"/>
           </a:bodyPr>
           <a:lstStyle/>
           <a:p>
@@ -14272,18 +14358,55 @@
         </p:nvSpPr>
         <p:spPr>
           <a:xfrm>
-            <a:off x="320982" y="2277035"/>
-            <a:ext cx="9405723" cy="1721223"/>
+            <a:off x="320982" y="1792941"/>
+            <a:ext cx="9997394" cy="3272119"/>
           </a:xfrm>
         </p:spPr>
         <p:txBody>
           <a:bodyPr>
-            <a:normAutofit fontScale="85000" lnSpcReduction="10000"/>
+            <a:normAutofit fontScale="25000" lnSpcReduction="20000"/>
           </a:bodyPr>
           <a:lstStyle/>
           <a:p>
+            <a:pPr>
+              <a:spcBef>
+                <a:spcPts val="1200"/>
+              </a:spcBef>
+            </a:pPr>
+            <a:endParaRPr lang="en-US" sz="2000" dirty="0"/>
+          </a:p>
+          <a:p>
+            <a:pPr>
+              <a:spcBef>
+                <a:spcPts val="1200"/>
+              </a:spcBef>
+            </a:pPr>
+            <a:endParaRPr lang="en-US" sz="2000" dirty="0"/>
+          </a:p>
+          <a:p>
+            <a:pPr>
+              <a:spcBef>
+                <a:spcPts val="1200"/>
+              </a:spcBef>
+            </a:pPr>
+            <a:endParaRPr lang="en-US" sz="2000" dirty="0"/>
+          </a:p>
+          <a:p>
+            <a:pPr>
+              <a:spcBef>
+                <a:spcPts val="1200"/>
+              </a:spcBef>
+            </a:pPr>
+            <a:endParaRPr lang="en-US" sz="2000" dirty="0"/>
+          </a:p>
+          <a:p>
+            <a:pPr>
+              <a:spcBef>
+                <a:spcPts val="1200"/>
+              </a:spcBef>
+            </a:pPr>
             <a:r>
-              <a:rPr lang="en-US" sz="3200" b="1" dirty="0">
+              <a:rPr lang="en-US" sz="14400" b="1" dirty="0">
                 <a:solidFill>
                   <a:schemeClr val="accent1">
                     <a:lumMod val="50000"/>
@@ -14307,7 +14430,21 @@
                 <a:spcPts val="1200"/>
               </a:spcBef>
             </a:pPr>
-            <a:endParaRPr lang="en-US" sz="2000" dirty="0"/>
+            <a:endParaRPr lang="en-US" sz="14400" b="1" dirty="0">
+              <a:solidFill>
+                <a:schemeClr val="accent1">
+                  <a:lumMod val="50000"/>
+                </a:schemeClr>
+              </a:solidFill>
+              <a:latin typeface="Arial Rounded MT Bold" panose="020F0704030504030204" pitchFamily="34" charset="0"/>
+              <a:hlinkClick r:id="rId3">
+                <a:extLst>
+                  <a:ext uri="{A12FA001-AC4F-418D-AE19-62706E023703}">
+                    <ahyp:hlinkClr xmlns:ahyp="http://schemas.microsoft.com/office/drawing/2018/hyperlinkcolor" val="tx"/>
+                  </a:ext>
+                </a:extLst>
+              </a:hlinkClick>
+            </a:endParaRPr>
           </a:p>
           <a:p>
             <a:pPr>
@@ -14316,9 +14453,26 @@
               </a:spcBef>
             </a:pPr>
             <a:r>
-              <a:rPr lang="en-US" sz="2000" dirty="0"/>
-              <a:t>Repository contains the executed Jupyter Notebook, the dataset, and this presentation.</a:t>
+              <a:rPr lang="en-US" sz="9600" dirty="0"/>
+              <a:t>Repository contains the executed </a:t>
             </a:r>
+            <a:r>
+              <a:rPr lang="en-US" sz="9600" dirty="0" err="1"/>
+              <a:t>Jupyter</a:t>
+            </a:r>
+            <a:r>
+              <a:rPr lang="en-US" sz="9600" dirty="0"/>
+              <a:t> Notebook, the dataset, and this presentation</a:t>
+            </a:r>
+            <a:endParaRPr lang="en-IN" sz="9600" dirty="0"/>
+          </a:p>
+          <a:p>
+            <a:pPr>
+              <a:spcBef>
+                <a:spcPts val="1200"/>
+              </a:spcBef>
+            </a:pPr>
+            <a:endParaRPr lang="en-US" sz="2000" dirty="0"/>
           </a:p>
         </p:txBody>
       </p:sp>
@@ -18568,7 +18722,7 @@
             </a:pPr>
             <a:r>
               <a:rPr lang="en-US" sz="2000" dirty="0"/>
-              <a:t>Analyzes 4,000 farm records across 8 Indian states, 8 crops and 3 cropping seasons (Kharif, Rabi, Zaid) to uncover how environmental, resource and economic factors shift across seasons</a:t>
+              <a:t>Analyzes 4,000 farm records across 8 Indian states, 8 crops and 3 cropping seasons (Kharif, Rabi, Zaid) to uncover how environmental, resource and economic factors shift across seasons.</a:t>
             </a:r>
           </a:p>
           <a:p>
@@ -18584,7 +18738,7 @@
             </a:pPr>
             <a:r>
               <a:rPr lang="en-US" sz="2000" dirty="0"/>
-              <a:t>Cleans and prepares raw data — season-wise missing value imputation and crop-aware outlier checks — before analysis</a:t>
+              <a:t>Cleans and prepares raw data — season-wise missing value imputation and crop-aware outlier checks — before analysis.</a:t>
             </a:r>
           </a:p>
           <a:p>
@@ -18600,7 +18754,7 @@
             </a:pPr>
             <a:r>
               <a:rPr lang="en-US" sz="2000" dirty="0"/>
-              <a:t>Uses Python (Pandas, Seaborn, SciPy) to compare yield, cost, profit, water use and disease risk across seasons through visual and statistical (ANOVA) methods</a:t>
+              <a:t>Uses Python (Pandas, Seaborn, SciPy) to compare yield, cost, profit, water use and disease risk across seasons through visual and statistical (ANOVA) methods.</a:t>
             </a:r>
           </a:p>
           <a:p>
@@ -18616,7 +18770,7 @@
             </a:pPr>
             <a:r>
               <a:rPr lang="en-US" sz="2000" dirty="0"/>
-              <a:t>Key finding: profit and financial risk vary far more significantly by season than yield does — Zaid is the smallest, driest and financially riskiest season</a:t>
+              <a:t>Key finding: profit and financial risk vary far more significantly by season than yield does — Zaid is the smallest, driest and financially riskiest season.</a:t>
             </a:r>
           </a:p>
           <a:p>
@@ -18632,7 +18786,7 @@
             </a:pPr>
             <a:r>
               <a:rPr lang="en-US" sz="2000" dirty="0"/>
-              <a:t>Delivers evidence-based recommendations for season-specific irrigation, pest-budget and crop planning</a:t>
+              <a:t>Delivers evidence-based recommendations for season-specific irrigation, pest-budget and crop planning.</a:t>
             </a:r>
           </a:p>
         </p:txBody>
@@ -18823,7 +18977,7 @@
         </p:spPr>
         <p:txBody>
           <a:bodyPr>
-            <a:normAutofit lnSpcReduction="10000"/>
+            <a:normAutofit fontScale="92500"/>
           </a:bodyPr>
           <a:lstStyle/>
           <a:p>
@@ -18839,7 +18993,7 @@
             </a:pPr>
             <a:r>
               <a:rPr lang="en-US" sz="2200" dirty="0"/>
-              <a:t>Agricultural policy planners &amp; government departments designing season-specific support schemes</a:t>
+              <a:t>Agricultural policy planners &amp; government departments designing season-specific support schemes.</a:t>
             </a:r>
           </a:p>
           <a:p>
@@ -18855,7 +19009,7 @@
             </a:pPr>
             <a:r>
               <a:rPr lang="en-US" sz="2200" dirty="0"/>
-              <a:t>Agri-fintech &amp; crop-insurance companies pricing seasonal risk for lending and insurance</a:t>
+              <a:t>Agri-fintech &amp; crop-insurance companies pricing seasonal risk for lending and insurance.</a:t>
             </a:r>
           </a:p>
           <a:p>
@@ -18871,7 +19025,7 @@
             </a:pPr>
             <a:r>
               <a:rPr lang="en-US" sz="2200" dirty="0"/>
-              <a:t>Farmer cooperatives &amp; agri-extension officers advising on irrigation and crop-season choices</a:t>
+              <a:t>Farmer cooperatives &amp; agri-extension officers advising on irrigation and crop-season choices.</a:t>
             </a:r>
           </a:p>
           <a:p>
@@ -18887,7 +19041,7 @@
             </a:pPr>
             <a:r>
               <a:rPr lang="en-US" sz="2200" dirty="0"/>
-              <a:t>Agri-input companies (fertilizer, pesticide, irrigation equipment) planning seasonal demand</a:t>
+              <a:t>Agri-input companies (fertilizer, pesticide, irrigation equipment) planning seasonal demand.</a:t>
             </a:r>
           </a:p>
           <a:p>
@@ -18903,7 +19057,7 @@
             </a:pPr>
             <a:r>
               <a:rPr lang="en-US" sz="2200" dirty="0"/>
-              <a:t>Researchers &amp; students studying agricultural data analytics</a:t>
+              <a:t>Researchers &amp; students studying agricultural data analytics.</a:t>
             </a:r>
           </a:p>
         </p:txBody>
@@ -25452,21 +25606,21 @@
 </file>
 
 <file path=customXml/item2.xml><?xml version="1.0" encoding="utf-8"?>
+<?mso-contentType ?>
+<FormTemplates xmlns="http://schemas.microsoft.com/sharepoint/v3/contenttype/forms">
+  <Display>DocumentLibraryForm</Display>
+  <Edit>DocumentLibraryForm</Edit>
+  <New>DocumentLibraryForm</New>
+</FormTemplates>
+</file>
+
+<file path=customXml/item3.xml><?xml version="1.0" encoding="utf-8"?>
 <p:properties xmlns:p="http://schemas.microsoft.com/office/2006/metadata/properties" xmlns:xsi="http://www.w3.org/2001/XMLSchema-instance" xmlns:pc="http://schemas.microsoft.com/office/infopath/2007/PartnerControls">
   <documentManagement>
     <Status xmlns="71af3243-3dd4-4a8d-8c0d-dd76da1f02a5">Not started</Status>
     <MediaServiceKeyPoints xmlns="71af3243-3dd4-4a8d-8c0d-dd76da1f02a5" xsi:nil="true"/>
   </documentManagement>
 </p:properties>
-</file>
-
-<file path=customXml/item3.xml><?xml version="1.0" encoding="utf-8"?>
-<?mso-contentType ?>
-<FormTemplates xmlns="http://schemas.microsoft.com/sharepoint/v3/contenttype/forms">
-  <Display>DocumentLibraryForm</Display>
-  <Edit>DocumentLibraryForm</Edit>
-  <New>DocumentLibraryForm</New>
-</FormTemplates>
 </file>
 
 <file path=customXml/itemProps1.xml><?xml version="1.0" encoding="utf-8"?>
@@ -25489,6 +25643,14 @@
 </file>
 
 <file path=customXml/itemProps2.xml><?xml version="1.0" encoding="utf-8"?>
+<ds:datastoreItem xmlns:ds="http://schemas.openxmlformats.org/officeDocument/2006/customXml" ds:itemID="{05D99ABA-76CE-4A8E-B5F0-C051B96628DE}">
+  <ds:schemaRefs>
+    <ds:schemaRef ds:uri="http://schemas.microsoft.com/sharepoint/v3/contenttype/forms"/>
+  </ds:schemaRefs>
+</ds:datastoreItem>
+</file>
+
+<file path=customXml/itemProps3.xml><?xml version="1.0" encoding="utf-8"?>
 <ds:datastoreItem xmlns:ds="http://schemas.openxmlformats.org/officeDocument/2006/customXml" ds:itemID="{4DEA9014-ED64-4558-B1E1-D03F0EE32BEB}">
   <ds:schemaRefs>
     <ds:schemaRef ds:uri="http://schemas.microsoft.com/office/2006/metadata/properties"/>
@@ -25496,12 +25658,4 @@
     <ds:schemaRef ds:uri="71af3243-3dd4-4a8d-8c0d-dd76da1f02a5"/>
   </ds:schemaRefs>
 </ds:datastoreItem>
-</file>
-
-<file path=customXml/itemProps3.xml><?xml version="1.0" encoding="utf-8"?>
-<ds:datastoreItem xmlns:ds="http://schemas.openxmlformats.org/officeDocument/2006/customXml" ds:itemID="{05D99ABA-76CE-4A8E-B5F0-C051B96628DE}">
-  <ds:schemaRefs>
-    <ds:schemaRef ds:uri="http://schemas.microsoft.com/sharepoint/v3/contenttype/forms"/>
-  </ds:schemaRefs>
-</ds:datastoreItem>
 </file>
--- a/Vidhya_Majee___VOIS_Major_Project_PPT_Seasonal_Agriculture_Performance_Analysis.pptx
+++ b/Vidhya_Majee___VOIS_Major_Project_PPT_Seasonal_Agriculture_Performance_Analysis.pptx
@@ -21,10 +21,10 @@
     <p:sldId id="344" r:id="rId12"/>
     <p:sldId id="345" r:id="rId13"/>
     <p:sldId id="346" r:id="rId14"/>
-    <p:sldId id="341" r:id="rId15"/>
-    <p:sldId id="342" r:id="rId16"/>
+    <p:sldId id="304" r:id="rId15"/>
+    <p:sldId id="348" r:id="rId16"/>
     <p:sldId id="343" r:id="rId17"/>
-    <p:sldId id="304" r:id="rId18"/>
+    <p:sldId id="347" r:id="rId18"/>
   </p:sldIdLst>
   <p:sldSz cx="12192000" cy="6858000"/>
   <p:notesSz cx="6858000" cy="9144000"/>
@@ -138,14 +138,14 @@
             <p14:sldId id="344"/>
             <p14:sldId id="345"/>
             <p14:sldId id="346"/>
-            <p14:sldId id="341"/>
           </p14:sldIdLst>
         </p14:section>
         <p14:section name="Untitled Section" id="{13CFE95F-23B4-4931-BEC5-DD291C10A803}">
           <p14:sldIdLst>
-            <p14:sldId id="342"/>
+            <p14:sldId id="304"/>
+            <p14:sldId id="348"/>
             <p14:sldId id="343"/>
-            <p14:sldId id="304"/>
+            <p14:sldId id="347"/>
           </p14:sldIdLst>
         </p14:section>
       </p14:sectionLst>
@@ -190,7 +190,7 @@
 <p1510:revInfo xmlns:a="http://schemas.openxmlformats.org/drawingml/2006/main" xmlns:r="http://schemas.openxmlformats.org/officeDocument/2006/relationships" xmlns:p1510="http://schemas.microsoft.com/office/powerpoint/2015/10/main">
   <p1510:revLst>
     <p1510:client id="{32E4DB7F-1028-4FCE-B38E-CEEB6049508C}" v="109" dt="2026-09-04T06:23:28.678"/>
-    <p1510:client id="{EF730085-4CDC-4C53-9EAC-0409C9C577CF}" v="19" dt="2026-09-05T04:57:55.863"/>
+    <p1510:client id="{EF730085-4CDC-4C53-9EAC-0409C9C577CF}" v="86" dt="2026-09-05T05:39:55.655"/>
   </p1510:revLst>
 </p1510:revInfo>
 </file>
@@ -199,38 +199,61 @@
 <pc:chgInfo xmlns:a="http://schemas.openxmlformats.org/drawingml/2006/main" xmlns:r="http://schemas.openxmlformats.org/officeDocument/2006/relationships" xmlns:ac="http://schemas.microsoft.com/office/drawing/2013/main/command" xmlns:pc="http://schemas.microsoft.com/office/powerpoint/2013/main/command">
   <pc:docChgLst>
     <pc:chgData name="Vidhya Majee" userId="641a53838c14f1ed" providerId="LiveId" clId="{EF730085-4CDC-4C53-9EAC-0409C9C577CF}"/>
-    <pc:docChg chg="undo custSel modSld">
-      <pc:chgData name="Vidhya Majee" userId="641a53838c14f1ed" providerId="LiveId" clId="{EF730085-4CDC-4C53-9EAC-0409C9C577CF}" dt="2026-09-05T04:58:10.775" v="361" actId="20577"/>
+    <pc:docChg chg="undo custSel addSld delSld modSld sldOrd modSection">
+      <pc:chgData name="Vidhya Majee" userId="641a53838c14f1ed" providerId="LiveId" clId="{EF730085-4CDC-4C53-9EAC-0409C9C577CF}" dt="2026-09-05T05:41:33.308" v="510" actId="47"/>
       <pc:docMkLst>
         <pc:docMk/>
       </pc:docMkLst>
       <pc:sldChg chg="modSp mod">
-        <pc:chgData name="Vidhya Majee" userId="641a53838c14f1ed" providerId="LiveId" clId="{EF730085-4CDC-4C53-9EAC-0409C9C577CF}" dt="2026-09-04T15:42:28.926" v="208" actId="14100"/>
+        <pc:chgData name="Vidhya Majee" userId="641a53838c14f1ed" providerId="LiveId" clId="{EF730085-4CDC-4C53-9EAC-0409C9C577CF}" dt="2026-09-05T05:38:05.733" v="452" actId="113"/>
         <pc:sldMkLst>
           <pc:docMk/>
           <pc:sldMk cId="3401748718" sldId="304"/>
         </pc:sldMkLst>
         <pc:spChg chg="mod">
-          <ac:chgData name="Vidhya Majee" userId="641a53838c14f1ed" providerId="LiveId" clId="{EF730085-4CDC-4C53-9EAC-0409C9C577CF}" dt="2026-09-04T15:42:28.926" v="208" actId="14100"/>
+          <ac:chgData name="Vidhya Majee" userId="641a53838c14f1ed" providerId="LiveId" clId="{EF730085-4CDC-4C53-9EAC-0409C9C577CF}" dt="2026-09-05T05:35:06.675" v="431" actId="1076"/>
           <ac:spMkLst>
             <pc:docMk/>
             <pc:sldMk cId="3401748718" sldId="304"/>
             <ac:spMk id="3" creationId="{D88C20CF-C1EE-4092-B52D-FD4AB2AB2508}"/>
           </ac:spMkLst>
         </pc:spChg>
+        <pc:spChg chg="mod">
+          <ac:chgData name="Vidhya Majee" userId="641a53838c14f1ed" providerId="LiveId" clId="{EF730085-4CDC-4C53-9EAC-0409C9C577CF}" dt="2026-09-05T05:38:05.733" v="452" actId="113"/>
+          <ac:spMkLst>
+            <pc:docMk/>
+            <pc:sldMk cId="3401748718" sldId="304"/>
+            <ac:spMk id="12" creationId="{BC277FD7-925B-4C3D-A364-118403201507}"/>
+          </ac:spMkLst>
+        </pc:spChg>
       </pc:sldChg>
       <pc:sldChg chg="modSp mod">
-        <pc:chgData name="Vidhya Majee" userId="641a53838c14f1ed" providerId="LiveId" clId="{EF730085-4CDC-4C53-9EAC-0409C9C577CF}" dt="2026-09-05T04:57:46.984" v="350" actId="20577"/>
+        <pc:chgData name="Vidhya Majee" userId="641a53838c14f1ed" providerId="LiveId" clId="{EF730085-4CDC-4C53-9EAC-0409C9C577CF}" dt="2026-09-05T05:38:55.092" v="458" actId="255"/>
         <pc:sldMkLst>
           <pc:docMk/>
           <pc:sldMk cId="3696770303" sldId="315"/>
         </pc:sldMkLst>
         <pc:spChg chg="mod">
-          <ac:chgData name="Vidhya Majee" userId="641a53838c14f1ed" providerId="LiveId" clId="{EF730085-4CDC-4C53-9EAC-0409C9C577CF}" dt="2026-09-05T04:57:46.984" v="350" actId="20577"/>
+          <ac:chgData name="Vidhya Majee" userId="641a53838c14f1ed" providerId="LiveId" clId="{EF730085-4CDC-4C53-9EAC-0409C9C577CF}" dt="2026-09-05T05:38:55.092" v="458" actId="255"/>
           <ac:spMkLst>
             <pc:docMk/>
             <pc:sldMk cId="3696770303" sldId="315"/>
             <ac:spMk id="20" creationId="{00000000-0000-0000-0000-000000000000}"/>
+          </ac:spMkLst>
+        </pc:spChg>
+      </pc:sldChg>
+      <pc:sldChg chg="modSp">
+        <pc:chgData name="Vidhya Majee" userId="641a53838c14f1ed" providerId="LiveId" clId="{EF730085-4CDC-4C53-9EAC-0409C9C577CF}" dt="2026-09-05T05:38:29.611" v="453" actId="255"/>
+        <pc:sldMkLst>
+          <pc:docMk/>
+          <pc:sldMk cId="3098548442" sldId="327"/>
+        </pc:sldMkLst>
+        <pc:spChg chg="mod">
+          <ac:chgData name="Vidhya Majee" userId="641a53838c14f1ed" providerId="LiveId" clId="{EF730085-4CDC-4C53-9EAC-0409C9C577CF}" dt="2026-09-05T05:38:29.611" v="453" actId="255"/>
+          <ac:spMkLst>
+            <pc:docMk/>
+            <pc:sldMk cId="3098548442" sldId="327"/>
+            <ac:spMk id="2" creationId="{E46E4DD1-270B-4C80-AFF0-EB26F132AF36}"/>
           </ac:spMkLst>
         </pc:spChg>
       </pc:sldChg>
@@ -374,14 +397,14 @@
           </ac:picMkLst>
         </pc:picChg>
       </pc:sldChg>
-      <pc:sldChg chg="modSp mod modAnim">
-        <pc:chgData name="Vidhya Majee" userId="641a53838c14f1ed" providerId="LiveId" clId="{EF730085-4CDC-4C53-9EAC-0409C9C577CF}" dt="2026-09-05T04:58:10.775" v="361" actId="20577"/>
+      <pc:sldChg chg="modSp del mod modAnim">
+        <pc:chgData name="Vidhya Majee" userId="641a53838c14f1ed" providerId="LiveId" clId="{EF730085-4CDC-4C53-9EAC-0409C9C577CF}" dt="2026-09-05T05:41:33.308" v="510" actId="47"/>
         <pc:sldMkLst>
           <pc:docMk/>
           <pc:sldMk cId="776828144" sldId="341"/>
         </pc:sldMkLst>
         <pc:spChg chg="mod modVis">
-          <ac:chgData name="Vidhya Majee" userId="641a53838c14f1ed" providerId="LiveId" clId="{EF730085-4CDC-4C53-9EAC-0409C9C577CF}" dt="2026-09-05T04:57:15.692" v="345" actId="14429"/>
+          <ac:chgData name="Vidhya Majee" userId="641a53838c14f1ed" providerId="LiveId" clId="{EF730085-4CDC-4C53-9EAC-0409C9C577CF}" dt="2026-09-05T05:32:09.368" v="376" actId="20577"/>
           <ac:spMkLst>
             <pc:docMk/>
             <pc:sldMk cId="776828144" sldId="341"/>
@@ -397,7 +420,7 @@
           </ac:spMkLst>
         </pc:spChg>
         <pc:spChg chg="mod">
-          <ac:chgData name="Vidhya Majee" userId="641a53838c14f1ed" providerId="LiveId" clId="{EF730085-4CDC-4C53-9EAC-0409C9C577CF}" dt="2026-09-05T04:58:10.775" v="361" actId="20577"/>
+          <ac:chgData name="Vidhya Majee" userId="641a53838c14f1ed" providerId="LiveId" clId="{EF730085-4CDC-4C53-9EAC-0409C9C577CF}" dt="2026-09-05T05:32:09.674" v="377" actId="20577"/>
           <ac:spMkLst>
             <pc:docMk/>
             <pc:sldMk cId="776828144" sldId="341"/>
@@ -413,8 +436,8 @@
           </ac:picMkLst>
         </pc:picChg>
       </pc:sldChg>
-      <pc:sldChg chg="addSp delSp modSp mod">
-        <pc:chgData name="Vidhya Majee" userId="641a53838c14f1ed" providerId="LiveId" clId="{EF730085-4CDC-4C53-9EAC-0409C9C577CF}" dt="2026-09-05T04:55:39.860" v="335" actId="27636"/>
+      <pc:sldChg chg="addSp delSp modSp del mod ord">
+        <pc:chgData name="Vidhya Majee" userId="641a53838c14f1ed" providerId="LiveId" clId="{EF730085-4CDC-4C53-9EAC-0409C9C577CF}" dt="2026-09-05T05:41:29.662" v="509" actId="47"/>
         <pc:sldMkLst>
           <pc:docMk/>
           <pc:sldMk cId="3863610428" sldId="342"/>
@@ -451,6 +474,21 @@
             <ac:spMk id="22" creationId="{00000000-0000-0000-0000-000000000000}"/>
           </ac:spMkLst>
         </pc:spChg>
+      </pc:sldChg>
+      <pc:sldChg chg="modSp mod ord">
+        <pc:chgData name="Vidhya Majee" userId="641a53838c14f1ed" providerId="LiveId" clId="{EF730085-4CDC-4C53-9EAC-0409C9C577CF}" dt="2026-09-05T05:33:00.738" v="388"/>
+        <pc:sldMkLst>
+          <pc:docMk/>
+          <pc:sldMk cId="3962802212" sldId="343"/>
+        </pc:sldMkLst>
+        <pc:picChg chg="mod">
+          <ac:chgData name="Vidhya Majee" userId="641a53838c14f1ed" providerId="LiveId" clId="{EF730085-4CDC-4C53-9EAC-0409C9C577CF}" dt="2026-09-05T05:31:21.687" v="363" actId="1076"/>
+          <ac:picMkLst>
+            <pc:docMk/>
+            <pc:sldMk cId="3962802212" sldId="343"/>
+            <ac:picMk id="3" creationId="{D263D9E9-5A48-D5DC-3DDA-12E81BD66AB8}"/>
+          </ac:picMkLst>
+        </pc:picChg>
       </pc:sldChg>
       <pc:sldChg chg="addSp delSp modSp mod">
         <pc:chgData name="Vidhya Majee" userId="641a53838c14f1ed" providerId="LiveId" clId="{EF730085-4CDC-4C53-9EAC-0409C9C577CF}" dt="2026-09-04T17:27:12.316" v="239" actId="14100"/>
@@ -592,6 +630,36 @@
             <ac:picMk id="99" creationId="{00000000-0000-0000-0000-000000000000}"/>
           </ac:picMkLst>
         </pc:picChg>
+      </pc:sldChg>
+      <pc:sldChg chg="add">
+        <pc:chgData name="Vidhya Majee" userId="641a53838c14f1ed" providerId="LiveId" clId="{EF730085-4CDC-4C53-9EAC-0409C9C577CF}" dt="2026-09-05T05:32:25.028" v="378" actId="2890"/>
+        <pc:sldMkLst>
+          <pc:docMk/>
+          <pc:sldMk cId="3308496198" sldId="347"/>
+        </pc:sldMkLst>
+      </pc:sldChg>
+      <pc:sldChg chg="modSp add mod modAnim">
+        <pc:chgData name="Vidhya Majee" userId="641a53838c14f1ed" providerId="LiveId" clId="{EF730085-4CDC-4C53-9EAC-0409C9C577CF}" dt="2026-09-05T05:41:18.418" v="508" actId="207"/>
+        <pc:sldMkLst>
+          <pc:docMk/>
+          <pc:sldMk cId="403887915" sldId="348"/>
+        </pc:sldMkLst>
+        <pc:spChg chg="mod">
+          <ac:chgData name="Vidhya Majee" userId="641a53838c14f1ed" providerId="LiveId" clId="{EF730085-4CDC-4C53-9EAC-0409C9C577CF}" dt="2026-09-05T05:39:58.984" v="489" actId="14100"/>
+          <ac:spMkLst>
+            <pc:docMk/>
+            <pc:sldMk cId="403887915" sldId="348"/>
+            <ac:spMk id="3" creationId="{D88C20CF-C1EE-4092-B52D-FD4AB2AB2508}"/>
+          </ac:spMkLst>
+        </pc:spChg>
+        <pc:spChg chg="mod">
+          <ac:chgData name="Vidhya Majee" userId="641a53838c14f1ed" providerId="LiveId" clId="{EF730085-4CDC-4C53-9EAC-0409C9C577CF}" dt="2026-09-05T05:41:18.418" v="508" actId="207"/>
+          <ac:spMkLst>
+            <pc:docMk/>
+            <pc:sldMk cId="403887915" sldId="348"/>
+            <ac:spMk id="12" creationId="{BC277FD7-925B-4C3D-A364-118403201507}"/>
+          </ac:spMkLst>
+        </pc:spChg>
       </pc:sldChg>
     </pc:docChg>
   </pc:docChgLst>
@@ -12683,13 +12751,7 @@
   <p:cSld>
     <p:spTree>
       <p:nvGrpSpPr>
-        <p:cNvPr id="1" name="">
-          <a:extLst>
-            <a:ext uri="{FF2B5EF4-FFF2-40B4-BE49-F238E27FC236}">
-              <a16:creationId xmlns:a16="http://schemas.microsoft.com/office/drawing/2014/main" id="{E46E94ED-1743-306E-1CA1-9410A2B50996}"/>
-            </a:ext>
-          </a:extLst>
-        </p:cNvPr>
+        <p:cNvPr id="1" name=""/>
         <p:cNvGrpSpPr/>
         <p:nvPr/>
       </p:nvGrpSpPr>
@@ -12701,12 +12763,1373 @@
           <a:chExt cx="0" cy="0"/>
         </a:xfrm>
       </p:grpSpPr>
+      <p:sp>
+        <p:nvSpPr>
+          <p:cNvPr id="3" name="Title 1">
+            <a:extLst>
+              <a:ext uri="{FF2B5EF4-FFF2-40B4-BE49-F238E27FC236}">
+                <a16:creationId xmlns:a16="http://schemas.microsoft.com/office/drawing/2014/main" id="{D88C20CF-C1EE-4092-B52D-FD4AB2AB2508}"/>
+              </a:ext>
+            </a:extLst>
+          </p:cNvPr>
+          <p:cNvSpPr>
+            <a:spLocks noGrp="1"/>
+          </p:cNvSpPr>
+          <p:nvPr>
+            <p:ph type="title"/>
+          </p:nvPr>
+        </p:nvSpPr>
+        <p:spPr>
+          <a:xfrm>
+            <a:off x="675957" y="211329"/>
+            <a:ext cx="4184824" cy="788894"/>
+          </a:xfrm>
+          <a:prstGeom prst="rect">
+            <a:avLst/>
+          </a:prstGeom>
+        </p:spPr>
+        <p:txBody>
+          <a:bodyPr anchor="ctr">
+            <a:normAutofit fontScale="90000"/>
+          </a:bodyPr>
+          <a:lstStyle/>
+          <a:p>
+            <a:pPr algn="ctr"/>
+            <a:r>
+              <a:rPr lang="en-US" sz="4800" b="1" dirty="0">
+                <a:solidFill>
+                  <a:schemeClr val="tx1"/>
+                </a:solidFill>
+              </a:rPr>
+              <a:t>Future scope</a:t>
+            </a:r>
+          </a:p>
+        </p:txBody>
+      </p:sp>
+      <p:sp>
+        <p:nvSpPr>
+          <p:cNvPr id="31" name="Text Placeholder 30">
+            <a:extLst>
+              <a:ext uri="{FF2B5EF4-FFF2-40B4-BE49-F238E27FC236}">
+                <a16:creationId xmlns:a16="http://schemas.microsoft.com/office/drawing/2014/main" id="{97AB1F14-3A1E-4057-A473-9975BA59F012}"/>
+              </a:ext>
+            </a:extLst>
+          </p:cNvPr>
+          <p:cNvSpPr>
+            <a:spLocks noGrp="1"/>
+          </p:cNvSpPr>
+          <p:nvPr>
+            <p:ph type="body" sz="quarter" idx="13"/>
+          </p:nvPr>
+        </p:nvSpPr>
+        <p:spPr>
+          <a:xfrm>
+            <a:off x="3727865" y="4641925"/>
+            <a:ext cx="2139695" cy="1108635"/>
+          </a:xfrm>
+        </p:spPr>
+        <p:txBody>
+          <a:bodyPr>
+            <a:normAutofit/>
+          </a:bodyPr>
+          <a:lstStyle/>
+          <a:p>
+            <a:r>
+              <a:rPr lang="en-US" dirty="0"/>
+              <a:t>.</a:t>
+            </a:r>
+          </a:p>
+        </p:txBody>
+      </p:sp>
+      <p:sp>
+        <p:nvSpPr>
+          <p:cNvPr id="17" name="Text Placeholder 28">
+            <a:extLst>
+              <a:ext uri="{FF2B5EF4-FFF2-40B4-BE49-F238E27FC236}">
+                <a16:creationId xmlns:a16="http://schemas.microsoft.com/office/drawing/2014/main" id="{E212CE24-374D-44D0-8F39-0F5A36E42ED7}"/>
+              </a:ext>
+            </a:extLst>
+          </p:cNvPr>
+          <p:cNvSpPr txBox="1">
+            <a:spLocks/>
+          </p:cNvSpPr>
+          <p:nvPr/>
+        </p:nvSpPr>
+        <p:spPr>
+          <a:xfrm>
+            <a:off x="878337" y="4134780"/>
+            <a:ext cx="2596574" cy="453919"/>
+          </a:xfrm>
+          <a:prstGeom prst="rect">
+            <a:avLst/>
+          </a:prstGeom>
+        </p:spPr>
+        <p:txBody>
+          <a:bodyPr vert="horz" lIns="91440" tIns="45720" rIns="91440" bIns="45720" rtlCol="0">
+            <a:normAutofit lnSpcReduction="10000"/>
+          </a:bodyPr>
+          <a:lstStyle>
+            <a:lvl1pPr marL="0" indent="0" algn="ctr" defTabSz="457200" rtl="0" eaLnBrk="1" latinLnBrk="0" hangingPunct="1">
+              <a:spcBef>
+                <a:spcPts val="1000"/>
+              </a:spcBef>
+              <a:spcAft>
+                <a:spcPts val="0"/>
+              </a:spcAft>
+              <a:buClr>
+                <a:schemeClr val="accent1"/>
+              </a:buClr>
+              <a:buSzPct val="80000"/>
+              <a:buFont typeface="Wingdings 3" charset="2"/>
+              <a:buNone/>
+              <a:defRPr lang="en-US" sz="2000" b="1" kern="1200" dirty="0" smtClean="0">
+                <a:solidFill>
+                  <a:schemeClr val="accent4"/>
+                </a:solidFill>
+                <a:latin typeface="+mj-lt"/>
+                <a:ea typeface="+mn-ea"/>
+                <a:cs typeface="+mn-cs"/>
+              </a:defRPr>
+            </a:lvl1pPr>
+            <a:lvl2pPr marL="742950" indent="-285750" algn="l" defTabSz="457200" rtl="0" eaLnBrk="1" latinLnBrk="0" hangingPunct="1">
+              <a:spcBef>
+                <a:spcPts val="1000"/>
+              </a:spcBef>
+              <a:spcAft>
+                <a:spcPts val="0"/>
+              </a:spcAft>
+              <a:buClr>
+                <a:schemeClr val="accent1"/>
+              </a:buClr>
+              <a:buSzPct val="80000"/>
+              <a:buFont typeface="Wingdings 3" charset="2"/>
+              <a:buChar char=""/>
+              <a:defRPr sz="1600" kern="1200">
+                <a:solidFill>
+                  <a:schemeClr val="tx1">
+                    <a:lumMod val="75000"/>
+                    <a:lumOff val="25000"/>
+                  </a:schemeClr>
+                </a:solidFill>
+                <a:latin typeface="+mn-lt"/>
+                <a:ea typeface="+mn-ea"/>
+                <a:cs typeface="+mn-cs"/>
+              </a:defRPr>
+            </a:lvl2pPr>
+            <a:lvl3pPr marL="1143000" indent="-228600" algn="l" defTabSz="457200" rtl="0" eaLnBrk="1" latinLnBrk="0" hangingPunct="1">
+              <a:spcBef>
+                <a:spcPts val="1000"/>
+              </a:spcBef>
+              <a:spcAft>
+                <a:spcPts val="0"/>
+              </a:spcAft>
+              <a:buClr>
+                <a:schemeClr val="accent1"/>
+              </a:buClr>
+              <a:buSzPct val="80000"/>
+              <a:buFont typeface="Wingdings 3" charset="2"/>
+              <a:buChar char=""/>
+              <a:defRPr sz="1400" kern="1200">
+                <a:solidFill>
+                  <a:schemeClr val="tx1">
+                    <a:lumMod val="75000"/>
+                    <a:lumOff val="25000"/>
+                  </a:schemeClr>
+                </a:solidFill>
+                <a:latin typeface="+mn-lt"/>
+                <a:ea typeface="+mn-ea"/>
+                <a:cs typeface="+mn-cs"/>
+              </a:defRPr>
+            </a:lvl3pPr>
+            <a:lvl4pPr marL="1600200" indent="-228600" algn="l" defTabSz="457200" rtl="0" eaLnBrk="1" latinLnBrk="0" hangingPunct="1">
+              <a:spcBef>
+                <a:spcPts val="1000"/>
+              </a:spcBef>
+              <a:spcAft>
+                <a:spcPts val="0"/>
+              </a:spcAft>
+              <a:buClr>
+                <a:schemeClr val="accent1"/>
+              </a:buClr>
+              <a:buSzPct val="80000"/>
+              <a:buFont typeface="Wingdings 3" charset="2"/>
+              <a:buChar char=""/>
+              <a:defRPr sz="1200" kern="1200">
+                <a:solidFill>
+                  <a:schemeClr val="tx1">
+                    <a:lumMod val="75000"/>
+                    <a:lumOff val="25000"/>
+                  </a:schemeClr>
+                </a:solidFill>
+                <a:latin typeface="+mn-lt"/>
+                <a:ea typeface="+mn-ea"/>
+                <a:cs typeface="+mn-cs"/>
+              </a:defRPr>
+            </a:lvl4pPr>
+            <a:lvl5pPr marL="2057400" indent="-228600" algn="l" defTabSz="457200" rtl="0" eaLnBrk="1" latinLnBrk="0" hangingPunct="1">
+              <a:spcBef>
+                <a:spcPts val="1000"/>
+              </a:spcBef>
+              <a:spcAft>
+                <a:spcPts val="0"/>
+              </a:spcAft>
+              <a:buClr>
+                <a:schemeClr val="accent1"/>
+              </a:buClr>
+              <a:buSzPct val="80000"/>
+              <a:buFont typeface="Wingdings 3" charset="2"/>
+              <a:buChar char=""/>
+              <a:defRPr sz="1200" kern="1200">
+                <a:solidFill>
+                  <a:schemeClr val="tx1">
+                    <a:lumMod val="75000"/>
+                    <a:lumOff val="25000"/>
+                  </a:schemeClr>
+                </a:solidFill>
+                <a:latin typeface="+mn-lt"/>
+                <a:ea typeface="+mn-ea"/>
+                <a:cs typeface="+mn-cs"/>
+              </a:defRPr>
+            </a:lvl5pPr>
+            <a:lvl6pPr marL="2514600" indent="-228600" algn="l" defTabSz="457200" rtl="0" eaLnBrk="1" latinLnBrk="0" hangingPunct="1">
+              <a:spcBef>
+                <a:spcPts val="1000"/>
+              </a:spcBef>
+              <a:spcAft>
+                <a:spcPts val="0"/>
+              </a:spcAft>
+              <a:buClr>
+                <a:schemeClr val="accent1"/>
+              </a:buClr>
+              <a:buSzPct val="80000"/>
+              <a:buFont typeface="Wingdings 3" charset="2"/>
+              <a:buChar char=""/>
+              <a:defRPr sz="1200" kern="1200">
+                <a:solidFill>
+                  <a:schemeClr val="tx1">
+                    <a:lumMod val="75000"/>
+                    <a:lumOff val="25000"/>
+                  </a:schemeClr>
+                </a:solidFill>
+                <a:latin typeface="+mn-lt"/>
+                <a:ea typeface="+mn-ea"/>
+                <a:cs typeface="+mn-cs"/>
+              </a:defRPr>
+            </a:lvl6pPr>
+            <a:lvl7pPr marL="2971800" indent="-228600" algn="l" defTabSz="457200" rtl="0" eaLnBrk="1" latinLnBrk="0" hangingPunct="1">
+              <a:spcBef>
+                <a:spcPts val="1000"/>
+              </a:spcBef>
+              <a:spcAft>
+                <a:spcPts val="0"/>
+              </a:spcAft>
+              <a:buClr>
+                <a:schemeClr val="accent1"/>
+              </a:buClr>
+              <a:buSzPct val="80000"/>
+              <a:buFont typeface="Wingdings 3" charset="2"/>
+              <a:buChar char=""/>
+              <a:defRPr sz="1200" kern="1200">
+                <a:solidFill>
+                  <a:schemeClr val="tx1">
+                    <a:lumMod val="75000"/>
+                    <a:lumOff val="25000"/>
+                  </a:schemeClr>
+                </a:solidFill>
+                <a:latin typeface="+mn-lt"/>
+                <a:ea typeface="+mn-ea"/>
+                <a:cs typeface="+mn-cs"/>
+              </a:defRPr>
+            </a:lvl7pPr>
+            <a:lvl8pPr marL="3429000" indent="-228600" algn="l" defTabSz="457200" rtl="0" eaLnBrk="1" latinLnBrk="0" hangingPunct="1">
+              <a:spcBef>
+                <a:spcPts val="1000"/>
+              </a:spcBef>
+              <a:spcAft>
+                <a:spcPts val="0"/>
+              </a:spcAft>
+              <a:buClr>
+                <a:schemeClr val="accent1"/>
+              </a:buClr>
+              <a:buSzPct val="80000"/>
+              <a:buFont typeface="Wingdings 3" charset="2"/>
+              <a:buChar char=""/>
+              <a:defRPr sz="1200" kern="1200">
+                <a:solidFill>
+                  <a:schemeClr val="tx1">
+                    <a:lumMod val="75000"/>
+                    <a:lumOff val="25000"/>
+                  </a:schemeClr>
+                </a:solidFill>
+                <a:latin typeface="+mn-lt"/>
+                <a:ea typeface="+mn-ea"/>
+                <a:cs typeface="+mn-cs"/>
+              </a:defRPr>
+            </a:lvl8pPr>
+            <a:lvl9pPr marL="3886200" indent="-228600" algn="l" defTabSz="457200" rtl="0" eaLnBrk="1" latinLnBrk="0" hangingPunct="1">
+              <a:spcBef>
+                <a:spcPts val="1000"/>
+              </a:spcBef>
+              <a:spcAft>
+                <a:spcPts val="0"/>
+              </a:spcAft>
+              <a:buClr>
+                <a:schemeClr val="accent1"/>
+              </a:buClr>
+              <a:buSzPct val="80000"/>
+              <a:buFont typeface="Wingdings 3" charset="2"/>
+              <a:buChar char=""/>
+              <a:defRPr sz="1200" kern="1200">
+                <a:solidFill>
+                  <a:schemeClr val="tx1">
+                    <a:lumMod val="75000"/>
+                    <a:lumOff val="25000"/>
+                  </a:schemeClr>
+                </a:solidFill>
+                <a:latin typeface="+mn-lt"/>
+                <a:ea typeface="+mn-ea"/>
+                <a:cs typeface="+mn-cs"/>
+              </a:defRPr>
+            </a:lvl9pPr>
+          </a:lstStyle>
+          <a:p>
+            <a:endParaRPr lang="en-IN" sz="2400" dirty="0"/>
+          </a:p>
+        </p:txBody>
+      </p:sp>
+      <p:sp>
+        <p:nvSpPr>
+          <p:cNvPr id="20" name="Text Placeholder 28">
+            <a:extLst>
+              <a:ext uri="{FF2B5EF4-FFF2-40B4-BE49-F238E27FC236}">
+                <a16:creationId xmlns:a16="http://schemas.microsoft.com/office/drawing/2014/main" id="{A09A5BC1-0E62-4E6B-A590-951A87D4B4FE}"/>
+              </a:ext>
+            </a:extLst>
+          </p:cNvPr>
+          <p:cNvSpPr txBox="1">
+            <a:spLocks/>
+          </p:cNvSpPr>
+          <p:nvPr/>
+        </p:nvSpPr>
+        <p:spPr>
+          <a:xfrm>
+            <a:off x="5353508" y="3962573"/>
+            <a:ext cx="2596574" cy="453919"/>
+          </a:xfrm>
+          <a:prstGeom prst="rect">
+            <a:avLst/>
+          </a:prstGeom>
+        </p:spPr>
+        <p:txBody>
+          <a:bodyPr vert="horz" lIns="91440" tIns="45720" rIns="91440" bIns="45720" rtlCol="0">
+            <a:normAutofit/>
+          </a:bodyPr>
+          <a:lstStyle>
+            <a:lvl1pPr marL="0" indent="0" algn="ctr" defTabSz="457200" rtl="0" eaLnBrk="1" latinLnBrk="0" hangingPunct="1">
+              <a:spcBef>
+                <a:spcPts val="1000"/>
+              </a:spcBef>
+              <a:spcAft>
+                <a:spcPts val="0"/>
+              </a:spcAft>
+              <a:buClr>
+                <a:schemeClr val="accent1"/>
+              </a:buClr>
+              <a:buSzPct val="80000"/>
+              <a:buFont typeface="Wingdings 3" charset="2"/>
+              <a:buNone/>
+              <a:defRPr lang="en-US" sz="2000" b="1" kern="1200" dirty="0" smtClean="0">
+                <a:solidFill>
+                  <a:schemeClr val="accent4"/>
+                </a:solidFill>
+                <a:latin typeface="+mj-lt"/>
+                <a:ea typeface="+mn-ea"/>
+                <a:cs typeface="+mn-cs"/>
+              </a:defRPr>
+            </a:lvl1pPr>
+            <a:lvl2pPr marL="742950" indent="-285750" algn="l" defTabSz="457200" rtl="0" eaLnBrk="1" latinLnBrk="0" hangingPunct="1">
+              <a:spcBef>
+                <a:spcPts val="1000"/>
+              </a:spcBef>
+              <a:spcAft>
+                <a:spcPts val="0"/>
+              </a:spcAft>
+              <a:buClr>
+                <a:schemeClr val="accent1"/>
+              </a:buClr>
+              <a:buSzPct val="80000"/>
+              <a:buFont typeface="Wingdings 3" charset="2"/>
+              <a:buChar char=""/>
+              <a:defRPr sz="1600" kern="1200">
+                <a:solidFill>
+                  <a:schemeClr val="tx1">
+                    <a:lumMod val="75000"/>
+                    <a:lumOff val="25000"/>
+                  </a:schemeClr>
+                </a:solidFill>
+                <a:latin typeface="+mn-lt"/>
+                <a:ea typeface="+mn-ea"/>
+                <a:cs typeface="+mn-cs"/>
+              </a:defRPr>
+            </a:lvl2pPr>
+            <a:lvl3pPr marL="1143000" indent="-228600" algn="l" defTabSz="457200" rtl="0" eaLnBrk="1" latinLnBrk="0" hangingPunct="1">
+              <a:spcBef>
+                <a:spcPts val="1000"/>
+              </a:spcBef>
+              <a:spcAft>
+                <a:spcPts val="0"/>
+              </a:spcAft>
+              <a:buClr>
+                <a:schemeClr val="accent1"/>
+              </a:buClr>
+              <a:buSzPct val="80000"/>
+              <a:buFont typeface="Wingdings 3" charset="2"/>
+              <a:buChar char=""/>
+              <a:defRPr sz="1400" kern="1200">
+                <a:solidFill>
+                  <a:schemeClr val="tx1">
+                    <a:lumMod val="75000"/>
+                    <a:lumOff val="25000"/>
+                  </a:schemeClr>
+                </a:solidFill>
+                <a:latin typeface="+mn-lt"/>
+                <a:ea typeface="+mn-ea"/>
+                <a:cs typeface="+mn-cs"/>
+              </a:defRPr>
+            </a:lvl3pPr>
+            <a:lvl4pPr marL="1600200" indent="-228600" algn="l" defTabSz="457200" rtl="0" eaLnBrk="1" latinLnBrk="0" hangingPunct="1">
+              <a:spcBef>
+                <a:spcPts val="1000"/>
+              </a:spcBef>
+              <a:spcAft>
+                <a:spcPts val="0"/>
+              </a:spcAft>
+              <a:buClr>
+                <a:schemeClr val="accent1"/>
+              </a:buClr>
+              <a:buSzPct val="80000"/>
+              <a:buFont typeface="Wingdings 3" charset="2"/>
+              <a:buChar char=""/>
+              <a:defRPr sz="1200" kern="1200">
+                <a:solidFill>
+                  <a:schemeClr val="tx1">
+                    <a:lumMod val="75000"/>
+                    <a:lumOff val="25000"/>
+                  </a:schemeClr>
+                </a:solidFill>
+                <a:latin typeface="+mn-lt"/>
+                <a:ea typeface="+mn-ea"/>
+                <a:cs typeface="+mn-cs"/>
+              </a:defRPr>
+            </a:lvl4pPr>
+            <a:lvl5pPr marL="2057400" indent="-228600" algn="l" defTabSz="457200" rtl="0" eaLnBrk="1" latinLnBrk="0" hangingPunct="1">
+              <a:spcBef>
+                <a:spcPts val="1000"/>
+              </a:spcBef>
+              <a:spcAft>
+                <a:spcPts val="0"/>
+              </a:spcAft>
+              <a:buClr>
+                <a:schemeClr val="accent1"/>
+              </a:buClr>
+              <a:buSzPct val="80000"/>
+              <a:buFont typeface="Wingdings 3" charset="2"/>
+              <a:buChar char=""/>
+              <a:defRPr sz="1200" kern="1200">
+                <a:solidFill>
+                  <a:schemeClr val="tx1">
+                    <a:lumMod val="75000"/>
+                    <a:lumOff val="25000"/>
+                  </a:schemeClr>
+                </a:solidFill>
+                <a:latin typeface="+mn-lt"/>
+                <a:ea typeface="+mn-ea"/>
+                <a:cs typeface="+mn-cs"/>
+              </a:defRPr>
+            </a:lvl5pPr>
+            <a:lvl6pPr marL="2514600" indent="-228600" algn="l" defTabSz="457200" rtl="0" eaLnBrk="1" latinLnBrk="0" hangingPunct="1">
+              <a:spcBef>
+                <a:spcPts val="1000"/>
+              </a:spcBef>
+              <a:spcAft>
+                <a:spcPts val="0"/>
+              </a:spcAft>
+              <a:buClr>
+                <a:schemeClr val="accent1"/>
+              </a:buClr>
+              <a:buSzPct val="80000"/>
+              <a:buFont typeface="Wingdings 3" charset="2"/>
+              <a:buChar char=""/>
+              <a:defRPr sz="1200" kern="1200">
+                <a:solidFill>
+                  <a:schemeClr val="tx1">
+                    <a:lumMod val="75000"/>
+                    <a:lumOff val="25000"/>
+                  </a:schemeClr>
+                </a:solidFill>
+                <a:latin typeface="+mn-lt"/>
+                <a:ea typeface="+mn-ea"/>
+                <a:cs typeface="+mn-cs"/>
+              </a:defRPr>
+            </a:lvl6pPr>
+            <a:lvl7pPr marL="2971800" indent="-228600" algn="l" defTabSz="457200" rtl="0" eaLnBrk="1" latinLnBrk="0" hangingPunct="1">
+              <a:spcBef>
+                <a:spcPts val="1000"/>
+              </a:spcBef>
+              <a:spcAft>
+                <a:spcPts val="0"/>
+              </a:spcAft>
+              <a:buClr>
+                <a:schemeClr val="accent1"/>
+              </a:buClr>
+              <a:buSzPct val="80000"/>
+              <a:buFont typeface="Wingdings 3" charset="2"/>
+              <a:buChar char=""/>
+              <a:defRPr sz="1200" kern="1200">
+                <a:solidFill>
+                  <a:schemeClr val="tx1">
+                    <a:lumMod val="75000"/>
+                    <a:lumOff val="25000"/>
+                  </a:schemeClr>
+                </a:solidFill>
+                <a:latin typeface="+mn-lt"/>
+                <a:ea typeface="+mn-ea"/>
+                <a:cs typeface="+mn-cs"/>
+              </a:defRPr>
+            </a:lvl7pPr>
+            <a:lvl8pPr marL="3429000" indent="-228600" algn="l" defTabSz="457200" rtl="0" eaLnBrk="1" latinLnBrk="0" hangingPunct="1">
+              <a:spcBef>
+                <a:spcPts val="1000"/>
+              </a:spcBef>
+              <a:spcAft>
+                <a:spcPts val="0"/>
+              </a:spcAft>
+              <a:buClr>
+                <a:schemeClr val="accent1"/>
+              </a:buClr>
+              <a:buSzPct val="80000"/>
+              <a:buFont typeface="Wingdings 3" charset="2"/>
+              <a:buChar char=""/>
+              <a:defRPr sz="1200" kern="1200">
+                <a:solidFill>
+                  <a:schemeClr val="tx1">
+                    <a:lumMod val="75000"/>
+                    <a:lumOff val="25000"/>
+                  </a:schemeClr>
+                </a:solidFill>
+                <a:latin typeface="+mn-lt"/>
+                <a:ea typeface="+mn-ea"/>
+                <a:cs typeface="+mn-cs"/>
+              </a:defRPr>
+            </a:lvl8pPr>
+            <a:lvl9pPr marL="3886200" indent="-228600" algn="l" defTabSz="457200" rtl="0" eaLnBrk="1" latinLnBrk="0" hangingPunct="1">
+              <a:spcBef>
+                <a:spcPts val="1000"/>
+              </a:spcBef>
+              <a:spcAft>
+                <a:spcPts val="0"/>
+              </a:spcAft>
+              <a:buClr>
+                <a:schemeClr val="accent1"/>
+              </a:buClr>
+              <a:buSzPct val="80000"/>
+              <a:buFont typeface="Wingdings 3" charset="2"/>
+              <a:buChar char=""/>
+              <a:defRPr sz="1200" kern="1200">
+                <a:solidFill>
+                  <a:schemeClr val="tx1">
+                    <a:lumMod val="75000"/>
+                    <a:lumOff val="25000"/>
+                  </a:schemeClr>
+                </a:solidFill>
+                <a:latin typeface="+mn-lt"/>
+                <a:ea typeface="+mn-ea"/>
+                <a:cs typeface="+mn-cs"/>
+              </a:defRPr>
+            </a:lvl9pPr>
+          </a:lstStyle>
+          <a:p>
+            <a:endParaRPr lang="en-IN" sz="2200" dirty="0"/>
+          </a:p>
+        </p:txBody>
+      </p:sp>
+      <p:sp>
+        <p:nvSpPr>
+          <p:cNvPr id="23" name="Text Placeholder 28">
+            <a:extLst>
+              <a:ext uri="{FF2B5EF4-FFF2-40B4-BE49-F238E27FC236}">
+                <a16:creationId xmlns:a16="http://schemas.microsoft.com/office/drawing/2014/main" id="{9E6B148F-F3B6-4E6B-9B85-645C039858E8}"/>
+              </a:ext>
+            </a:extLst>
+          </p:cNvPr>
+          <p:cNvSpPr txBox="1">
+            <a:spLocks/>
+          </p:cNvSpPr>
+          <p:nvPr/>
+        </p:nvSpPr>
+        <p:spPr>
+          <a:xfrm>
+            <a:off x="7789163" y="3962572"/>
+            <a:ext cx="2596574" cy="453919"/>
+          </a:xfrm>
+          <a:prstGeom prst="rect">
+            <a:avLst/>
+          </a:prstGeom>
+        </p:spPr>
+        <p:txBody>
+          <a:bodyPr vert="horz" lIns="91440" tIns="45720" rIns="91440" bIns="45720" rtlCol="0">
+            <a:normAutofit/>
+          </a:bodyPr>
+          <a:lstStyle>
+            <a:lvl1pPr marL="0" indent="0" algn="ctr" defTabSz="457200" rtl="0" eaLnBrk="1" latinLnBrk="0" hangingPunct="1">
+              <a:spcBef>
+                <a:spcPts val="1000"/>
+              </a:spcBef>
+              <a:spcAft>
+                <a:spcPts val="0"/>
+              </a:spcAft>
+              <a:buClr>
+                <a:schemeClr val="accent1"/>
+              </a:buClr>
+              <a:buSzPct val="80000"/>
+              <a:buFont typeface="Wingdings 3" charset="2"/>
+              <a:buNone/>
+              <a:defRPr lang="en-US" sz="2000" b="1" kern="1200" dirty="0" smtClean="0">
+                <a:solidFill>
+                  <a:schemeClr val="accent4"/>
+                </a:solidFill>
+                <a:latin typeface="+mj-lt"/>
+                <a:ea typeface="+mn-ea"/>
+                <a:cs typeface="+mn-cs"/>
+              </a:defRPr>
+            </a:lvl1pPr>
+            <a:lvl2pPr marL="742950" indent="-285750" algn="l" defTabSz="457200" rtl="0" eaLnBrk="1" latinLnBrk="0" hangingPunct="1">
+              <a:spcBef>
+                <a:spcPts val="1000"/>
+              </a:spcBef>
+              <a:spcAft>
+                <a:spcPts val="0"/>
+              </a:spcAft>
+              <a:buClr>
+                <a:schemeClr val="accent1"/>
+              </a:buClr>
+              <a:buSzPct val="80000"/>
+              <a:buFont typeface="Wingdings 3" charset="2"/>
+              <a:buChar char=""/>
+              <a:defRPr sz="1600" kern="1200">
+                <a:solidFill>
+                  <a:schemeClr val="tx1">
+                    <a:lumMod val="75000"/>
+                    <a:lumOff val="25000"/>
+                  </a:schemeClr>
+                </a:solidFill>
+                <a:latin typeface="+mn-lt"/>
+                <a:ea typeface="+mn-ea"/>
+                <a:cs typeface="+mn-cs"/>
+              </a:defRPr>
+            </a:lvl2pPr>
+            <a:lvl3pPr marL="1143000" indent="-228600" algn="l" defTabSz="457200" rtl="0" eaLnBrk="1" latinLnBrk="0" hangingPunct="1">
+              <a:spcBef>
+                <a:spcPts val="1000"/>
+              </a:spcBef>
+              <a:spcAft>
+                <a:spcPts val="0"/>
+              </a:spcAft>
+              <a:buClr>
+                <a:schemeClr val="accent1"/>
+              </a:buClr>
+              <a:buSzPct val="80000"/>
+              <a:buFont typeface="Wingdings 3" charset="2"/>
+              <a:buChar char=""/>
+              <a:defRPr sz="1400" kern="1200">
+                <a:solidFill>
+                  <a:schemeClr val="tx1">
+                    <a:lumMod val="75000"/>
+                    <a:lumOff val="25000"/>
+                  </a:schemeClr>
+                </a:solidFill>
+                <a:latin typeface="+mn-lt"/>
+                <a:ea typeface="+mn-ea"/>
+                <a:cs typeface="+mn-cs"/>
+              </a:defRPr>
+            </a:lvl3pPr>
+            <a:lvl4pPr marL="1600200" indent="-228600" algn="l" defTabSz="457200" rtl="0" eaLnBrk="1" latinLnBrk="0" hangingPunct="1">
+              <a:spcBef>
+                <a:spcPts val="1000"/>
+              </a:spcBef>
+              <a:spcAft>
+                <a:spcPts val="0"/>
+              </a:spcAft>
+              <a:buClr>
+                <a:schemeClr val="accent1"/>
+              </a:buClr>
+              <a:buSzPct val="80000"/>
+              <a:buFont typeface="Wingdings 3" charset="2"/>
+              <a:buChar char=""/>
+              <a:defRPr sz="1200" kern="1200">
+                <a:solidFill>
+                  <a:schemeClr val="tx1">
+                    <a:lumMod val="75000"/>
+                    <a:lumOff val="25000"/>
+                  </a:schemeClr>
+                </a:solidFill>
+                <a:latin typeface="+mn-lt"/>
+                <a:ea typeface="+mn-ea"/>
+                <a:cs typeface="+mn-cs"/>
+              </a:defRPr>
+            </a:lvl4pPr>
+            <a:lvl5pPr marL="2057400" indent="-228600" algn="l" defTabSz="457200" rtl="0" eaLnBrk="1" latinLnBrk="0" hangingPunct="1">
+              <a:spcBef>
+                <a:spcPts val="1000"/>
+              </a:spcBef>
+              <a:spcAft>
+                <a:spcPts val="0"/>
+              </a:spcAft>
+              <a:buClr>
+                <a:schemeClr val="accent1"/>
+              </a:buClr>
+              <a:buSzPct val="80000"/>
+              <a:buFont typeface="Wingdings 3" charset="2"/>
+              <a:buChar char=""/>
+              <a:defRPr sz="1200" kern="1200">
+                <a:solidFill>
+                  <a:schemeClr val="tx1">
+                    <a:lumMod val="75000"/>
+                    <a:lumOff val="25000"/>
+                  </a:schemeClr>
+                </a:solidFill>
+                <a:latin typeface="+mn-lt"/>
+                <a:ea typeface="+mn-ea"/>
+                <a:cs typeface="+mn-cs"/>
+              </a:defRPr>
+            </a:lvl5pPr>
+            <a:lvl6pPr marL="2514600" indent="-228600" algn="l" defTabSz="457200" rtl="0" eaLnBrk="1" latinLnBrk="0" hangingPunct="1">
+              <a:spcBef>
+                <a:spcPts val="1000"/>
+              </a:spcBef>
+              <a:spcAft>
+                <a:spcPts val="0"/>
+              </a:spcAft>
+              <a:buClr>
+                <a:schemeClr val="accent1"/>
+              </a:buClr>
+              <a:buSzPct val="80000"/>
+              <a:buFont typeface="Wingdings 3" charset="2"/>
+              <a:buChar char=""/>
+              <a:defRPr sz="1200" kern="1200">
+                <a:solidFill>
+                  <a:schemeClr val="tx1">
+                    <a:lumMod val="75000"/>
+                    <a:lumOff val="25000"/>
+                  </a:schemeClr>
+                </a:solidFill>
+                <a:latin typeface="+mn-lt"/>
+                <a:ea typeface="+mn-ea"/>
+                <a:cs typeface="+mn-cs"/>
+              </a:defRPr>
+            </a:lvl6pPr>
+            <a:lvl7pPr marL="2971800" indent="-228600" algn="l" defTabSz="457200" rtl="0" eaLnBrk="1" latinLnBrk="0" hangingPunct="1">
+              <a:spcBef>
+                <a:spcPts val="1000"/>
+              </a:spcBef>
+              <a:spcAft>
+                <a:spcPts val="0"/>
+              </a:spcAft>
+              <a:buClr>
+                <a:schemeClr val="accent1"/>
+              </a:buClr>
+              <a:buSzPct val="80000"/>
+              <a:buFont typeface="Wingdings 3" charset="2"/>
+              <a:buChar char=""/>
+              <a:defRPr sz="1200" kern="1200">
+                <a:solidFill>
+                  <a:schemeClr val="tx1">
+                    <a:lumMod val="75000"/>
+                    <a:lumOff val="25000"/>
+                  </a:schemeClr>
+                </a:solidFill>
+                <a:latin typeface="+mn-lt"/>
+                <a:ea typeface="+mn-ea"/>
+                <a:cs typeface="+mn-cs"/>
+              </a:defRPr>
+            </a:lvl7pPr>
+            <a:lvl8pPr marL="3429000" indent="-228600" algn="l" defTabSz="457200" rtl="0" eaLnBrk="1" latinLnBrk="0" hangingPunct="1">
+              <a:spcBef>
+                <a:spcPts val="1000"/>
+              </a:spcBef>
+              <a:spcAft>
+                <a:spcPts val="0"/>
+              </a:spcAft>
+              <a:buClr>
+                <a:schemeClr val="accent1"/>
+              </a:buClr>
+              <a:buSzPct val="80000"/>
+              <a:buFont typeface="Wingdings 3" charset="2"/>
+              <a:buChar char=""/>
+              <a:defRPr sz="1200" kern="1200">
+                <a:solidFill>
+                  <a:schemeClr val="tx1">
+                    <a:lumMod val="75000"/>
+                    <a:lumOff val="25000"/>
+                  </a:schemeClr>
+                </a:solidFill>
+                <a:latin typeface="+mn-lt"/>
+                <a:ea typeface="+mn-ea"/>
+                <a:cs typeface="+mn-cs"/>
+              </a:defRPr>
+            </a:lvl8pPr>
+            <a:lvl9pPr marL="3886200" indent="-228600" algn="l" defTabSz="457200" rtl="0" eaLnBrk="1" latinLnBrk="0" hangingPunct="1">
+              <a:spcBef>
+                <a:spcPts val="1000"/>
+              </a:spcBef>
+              <a:spcAft>
+                <a:spcPts val="0"/>
+              </a:spcAft>
+              <a:buClr>
+                <a:schemeClr val="accent1"/>
+              </a:buClr>
+              <a:buSzPct val="80000"/>
+              <a:buFont typeface="Wingdings 3" charset="2"/>
+              <a:buChar char=""/>
+              <a:defRPr sz="1200" kern="1200">
+                <a:solidFill>
+                  <a:schemeClr val="tx1">
+                    <a:lumMod val="75000"/>
+                    <a:lumOff val="25000"/>
+                  </a:schemeClr>
+                </a:solidFill>
+                <a:latin typeface="+mn-lt"/>
+                <a:ea typeface="+mn-ea"/>
+                <a:cs typeface="+mn-cs"/>
+              </a:defRPr>
+            </a:lvl9pPr>
+          </a:lstStyle>
+          <a:p>
+            <a:endParaRPr lang="en-IN" sz="2200" dirty="0"/>
+          </a:p>
+        </p:txBody>
+      </p:sp>
+      <p:sp>
+        <p:nvSpPr>
+          <p:cNvPr id="30" name="Text Placeholder 30">
+            <a:extLst>
+              <a:ext uri="{FF2B5EF4-FFF2-40B4-BE49-F238E27FC236}">
+                <a16:creationId xmlns:a16="http://schemas.microsoft.com/office/drawing/2014/main" id="{D3BF02F6-2753-476A-8046-A85AE3A49748}"/>
+              </a:ext>
+            </a:extLst>
+          </p:cNvPr>
+          <p:cNvSpPr txBox="1">
+            <a:spLocks/>
+          </p:cNvSpPr>
+          <p:nvPr/>
+        </p:nvSpPr>
+        <p:spPr>
+          <a:xfrm>
+            <a:off x="6096000" y="4641925"/>
+            <a:ext cx="2139695" cy="1108635"/>
+          </a:xfrm>
+          <a:prstGeom prst="rect">
+            <a:avLst/>
+          </a:prstGeom>
+        </p:spPr>
+        <p:txBody>
+          <a:bodyPr vert="horz" lIns="91440" tIns="45720" rIns="91440" bIns="45720" rtlCol="0">
+            <a:normAutofit/>
+          </a:bodyPr>
+          <a:lstStyle>
+            <a:lvl1pPr marL="0" indent="0" algn="ctr" defTabSz="457200" rtl="0" eaLnBrk="1" latinLnBrk="0" hangingPunct="1">
+              <a:spcBef>
+                <a:spcPts val="1000"/>
+              </a:spcBef>
+              <a:spcAft>
+                <a:spcPts val="0"/>
+              </a:spcAft>
+              <a:buClr>
+                <a:schemeClr val="accent1"/>
+              </a:buClr>
+              <a:buSzPct val="80000"/>
+              <a:buFont typeface="Wingdings 3" charset="2"/>
+              <a:buNone/>
+              <a:defRPr lang="en-US" sz="1600" kern="1200" dirty="0" smtClean="0">
+                <a:solidFill>
+                  <a:schemeClr val="tx1"/>
+                </a:solidFill>
+                <a:latin typeface="+mn-lt"/>
+                <a:ea typeface="+mn-ea"/>
+                <a:cs typeface="+mn-cs"/>
+              </a:defRPr>
+            </a:lvl1pPr>
+            <a:lvl2pPr marL="742950" indent="-285750" algn="l" defTabSz="457200" rtl="0" eaLnBrk="1" latinLnBrk="0" hangingPunct="1">
+              <a:spcBef>
+                <a:spcPts val="1000"/>
+              </a:spcBef>
+              <a:spcAft>
+                <a:spcPts val="0"/>
+              </a:spcAft>
+              <a:buClr>
+                <a:schemeClr val="accent1"/>
+              </a:buClr>
+              <a:buSzPct val="80000"/>
+              <a:buFont typeface="Wingdings 3" charset="2"/>
+              <a:buChar char=""/>
+              <a:defRPr sz="1600" kern="1200">
+                <a:solidFill>
+                  <a:schemeClr val="tx1">
+                    <a:lumMod val="75000"/>
+                    <a:lumOff val="25000"/>
+                  </a:schemeClr>
+                </a:solidFill>
+                <a:latin typeface="+mn-lt"/>
+                <a:ea typeface="+mn-ea"/>
+                <a:cs typeface="+mn-cs"/>
+              </a:defRPr>
+            </a:lvl2pPr>
+            <a:lvl3pPr marL="1143000" indent="-228600" algn="l" defTabSz="457200" rtl="0" eaLnBrk="1" latinLnBrk="0" hangingPunct="1">
+              <a:spcBef>
+                <a:spcPts val="1000"/>
+              </a:spcBef>
+              <a:spcAft>
+                <a:spcPts val="0"/>
+              </a:spcAft>
+              <a:buClr>
+                <a:schemeClr val="accent1"/>
+              </a:buClr>
+              <a:buSzPct val="80000"/>
+              <a:buFont typeface="Wingdings 3" charset="2"/>
+              <a:buChar char=""/>
+              <a:defRPr sz="1400" kern="1200">
+                <a:solidFill>
+                  <a:schemeClr val="tx1">
+                    <a:lumMod val="75000"/>
+                    <a:lumOff val="25000"/>
+                  </a:schemeClr>
+                </a:solidFill>
+                <a:latin typeface="+mn-lt"/>
+                <a:ea typeface="+mn-ea"/>
+                <a:cs typeface="+mn-cs"/>
+              </a:defRPr>
+            </a:lvl3pPr>
+            <a:lvl4pPr marL="1600200" indent="-228600" algn="l" defTabSz="457200" rtl="0" eaLnBrk="1" latinLnBrk="0" hangingPunct="1">
+              <a:spcBef>
+                <a:spcPts val="1000"/>
+              </a:spcBef>
+              <a:spcAft>
+                <a:spcPts val="0"/>
+              </a:spcAft>
+              <a:buClr>
+                <a:schemeClr val="accent1"/>
+              </a:buClr>
+              <a:buSzPct val="80000"/>
+              <a:buFont typeface="Wingdings 3" charset="2"/>
+              <a:buChar char=""/>
+              <a:defRPr sz="1200" kern="1200">
+                <a:solidFill>
+                  <a:schemeClr val="tx1">
+                    <a:lumMod val="75000"/>
+                    <a:lumOff val="25000"/>
+                  </a:schemeClr>
+                </a:solidFill>
+                <a:latin typeface="+mn-lt"/>
+                <a:ea typeface="+mn-ea"/>
+                <a:cs typeface="+mn-cs"/>
+              </a:defRPr>
+            </a:lvl4pPr>
+            <a:lvl5pPr marL="2057400" indent="-228600" algn="l" defTabSz="457200" rtl="0" eaLnBrk="1" latinLnBrk="0" hangingPunct="1">
+              <a:spcBef>
+                <a:spcPts val="1000"/>
+              </a:spcBef>
+              <a:spcAft>
+                <a:spcPts val="0"/>
+              </a:spcAft>
+              <a:buClr>
+                <a:schemeClr val="accent1"/>
+              </a:buClr>
+              <a:buSzPct val="80000"/>
+              <a:buFont typeface="Wingdings 3" charset="2"/>
+              <a:buChar char=""/>
+              <a:defRPr sz="1200" kern="1200">
+                <a:solidFill>
+                  <a:schemeClr val="tx1">
+                    <a:lumMod val="75000"/>
+                    <a:lumOff val="25000"/>
+                  </a:schemeClr>
+                </a:solidFill>
+                <a:latin typeface="+mn-lt"/>
+                <a:ea typeface="+mn-ea"/>
+                <a:cs typeface="+mn-cs"/>
+              </a:defRPr>
+            </a:lvl5pPr>
+            <a:lvl6pPr marL="2514600" indent="-228600" algn="l" defTabSz="457200" rtl="0" eaLnBrk="1" latinLnBrk="0" hangingPunct="1">
+              <a:spcBef>
+                <a:spcPts val="1000"/>
+              </a:spcBef>
+              <a:spcAft>
+                <a:spcPts val="0"/>
+              </a:spcAft>
+              <a:buClr>
+                <a:schemeClr val="accent1"/>
+              </a:buClr>
+              <a:buSzPct val="80000"/>
+              <a:buFont typeface="Wingdings 3" charset="2"/>
+              <a:buChar char=""/>
+              <a:defRPr sz="1200" kern="1200">
+                <a:solidFill>
+                  <a:schemeClr val="tx1">
+                    <a:lumMod val="75000"/>
+                    <a:lumOff val="25000"/>
+                  </a:schemeClr>
+                </a:solidFill>
+                <a:latin typeface="+mn-lt"/>
+                <a:ea typeface="+mn-ea"/>
+                <a:cs typeface="+mn-cs"/>
+              </a:defRPr>
+            </a:lvl6pPr>
+            <a:lvl7pPr marL="2971800" indent="-228600" algn="l" defTabSz="457200" rtl="0" eaLnBrk="1" latinLnBrk="0" hangingPunct="1">
+              <a:spcBef>
+                <a:spcPts val="1000"/>
+              </a:spcBef>
+              <a:spcAft>
+                <a:spcPts val="0"/>
+              </a:spcAft>
+              <a:buClr>
+                <a:schemeClr val="accent1"/>
+              </a:buClr>
+              <a:buSzPct val="80000"/>
+              <a:buFont typeface="Wingdings 3" charset="2"/>
+              <a:buChar char=""/>
+              <a:defRPr sz="1200" kern="1200">
+                <a:solidFill>
+                  <a:schemeClr val="tx1">
+                    <a:lumMod val="75000"/>
+                    <a:lumOff val="25000"/>
+                  </a:schemeClr>
+                </a:solidFill>
+                <a:latin typeface="+mn-lt"/>
+                <a:ea typeface="+mn-ea"/>
+                <a:cs typeface="+mn-cs"/>
+              </a:defRPr>
+            </a:lvl7pPr>
+            <a:lvl8pPr marL="3429000" indent="-228600" algn="l" defTabSz="457200" rtl="0" eaLnBrk="1" latinLnBrk="0" hangingPunct="1">
+              <a:spcBef>
+                <a:spcPts val="1000"/>
+              </a:spcBef>
+              <a:spcAft>
+                <a:spcPts val="0"/>
+              </a:spcAft>
+              <a:buClr>
+                <a:schemeClr val="accent1"/>
+              </a:buClr>
+              <a:buSzPct val="80000"/>
+              <a:buFont typeface="Wingdings 3" charset="2"/>
+              <a:buChar char=""/>
+              <a:defRPr sz="1200" kern="1200">
+                <a:solidFill>
+                  <a:schemeClr val="tx1">
+                    <a:lumMod val="75000"/>
+                    <a:lumOff val="25000"/>
+                  </a:schemeClr>
+                </a:solidFill>
+                <a:latin typeface="+mn-lt"/>
+                <a:ea typeface="+mn-ea"/>
+                <a:cs typeface="+mn-cs"/>
+              </a:defRPr>
+            </a:lvl8pPr>
+            <a:lvl9pPr marL="3886200" indent="-228600" algn="l" defTabSz="457200" rtl="0" eaLnBrk="1" latinLnBrk="0" hangingPunct="1">
+              <a:spcBef>
+                <a:spcPts val="1000"/>
+              </a:spcBef>
+              <a:spcAft>
+                <a:spcPts val="0"/>
+              </a:spcAft>
+              <a:buClr>
+                <a:schemeClr val="accent1"/>
+              </a:buClr>
+              <a:buSzPct val="80000"/>
+              <a:buFont typeface="Wingdings 3" charset="2"/>
+              <a:buChar char=""/>
+              <a:defRPr sz="1200" kern="1200">
+                <a:solidFill>
+                  <a:schemeClr val="tx1">
+                    <a:lumMod val="75000"/>
+                    <a:lumOff val="25000"/>
+                  </a:schemeClr>
+                </a:solidFill>
+                <a:latin typeface="+mn-lt"/>
+                <a:ea typeface="+mn-ea"/>
+                <a:cs typeface="+mn-cs"/>
+              </a:defRPr>
+            </a:lvl9pPr>
+          </a:lstStyle>
+          <a:p>
+            <a:endParaRPr lang="en-GB" dirty="0"/>
+          </a:p>
+        </p:txBody>
+      </p:sp>
+      <p:sp>
+        <p:nvSpPr>
+          <p:cNvPr id="32" name="Text Placeholder 30">
+            <a:extLst>
+              <a:ext uri="{FF2B5EF4-FFF2-40B4-BE49-F238E27FC236}">
+                <a16:creationId xmlns:a16="http://schemas.microsoft.com/office/drawing/2014/main" id="{B993AB29-3A3A-4473-8AC8-86E859C97321}"/>
+              </a:ext>
+            </a:extLst>
+          </p:cNvPr>
+          <p:cNvSpPr txBox="1">
+            <a:spLocks/>
+          </p:cNvSpPr>
+          <p:nvPr/>
+        </p:nvSpPr>
+        <p:spPr>
+          <a:xfrm>
+            <a:off x="8591363" y="4641925"/>
+            <a:ext cx="2139695" cy="1108635"/>
+          </a:xfrm>
+          <a:prstGeom prst="rect">
+            <a:avLst/>
+          </a:prstGeom>
+        </p:spPr>
+        <p:txBody>
+          <a:bodyPr vert="horz" lIns="91440" tIns="45720" rIns="91440" bIns="45720" rtlCol="0">
+            <a:normAutofit/>
+          </a:bodyPr>
+          <a:lstStyle>
+            <a:lvl1pPr marL="0" indent="0" algn="ctr" defTabSz="457200" rtl="0" eaLnBrk="1" latinLnBrk="0" hangingPunct="1">
+              <a:spcBef>
+                <a:spcPts val="1000"/>
+              </a:spcBef>
+              <a:spcAft>
+                <a:spcPts val="0"/>
+              </a:spcAft>
+              <a:buClr>
+                <a:schemeClr val="accent1"/>
+              </a:buClr>
+              <a:buSzPct val="80000"/>
+              <a:buFont typeface="Wingdings 3" charset="2"/>
+              <a:buNone/>
+              <a:defRPr lang="en-US" sz="1600" kern="1200" dirty="0" smtClean="0">
+                <a:solidFill>
+                  <a:schemeClr val="tx1"/>
+                </a:solidFill>
+                <a:latin typeface="+mn-lt"/>
+                <a:ea typeface="+mn-ea"/>
+                <a:cs typeface="+mn-cs"/>
+              </a:defRPr>
+            </a:lvl1pPr>
+            <a:lvl2pPr marL="742950" indent="-285750" algn="l" defTabSz="457200" rtl="0" eaLnBrk="1" latinLnBrk="0" hangingPunct="1">
+              <a:spcBef>
+                <a:spcPts val="1000"/>
+              </a:spcBef>
+              <a:spcAft>
+                <a:spcPts val="0"/>
+              </a:spcAft>
+              <a:buClr>
+                <a:schemeClr val="accent1"/>
+              </a:buClr>
+              <a:buSzPct val="80000"/>
+              <a:buFont typeface="Wingdings 3" charset="2"/>
+              <a:buChar char=""/>
+              <a:defRPr sz="1600" kern="1200">
+                <a:solidFill>
+                  <a:schemeClr val="tx1">
+                    <a:lumMod val="75000"/>
+                    <a:lumOff val="25000"/>
+                  </a:schemeClr>
+                </a:solidFill>
+                <a:latin typeface="+mn-lt"/>
+                <a:ea typeface="+mn-ea"/>
+                <a:cs typeface="+mn-cs"/>
+              </a:defRPr>
+            </a:lvl2pPr>
+            <a:lvl3pPr marL="1143000" indent="-228600" algn="l" defTabSz="457200" rtl="0" eaLnBrk="1" latinLnBrk="0" hangingPunct="1">
+              <a:spcBef>
+                <a:spcPts val="1000"/>
+              </a:spcBef>
+              <a:spcAft>
+                <a:spcPts val="0"/>
+              </a:spcAft>
+              <a:buClr>
+                <a:schemeClr val="accent1"/>
+              </a:buClr>
+              <a:buSzPct val="80000"/>
+              <a:buFont typeface="Wingdings 3" charset="2"/>
+              <a:buChar char=""/>
+              <a:defRPr sz="1400" kern="1200">
+                <a:solidFill>
+                  <a:schemeClr val="tx1">
+                    <a:lumMod val="75000"/>
+                    <a:lumOff val="25000"/>
+                  </a:schemeClr>
+                </a:solidFill>
+                <a:latin typeface="+mn-lt"/>
+                <a:ea typeface="+mn-ea"/>
+                <a:cs typeface="+mn-cs"/>
+              </a:defRPr>
+            </a:lvl3pPr>
+            <a:lvl4pPr marL="1600200" indent="-228600" algn="l" defTabSz="457200" rtl="0" eaLnBrk="1" latinLnBrk="0" hangingPunct="1">
+              <a:spcBef>
+                <a:spcPts val="1000"/>
+              </a:spcBef>
+              <a:spcAft>
+                <a:spcPts val="0"/>
+              </a:spcAft>
+              <a:buClr>
+                <a:schemeClr val="accent1"/>
+              </a:buClr>
+              <a:buSzPct val="80000"/>
+              <a:buFont typeface="Wingdings 3" charset="2"/>
+              <a:buChar char=""/>
+              <a:defRPr sz="1200" kern="1200">
+                <a:solidFill>
+                  <a:schemeClr val="tx1">
+                    <a:lumMod val="75000"/>
+                    <a:lumOff val="25000"/>
+                  </a:schemeClr>
+                </a:solidFill>
+                <a:latin typeface="+mn-lt"/>
+                <a:ea typeface="+mn-ea"/>
+                <a:cs typeface="+mn-cs"/>
+              </a:defRPr>
+            </a:lvl4pPr>
+            <a:lvl5pPr marL="2057400" indent="-228600" algn="l" defTabSz="457200" rtl="0" eaLnBrk="1" latinLnBrk="0" hangingPunct="1">
+              <a:spcBef>
+                <a:spcPts val="1000"/>
+              </a:spcBef>
+              <a:spcAft>
+                <a:spcPts val="0"/>
+              </a:spcAft>
+              <a:buClr>
+                <a:schemeClr val="accent1"/>
+              </a:buClr>
+              <a:buSzPct val="80000"/>
+              <a:buFont typeface="Wingdings 3" charset="2"/>
+              <a:buChar char=""/>
+              <a:defRPr sz="1200" kern="1200">
+                <a:solidFill>
+                  <a:schemeClr val="tx1">
+                    <a:lumMod val="75000"/>
+                    <a:lumOff val="25000"/>
+                  </a:schemeClr>
+                </a:solidFill>
+                <a:latin typeface="+mn-lt"/>
+                <a:ea typeface="+mn-ea"/>
+                <a:cs typeface="+mn-cs"/>
+              </a:defRPr>
+            </a:lvl5pPr>
+            <a:lvl6pPr marL="2514600" indent="-228600" algn="l" defTabSz="457200" rtl="0" eaLnBrk="1" latinLnBrk="0" hangingPunct="1">
+              <a:spcBef>
+                <a:spcPts val="1000"/>
+              </a:spcBef>
+              <a:spcAft>
+                <a:spcPts val="0"/>
+              </a:spcAft>
+              <a:buClr>
+                <a:schemeClr val="accent1"/>
+              </a:buClr>
+              <a:buSzPct val="80000"/>
+              <a:buFont typeface="Wingdings 3" charset="2"/>
+              <a:buChar char=""/>
+              <a:defRPr sz="1200" kern="1200">
+                <a:solidFill>
+                  <a:schemeClr val="tx1">
+                    <a:lumMod val="75000"/>
+                    <a:lumOff val="25000"/>
+                  </a:schemeClr>
+                </a:solidFill>
+                <a:latin typeface="+mn-lt"/>
+                <a:ea typeface="+mn-ea"/>
+                <a:cs typeface="+mn-cs"/>
+              </a:defRPr>
+            </a:lvl6pPr>
+            <a:lvl7pPr marL="2971800" indent="-228600" algn="l" defTabSz="457200" rtl="0" eaLnBrk="1" latinLnBrk="0" hangingPunct="1">
+              <a:spcBef>
+                <a:spcPts val="1000"/>
+              </a:spcBef>
+              <a:spcAft>
+                <a:spcPts val="0"/>
+              </a:spcAft>
+              <a:buClr>
+                <a:schemeClr val="accent1"/>
+              </a:buClr>
+              <a:buSzPct val="80000"/>
+              <a:buFont typeface="Wingdings 3" charset="2"/>
+              <a:buChar char=""/>
+              <a:defRPr sz="1200" kern="1200">
+                <a:solidFill>
+                  <a:schemeClr val="tx1">
+                    <a:lumMod val="75000"/>
+                    <a:lumOff val="25000"/>
+                  </a:schemeClr>
+                </a:solidFill>
+                <a:latin typeface="+mn-lt"/>
+                <a:ea typeface="+mn-ea"/>
+                <a:cs typeface="+mn-cs"/>
+              </a:defRPr>
+            </a:lvl7pPr>
+            <a:lvl8pPr marL="3429000" indent="-228600" algn="l" defTabSz="457200" rtl="0" eaLnBrk="1" latinLnBrk="0" hangingPunct="1">
+              <a:spcBef>
+                <a:spcPts val="1000"/>
+              </a:spcBef>
+              <a:spcAft>
+                <a:spcPts val="0"/>
+              </a:spcAft>
+              <a:buClr>
+                <a:schemeClr val="accent1"/>
+              </a:buClr>
+              <a:buSzPct val="80000"/>
+              <a:buFont typeface="Wingdings 3" charset="2"/>
+              <a:buChar char=""/>
+              <a:defRPr sz="1200" kern="1200">
+                <a:solidFill>
+                  <a:schemeClr val="tx1">
+                    <a:lumMod val="75000"/>
+                    <a:lumOff val="25000"/>
+                  </a:schemeClr>
+                </a:solidFill>
+                <a:latin typeface="+mn-lt"/>
+                <a:ea typeface="+mn-ea"/>
+                <a:cs typeface="+mn-cs"/>
+              </a:defRPr>
+            </a:lvl8pPr>
+            <a:lvl9pPr marL="3886200" indent="-228600" algn="l" defTabSz="457200" rtl="0" eaLnBrk="1" latinLnBrk="0" hangingPunct="1">
+              <a:spcBef>
+                <a:spcPts val="1000"/>
+              </a:spcBef>
+              <a:spcAft>
+                <a:spcPts val="0"/>
+              </a:spcAft>
+              <a:buClr>
+                <a:schemeClr val="accent1"/>
+              </a:buClr>
+              <a:buSzPct val="80000"/>
+              <a:buFont typeface="Wingdings 3" charset="2"/>
+              <a:buChar char=""/>
+              <a:defRPr sz="1200" kern="1200">
+                <a:solidFill>
+                  <a:schemeClr val="tx1">
+                    <a:lumMod val="75000"/>
+                    <a:lumOff val="25000"/>
+                  </a:schemeClr>
+                </a:solidFill>
+                <a:latin typeface="+mn-lt"/>
+                <a:ea typeface="+mn-ea"/>
+                <a:cs typeface="+mn-cs"/>
+              </a:defRPr>
+            </a:lvl9pPr>
+          </a:lstStyle>
+          <a:p>
+            <a:r>
+              <a:rPr lang="en-GB" dirty="0"/>
+              <a:t>.</a:t>
+            </a:r>
+          </a:p>
+        </p:txBody>
+      </p:sp>
       <p:pic>
         <p:nvPicPr>
-          <p:cNvPr id="5" name="Picture 4">
+          <p:cNvPr id="15" name="Picture 14">
             <a:extLst>
               <a:ext uri="{FF2B5EF4-FFF2-40B4-BE49-F238E27FC236}">
-                <a16:creationId xmlns:a16="http://schemas.microsoft.com/office/drawing/2014/main" id="{04506C61-5206-F1DF-9994-DED24DFB1C65}"/>
+                <a16:creationId xmlns:a16="http://schemas.microsoft.com/office/drawing/2014/main" id="{BD3F9E86-2FB3-4DB3-9343-59D594F350A0}"/>
               </a:ext>
             </a:extLst>
           </p:cNvPr>
@@ -12732,10 +14155,10 @@
       </p:pic>
       <p:sp>
         <p:nvSpPr>
-          <p:cNvPr id="4" name="Title 3">
+          <p:cNvPr id="12" name="Text Placeholder 11">
             <a:extLst>
               <a:ext uri="{FF2B5EF4-FFF2-40B4-BE49-F238E27FC236}">
-                <a16:creationId xmlns:a16="http://schemas.microsoft.com/office/drawing/2014/main" id="{9B097C2C-D75A-31D4-CD9F-366F39CDE51D}"/>
+                <a16:creationId xmlns:a16="http://schemas.microsoft.com/office/drawing/2014/main" id="{BC277FD7-925B-4C3D-A364-118403201507}"/>
               </a:ext>
             </a:extLst>
           </p:cNvPr>
@@ -12743,661 +14166,227 @@
             <a:spLocks noGrp="1"/>
           </p:cNvSpPr>
           <p:nvPr>
-            <p:ph type="title"/>
+            <p:ph type="body" sz="quarter" idx="12"/>
           </p:nvPr>
         </p:nvSpPr>
         <p:spPr>
           <a:xfrm>
-            <a:off x="675957" y="286871"/>
-            <a:ext cx="4735798" cy="842683"/>
+            <a:off x="1287971" y="1187525"/>
+            <a:ext cx="8373239" cy="5284395"/>
           </a:xfrm>
         </p:spPr>
         <p:txBody>
           <a:bodyPr>
-            <a:normAutofit/>
+            <a:normAutofit fontScale="77500" lnSpcReduction="20000"/>
           </a:bodyPr>
           <a:lstStyle/>
           <a:p>
-            <a:r>
-              <a:rPr lang="en-IN" sz="4000" dirty="0"/>
-              <a:t>Future scope</a:t>
-            </a:r>
-          </a:p>
-        </p:txBody>
-      </p:sp>
-      <p:sp>
-        <p:nvSpPr>
-          <p:cNvPr id="7" name="Text Placeholder 30">
-            <a:extLst>
-              <a:ext uri="{FF2B5EF4-FFF2-40B4-BE49-F238E27FC236}">
-                <a16:creationId xmlns:a16="http://schemas.microsoft.com/office/drawing/2014/main" id="{B7444DDE-63A3-9721-77CC-C93FED110DAF}"/>
-              </a:ext>
-            </a:extLst>
-          </p:cNvPr>
-          <p:cNvSpPr txBox="1">
-            <a:spLocks/>
-          </p:cNvSpPr>
-          <p:nvPr/>
-        </p:nvSpPr>
-        <p:spPr>
-          <a:xfrm>
-            <a:off x="348974" y="1275371"/>
-            <a:ext cx="3343561" cy="666078"/>
-          </a:xfrm>
-          <a:prstGeom prst="rect">
-            <a:avLst/>
-          </a:prstGeom>
-        </p:spPr>
-        <p:txBody>
-          <a:bodyPr vert="horz" lIns="91440" tIns="45720" rIns="91440" bIns="45720" rtlCol="0">
-            <a:normAutofit/>
-          </a:bodyPr>
-          <a:lstStyle>
-            <a:lvl1pPr marL="0" indent="0" algn="ctr" defTabSz="457200" rtl="0" eaLnBrk="1" latinLnBrk="0" hangingPunct="1">
-              <a:spcBef>
-                <a:spcPts val="1000"/>
-              </a:spcBef>
-              <a:spcAft>
-                <a:spcPts val="0"/>
-              </a:spcAft>
-              <a:buClr>
-                <a:schemeClr val="accent1"/>
-              </a:buClr>
-              <a:buSzPct val="80000"/>
-              <a:buFont typeface="Wingdings 3" charset="2"/>
-              <a:buNone/>
-              <a:defRPr lang="en-US" sz="1600" kern="1200" dirty="0" smtClean="0">
-                <a:solidFill>
-                  <a:schemeClr val="tx1"/>
-                </a:solidFill>
-                <a:latin typeface="+mn-lt"/>
-                <a:ea typeface="+mn-ea"/>
-                <a:cs typeface="+mn-cs"/>
-              </a:defRPr>
-            </a:lvl1pPr>
-            <a:lvl2pPr marL="742950" indent="-285750" algn="l" defTabSz="457200" rtl="0" eaLnBrk="1" latinLnBrk="0" hangingPunct="1">
-              <a:spcBef>
-                <a:spcPts val="1000"/>
-              </a:spcBef>
-              <a:spcAft>
-                <a:spcPts val="0"/>
-              </a:spcAft>
-              <a:buClr>
-                <a:schemeClr val="accent1"/>
-              </a:buClr>
-              <a:buSzPct val="80000"/>
-              <a:buFont typeface="Wingdings 3" charset="2"/>
-              <a:buChar char=""/>
-              <a:defRPr sz="1600" kern="1200">
-                <a:solidFill>
-                  <a:schemeClr val="tx1">
-                    <a:lumMod val="75000"/>
-                    <a:lumOff val="25000"/>
-                  </a:schemeClr>
-                </a:solidFill>
-                <a:latin typeface="+mn-lt"/>
-                <a:ea typeface="+mn-ea"/>
-                <a:cs typeface="+mn-cs"/>
-              </a:defRPr>
-            </a:lvl2pPr>
-            <a:lvl3pPr marL="1143000" indent="-228600" algn="l" defTabSz="457200" rtl="0" eaLnBrk="1" latinLnBrk="0" hangingPunct="1">
-              <a:spcBef>
-                <a:spcPts val="1000"/>
-              </a:spcBef>
-              <a:spcAft>
-                <a:spcPts val="0"/>
-              </a:spcAft>
-              <a:buClr>
-                <a:schemeClr val="accent1"/>
-              </a:buClr>
-              <a:buSzPct val="80000"/>
-              <a:buFont typeface="Wingdings 3" charset="2"/>
-              <a:buChar char=""/>
-              <a:defRPr sz="1400" kern="1200">
-                <a:solidFill>
-                  <a:schemeClr val="tx1">
-                    <a:lumMod val="75000"/>
-                    <a:lumOff val="25000"/>
-                  </a:schemeClr>
-                </a:solidFill>
-                <a:latin typeface="+mn-lt"/>
-                <a:ea typeface="+mn-ea"/>
-                <a:cs typeface="+mn-cs"/>
-              </a:defRPr>
-            </a:lvl3pPr>
-            <a:lvl4pPr marL="1600200" indent="-228600" algn="l" defTabSz="457200" rtl="0" eaLnBrk="1" latinLnBrk="0" hangingPunct="1">
-              <a:spcBef>
-                <a:spcPts val="1000"/>
-              </a:spcBef>
-              <a:spcAft>
-                <a:spcPts val="0"/>
-              </a:spcAft>
-              <a:buClr>
-                <a:schemeClr val="accent1"/>
-              </a:buClr>
-              <a:buSzPct val="80000"/>
-              <a:buFont typeface="Wingdings 3" charset="2"/>
-              <a:buChar char=""/>
-              <a:defRPr sz="1200" kern="1200">
-                <a:solidFill>
-                  <a:schemeClr val="tx1">
-                    <a:lumMod val="75000"/>
-                    <a:lumOff val="25000"/>
-                  </a:schemeClr>
-                </a:solidFill>
-                <a:latin typeface="+mn-lt"/>
-                <a:ea typeface="+mn-ea"/>
-                <a:cs typeface="+mn-cs"/>
-              </a:defRPr>
-            </a:lvl4pPr>
-            <a:lvl5pPr marL="2057400" indent="-228600" algn="l" defTabSz="457200" rtl="0" eaLnBrk="1" latinLnBrk="0" hangingPunct="1">
-              <a:spcBef>
-                <a:spcPts val="1000"/>
-              </a:spcBef>
-              <a:spcAft>
-                <a:spcPts val="0"/>
-              </a:spcAft>
-              <a:buClr>
-                <a:schemeClr val="accent1"/>
-              </a:buClr>
-              <a:buSzPct val="80000"/>
-              <a:buFont typeface="Wingdings 3" charset="2"/>
-              <a:buChar char=""/>
-              <a:defRPr sz="1200" kern="1200">
-                <a:solidFill>
-                  <a:schemeClr val="tx1">
-                    <a:lumMod val="75000"/>
-                    <a:lumOff val="25000"/>
-                  </a:schemeClr>
-                </a:solidFill>
-                <a:latin typeface="+mn-lt"/>
-                <a:ea typeface="+mn-ea"/>
-                <a:cs typeface="+mn-cs"/>
-              </a:defRPr>
-            </a:lvl5pPr>
-            <a:lvl6pPr marL="2514600" indent="-228600" algn="l" defTabSz="457200" rtl="0" eaLnBrk="1" latinLnBrk="0" hangingPunct="1">
-              <a:spcBef>
-                <a:spcPts val="1000"/>
-              </a:spcBef>
-              <a:spcAft>
-                <a:spcPts val="0"/>
-              </a:spcAft>
-              <a:buClr>
-                <a:schemeClr val="accent1"/>
-              </a:buClr>
-              <a:buSzPct val="80000"/>
-              <a:buFont typeface="Wingdings 3" charset="2"/>
-              <a:buChar char=""/>
-              <a:defRPr sz="1200" kern="1200">
-                <a:solidFill>
-                  <a:schemeClr val="tx1">
-                    <a:lumMod val="75000"/>
-                    <a:lumOff val="25000"/>
-                  </a:schemeClr>
-                </a:solidFill>
-                <a:latin typeface="+mn-lt"/>
-                <a:ea typeface="+mn-ea"/>
-                <a:cs typeface="+mn-cs"/>
-              </a:defRPr>
-            </a:lvl6pPr>
-            <a:lvl7pPr marL="2971800" indent="-228600" algn="l" defTabSz="457200" rtl="0" eaLnBrk="1" latinLnBrk="0" hangingPunct="1">
-              <a:spcBef>
-                <a:spcPts val="1000"/>
-              </a:spcBef>
-              <a:spcAft>
-                <a:spcPts val="0"/>
-              </a:spcAft>
-              <a:buClr>
-                <a:schemeClr val="accent1"/>
-              </a:buClr>
-              <a:buSzPct val="80000"/>
-              <a:buFont typeface="Wingdings 3" charset="2"/>
-              <a:buChar char=""/>
-              <a:defRPr sz="1200" kern="1200">
-                <a:solidFill>
-                  <a:schemeClr val="tx1">
-                    <a:lumMod val="75000"/>
-                    <a:lumOff val="25000"/>
-                  </a:schemeClr>
-                </a:solidFill>
-                <a:latin typeface="+mn-lt"/>
-                <a:ea typeface="+mn-ea"/>
-                <a:cs typeface="+mn-cs"/>
-              </a:defRPr>
-            </a:lvl7pPr>
-            <a:lvl8pPr marL="3429000" indent="-228600" algn="l" defTabSz="457200" rtl="0" eaLnBrk="1" latinLnBrk="0" hangingPunct="1">
-              <a:spcBef>
-                <a:spcPts val="1000"/>
-              </a:spcBef>
-              <a:spcAft>
-                <a:spcPts val="0"/>
-              </a:spcAft>
-              <a:buClr>
-                <a:schemeClr val="accent1"/>
-              </a:buClr>
-              <a:buSzPct val="80000"/>
-              <a:buFont typeface="Wingdings 3" charset="2"/>
-              <a:buChar char=""/>
-              <a:defRPr sz="1200" kern="1200">
-                <a:solidFill>
-                  <a:schemeClr val="tx1">
-                    <a:lumMod val="75000"/>
-                    <a:lumOff val="25000"/>
-                  </a:schemeClr>
-                </a:solidFill>
-                <a:latin typeface="+mn-lt"/>
-                <a:ea typeface="+mn-ea"/>
-                <a:cs typeface="+mn-cs"/>
-              </a:defRPr>
-            </a:lvl8pPr>
-            <a:lvl9pPr marL="3886200" indent="-228600" algn="l" defTabSz="457200" rtl="0" eaLnBrk="1" latinLnBrk="0" hangingPunct="1">
-              <a:spcBef>
-                <a:spcPts val="1000"/>
-              </a:spcBef>
-              <a:spcAft>
-                <a:spcPts val="0"/>
-              </a:spcAft>
-              <a:buClr>
-                <a:schemeClr val="accent1"/>
-              </a:buClr>
-              <a:buSzPct val="80000"/>
-              <a:buFont typeface="Wingdings 3" charset="2"/>
-              <a:buChar char=""/>
-              <a:defRPr sz="1200" kern="1200">
-                <a:solidFill>
-                  <a:schemeClr val="tx1">
-                    <a:lumMod val="75000"/>
-                    <a:lumOff val="25000"/>
-                  </a:schemeClr>
-                </a:solidFill>
-                <a:latin typeface="+mn-lt"/>
-                <a:ea typeface="+mn-ea"/>
-                <a:cs typeface="+mn-cs"/>
-              </a:defRPr>
-            </a:lvl9pPr>
-          </a:lstStyle>
-          <a:p>
-            <a:endParaRPr lang="en-GB" sz="2000" dirty="0"/>
-          </a:p>
-        </p:txBody>
-      </p:sp>
-      <p:sp>
-        <p:nvSpPr>
-          <p:cNvPr id="8" name="Text Placeholder 30">
-            <a:extLst>
-              <a:ext uri="{FF2B5EF4-FFF2-40B4-BE49-F238E27FC236}">
-                <a16:creationId xmlns:a16="http://schemas.microsoft.com/office/drawing/2014/main" id="{2C8A8B73-0C64-E012-F561-D7FE5E322230}"/>
-              </a:ext>
-            </a:extLst>
-          </p:cNvPr>
-          <p:cNvSpPr txBox="1">
-            <a:spLocks/>
-          </p:cNvSpPr>
-          <p:nvPr/>
-        </p:nvSpPr>
-        <p:spPr>
-          <a:xfrm>
-            <a:off x="4345694" y="1275371"/>
-            <a:ext cx="3343561" cy="666078"/>
-          </a:xfrm>
-          <a:prstGeom prst="rect">
-            <a:avLst/>
-          </a:prstGeom>
-        </p:spPr>
-        <p:txBody>
-          <a:bodyPr vert="horz" lIns="91440" tIns="45720" rIns="91440" bIns="45720" rtlCol="0">
-            <a:normAutofit/>
-          </a:bodyPr>
-          <a:lstStyle>
-            <a:lvl1pPr marL="0" indent="0" algn="ctr" defTabSz="457200" rtl="0" eaLnBrk="1" latinLnBrk="0" hangingPunct="1">
-              <a:spcBef>
-                <a:spcPts val="1000"/>
-              </a:spcBef>
-              <a:spcAft>
-                <a:spcPts val="0"/>
-              </a:spcAft>
-              <a:buClr>
-                <a:schemeClr val="accent1"/>
-              </a:buClr>
-              <a:buSzPct val="80000"/>
-              <a:buFont typeface="Wingdings 3" charset="2"/>
-              <a:buNone/>
-              <a:defRPr lang="en-US" sz="1600" kern="1200" dirty="0" smtClean="0">
-                <a:solidFill>
-                  <a:schemeClr val="tx1"/>
-                </a:solidFill>
-                <a:latin typeface="+mn-lt"/>
-                <a:ea typeface="+mn-ea"/>
-                <a:cs typeface="+mn-cs"/>
-              </a:defRPr>
-            </a:lvl1pPr>
-            <a:lvl2pPr marL="742950" indent="-285750" algn="l" defTabSz="457200" rtl="0" eaLnBrk="1" latinLnBrk="0" hangingPunct="1">
-              <a:spcBef>
-                <a:spcPts val="1000"/>
-              </a:spcBef>
-              <a:spcAft>
-                <a:spcPts val="0"/>
-              </a:spcAft>
-              <a:buClr>
-                <a:schemeClr val="accent1"/>
-              </a:buClr>
-              <a:buSzPct val="80000"/>
-              <a:buFont typeface="Wingdings 3" charset="2"/>
-              <a:buChar char=""/>
-              <a:defRPr sz="1600" kern="1200">
-                <a:solidFill>
-                  <a:schemeClr val="tx1">
-                    <a:lumMod val="75000"/>
-                    <a:lumOff val="25000"/>
-                  </a:schemeClr>
-                </a:solidFill>
-                <a:latin typeface="+mn-lt"/>
-                <a:ea typeface="+mn-ea"/>
-                <a:cs typeface="+mn-cs"/>
-              </a:defRPr>
-            </a:lvl2pPr>
-            <a:lvl3pPr marL="1143000" indent="-228600" algn="l" defTabSz="457200" rtl="0" eaLnBrk="1" latinLnBrk="0" hangingPunct="1">
-              <a:spcBef>
-                <a:spcPts val="1000"/>
-              </a:spcBef>
-              <a:spcAft>
-                <a:spcPts val="0"/>
-              </a:spcAft>
-              <a:buClr>
-                <a:schemeClr val="accent1"/>
-              </a:buClr>
-              <a:buSzPct val="80000"/>
-              <a:buFont typeface="Wingdings 3" charset="2"/>
-              <a:buChar char=""/>
-              <a:defRPr sz="1400" kern="1200">
-                <a:solidFill>
-                  <a:schemeClr val="tx1">
-                    <a:lumMod val="75000"/>
-                    <a:lumOff val="25000"/>
-                  </a:schemeClr>
-                </a:solidFill>
-                <a:latin typeface="+mn-lt"/>
-                <a:ea typeface="+mn-ea"/>
-                <a:cs typeface="+mn-cs"/>
-              </a:defRPr>
-            </a:lvl3pPr>
-            <a:lvl4pPr marL="1600200" indent="-228600" algn="l" defTabSz="457200" rtl="0" eaLnBrk="1" latinLnBrk="0" hangingPunct="1">
-              <a:spcBef>
-                <a:spcPts val="1000"/>
-              </a:spcBef>
-              <a:spcAft>
-                <a:spcPts val="0"/>
-              </a:spcAft>
-              <a:buClr>
-                <a:schemeClr val="accent1"/>
-              </a:buClr>
-              <a:buSzPct val="80000"/>
-              <a:buFont typeface="Wingdings 3" charset="2"/>
-              <a:buChar char=""/>
-              <a:defRPr sz="1200" kern="1200">
-                <a:solidFill>
-                  <a:schemeClr val="tx1">
-                    <a:lumMod val="75000"/>
-                    <a:lumOff val="25000"/>
-                  </a:schemeClr>
-                </a:solidFill>
-                <a:latin typeface="+mn-lt"/>
-                <a:ea typeface="+mn-ea"/>
-                <a:cs typeface="+mn-cs"/>
-              </a:defRPr>
-            </a:lvl4pPr>
-            <a:lvl5pPr marL="2057400" indent="-228600" algn="l" defTabSz="457200" rtl="0" eaLnBrk="1" latinLnBrk="0" hangingPunct="1">
-              <a:spcBef>
-                <a:spcPts val="1000"/>
-              </a:spcBef>
-              <a:spcAft>
-                <a:spcPts val="0"/>
-              </a:spcAft>
-              <a:buClr>
-                <a:schemeClr val="accent1"/>
-              </a:buClr>
-              <a:buSzPct val="80000"/>
-              <a:buFont typeface="Wingdings 3" charset="2"/>
-              <a:buChar char=""/>
-              <a:defRPr sz="1200" kern="1200">
-                <a:solidFill>
-                  <a:schemeClr val="tx1">
-                    <a:lumMod val="75000"/>
-                    <a:lumOff val="25000"/>
-                  </a:schemeClr>
-                </a:solidFill>
-                <a:latin typeface="+mn-lt"/>
-                <a:ea typeface="+mn-ea"/>
-                <a:cs typeface="+mn-cs"/>
-              </a:defRPr>
-            </a:lvl5pPr>
-            <a:lvl6pPr marL="2514600" indent="-228600" algn="l" defTabSz="457200" rtl="0" eaLnBrk="1" latinLnBrk="0" hangingPunct="1">
-              <a:spcBef>
-                <a:spcPts val="1000"/>
-              </a:spcBef>
-              <a:spcAft>
-                <a:spcPts val="0"/>
-              </a:spcAft>
-              <a:buClr>
-                <a:schemeClr val="accent1"/>
-              </a:buClr>
-              <a:buSzPct val="80000"/>
-              <a:buFont typeface="Wingdings 3" charset="2"/>
-              <a:buChar char=""/>
-              <a:defRPr sz="1200" kern="1200">
-                <a:solidFill>
-                  <a:schemeClr val="tx1">
-                    <a:lumMod val="75000"/>
-                    <a:lumOff val="25000"/>
-                  </a:schemeClr>
-                </a:solidFill>
-                <a:latin typeface="+mn-lt"/>
-                <a:ea typeface="+mn-ea"/>
-                <a:cs typeface="+mn-cs"/>
-              </a:defRPr>
-            </a:lvl6pPr>
-            <a:lvl7pPr marL="2971800" indent="-228600" algn="l" defTabSz="457200" rtl="0" eaLnBrk="1" latinLnBrk="0" hangingPunct="1">
-              <a:spcBef>
-                <a:spcPts val="1000"/>
-              </a:spcBef>
-              <a:spcAft>
-                <a:spcPts val="0"/>
-              </a:spcAft>
-              <a:buClr>
-                <a:schemeClr val="accent1"/>
-              </a:buClr>
-              <a:buSzPct val="80000"/>
-              <a:buFont typeface="Wingdings 3" charset="2"/>
-              <a:buChar char=""/>
-              <a:defRPr sz="1200" kern="1200">
-                <a:solidFill>
-                  <a:schemeClr val="tx1">
-                    <a:lumMod val="75000"/>
-                    <a:lumOff val="25000"/>
-                  </a:schemeClr>
-                </a:solidFill>
-                <a:latin typeface="+mn-lt"/>
-                <a:ea typeface="+mn-ea"/>
-                <a:cs typeface="+mn-cs"/>
-              </a:defRPr>
-            </a:lvl7pPr>
-            <a:lvl8pPr marL="3429000" indent="-228600" algn="l" defTabSz="457200" rtl="0" eaLnBrk="1" latinLnBrk="0" hangingPunct="1">
-              <a:spcBef>
-                <a:spcPts val="1000"/>
-              </a:spcBef>
-              <a:spcAft>
-                <a:spcPts val="0"/>
-              </a:spcAft>
-              <a:buClr>
-                <a:schemeClr val="accent1"/>
-              </a:buClr>
-              <a:buSzPct val="80000"/>
-              <a:buFont typeface="Wingdings 3" charset="2"/>
-              <a:buChar char=""/>
-              <a:defRPr sz="1200" kern="1200">
-                <a:solidFill>
-                  <a:schemeClr val="tx1">
-                    <a:lumMod val="75000"/>
-                    <a:lumOff val="25000"/>
-                  </a:schemeClr>
-                </a:solidFill>
-                <a:latin typeface="+mn-lt"/>
-                <a:ea typeface="+mn-ea"/>
-                <a:cs typeface="+mn-cs"/>
-              </a:defRPr>
-            </a:lvl8pPr>
-            <a:lvl9pPr marL="3886200" indent="-228600" algn="l" defTabSz="457200" rtl="0" eaLnBrk="1" latinLnBrk="0" hangingPunct="1">
-              <a:spcBef>
-                <a:spcPts val="1000"/>
-              </a:spcBef>
-              <a:spcAft>
-                <a:spcPts val="0"/>
-              </a:spcAft>
-              <a:buClr>
-                <a:schemeClr val="accent1"/>
-              </a:buClr>
-              <a:buSzPct val="80000"/>
-              <a:buFont typeface="Wingdings 3" charset="2"/>
-              <a:buChar char=""/>
-              <a:defRPr sz="1200" kern="1200">
-                <a:solidFill>
-                  <a:schemeClr val="tx1">
-                    <a:lumMod val="75000"/>
-                    <a:lumOff val="25000"/>
-                  </a:schemeClr>
-                </a:solidFill>
-                <a:latin typeface="+mn-lt"/>
-                <a:ea typeface="+mn-ea"/>
-                <a:cs typeface="+mn-cs"/>
-              </a:defRPr>
-            </a:lvl9pPr>
-          </a:lstStyle>
-          <a:p>
-            <a:endParaRPr lang="en-GB" sz="2000" dirty="0"/>
-          </a:p>
-        </p:txBody>
-      </p:sp>
-      <p:sp>
-        <p:nvSpPr>
-          <p:cNvPr id="21" name="Future Scope Body"/>
-          <p:cNvSpPr txBox="1">
-            <a:spLocks noGrp="1"/>
-          </p:cNvSpPr>
-          <p:nvPr/>
-        </p:nvSpPr>
-        <p:spPr>
-          <a:xfrm>
-            <a:off x="675957" y="1129553"/>
-            <a:ext cx="8300000" cy="5253318"/>
-          </a:xfrm>
-        </p:spPr>
-        <p:txBody>
-          <a:bodyPr>
-            <a:normAutofit/>
-          </a:bodyPr>
-          <a:lstStyle/>
-          <a:p>
-            <a:pPr marL="285750" indent="-285750">
+            <a:pPr marL="285750" indent="-285750" algn="l">
               <a:lnSpc>
                 <a:spcPct val="140000"/>
               </a:lnSpc>
               <a:spcAft>
                 <a:spcPts val="900"/>
               </a:spcAft>
+              <a:buClr>
+                <a:schemeClr val="tx1">
+                  <a:lumMod val="95000"/>
+                  <a:lumOff val="5000"/>
+                </a:schemeClr>
+              </a:buClr>
               <a:buFont typeface="Arial"/>
               <a:buChar char="•"/>
             </a:pPr>
             <a:r>
-              <a:rPr lang="en-US" sz="2200" dirty="0"/>
+              <a:rPr lang="en-US" sz="2800" b="0" dirty="0">
+                <a:solidFill>
+                  <a:schemeClr val="tx1">
+                    <a:lumMod val="95000"/>
+                    <a:lumOff val="5000"/>
+                  </a:schemeClr>
+                </a:solidFill>
+                <a:latin typeface="+mn-lt"/>
+              </a:rPr>
               <a:t>Predictive modeling (regression) to forecast seasonal profit or yield from environmental and input variables.</a:t>
             </a:r>
           </a:p>
           <a:p>
-            <a:pPr marL="285750" indent="-285750">
+            <a:pPr marL="285750" indent="-285750" algn="l">
               <a:lnSpc>
                 <a:spcPct val="140000"/>
               </a:lnSpc>
               <a:spcAft>
                 <a:spcPts val="900"/>
               </a:spcAft>
+              <a:buClr>
+                <a:schemeClr val="tx1">
+                  <a:lumMod val="95000"/>
+                  <a:lumOff val="5000"/>
+                </a:schemeClr>
+              </a:buClr>
               <a:buFont typeface="Arial"/>
               <a:buChar char="•"/>
             </a:pPr>
             <a:r>
-              <a:rPr lang="en-US" sz="2200" dirty="0"/>
+              <a:rPr lang="en-US" sz="2800" b="0" dirty="0">
+                <a:solidFill>
+                  <a:schemeClr val="tx1">
+                    <a:lumMod val="95000"/>
+                    <a:lumOff val="5000"/>
+                  </a:schemeClr>
+                </a:solidFill>
+                <a:latin typeface="+mn-lt"/>
+              </a:rPr>
               <a:t>Multi-year time-series data to study year-over-year seasonal trends, not just a single snapshot.</a:t>
             </a:r>
           </a:p>
           <a:p>
-            <a:pPr marL="285750" indent="-285750">
+            <a:pPr marL="285750" indent="-285750" algn="l">
               <a:lnSpc>
                 <a:spcPct val="140000"/>
               </a:lnSpc>
               <a:spcAft>
                 <a:spcPts val="900"/>
               </a:spcAft>
+              <a:buClr>
+                <a:schemeClr val="tx1">
+                  <a:lumMod val="95000"/>
+                  <a:lumOff val="5000"/>
+                </a:schemeClr>
+              </a:buClr>
               <a:buFont typeface="Arial"/>
               <a:buChar char="•"/>
             </a:pPr>
             <a:r>
-              <a:rPr lang="en-US" sz="2200" dirty="0"/>
+              <a:rPr lang="en-US" sz="2800" b="0" dirty="0">
+                <a:solidFill>
+                  <a:schemeClr val="tx1">
+                    <a:lumMod val="95000"/>
+                    <a:lumOff val="5000"/>
+                  </a:schemeClr>
+                </a:solidFill>
+                <a:latin typeface="+mn-lt"/>
+              </a:rPr>
               <a:t>Interactive dashboard (</a:t>
             </a:r>
             <a:r>
-              <a:rPr lang="en-US" sz="2200" dirty="0" err="1"/>
+              <a:rPr lang="en-US" sz="2800" b="0" dirty="0" err="1">
+                <a:solidFill>
+                  <a:schemeClr val="tx1">
+                    <a:lumMod val="95000"/>
+                    <a:lumOff val="5000"/>
+                  </a:schemeClr>
+                </a:solidFill>
+                <a:latin typeface="+mn-lt"/>
+              </a:rPr>
               <a:t>Streamlit</a:t>
             </a:r>
             <a:r>
-              <a:rPr lang="en-US" sz="2200" dirty="0"/>
+              <a:rPr lang="en-US" sz="2800" b="0" dirty="0">
+                <a:solidFill>
+                  <a:schemeClr val="tx1">
+                    <a:lumMod val="95000"/>
+                    <a:lumOff val="5000"/>
+                  </a:schemeClr>
+                </a:solidFill>
+                <a:latin typeface="+mn-lt"/>
+              </a:rPr>
               <a:t> / Power BI) for </a:t>
             </a:r>
             <a:r>
-              <a:rPr lang="en-US" sz="2200" dirty="0" err="1"/>
+              <a:rPr lang="en-US" sz="2800" b="0" dirty="0" err="1">
+                <a:solidFill>
+                  <a:schemeClr val="tx1">
+                    <a:lumMod val="95000"/>
+                    <a:lumOff val="5000"/>
+                  </a:schemeClr>
+                </a:solidFill>
+                <a:latin typeface="+mn-lt"/>
+              </a:rPr>
               <a:t>agri</a:t>
             </a:r>
             <a:r>
-              <a:rPr lang="en-US" sz="2200" dirty="0"/>
+              <a:rPr lang="en-US" sz="2800" b="0" dirty="0">
+                <a:solidFill>
+                  <a:schemeClr val="tx1">
+                    <a:lumMod val="95000"/>
+                    <a:lumOff val="5000"/>
+                  </a:schemeClr>
+                </a:solidFill>
+                <a:latin typeface="+mn-lt"/>
+              </a:rPr>
               <a:t>-planners to filter dynamically by state, crop and season.</a:t>
             </a:r>
           </a:p>
           <a:p>
-            <a:pPr marL="285750" indent="-285750">
+            <a:pPr marL="285750" indent="-285750" algn="l">
               <a:lnSpc>
                 <a:spcPct val="140000"/>
               </a:lnSpc>
               <a:spcAft>
                 <a:spcPts val="900"/>
               </a:spcAft>
+              <a:buClr>
+                <a:schemeClr val="tx1">
+                  <a:lumMod val="95000"/>
+                  <a:lumOff val="5000"/>
+                </a:schemeClr>
+              </a:buClr>
               <a:buFont typeface="Arial"/>
               <a:buChar char="•"/>
             </a:pPr>
             <a:r>
-              <a:rPr lang="en-US" sz="2200" dirty="0"/>
+              <a:rPr lang="en-US" sz="2800" b="0" dirty="0">
+                <a:solidFill>
+                  <a:schemeClr val="tx1">
+                    <a:lumMod val="95000"/>
+                    <a:lumOff val="5000"/>
+                  </a:schemeClr>
+                </a:solidFill>
+                <a:latin typeface="+mn-lt"/>
+              </a:rPr>
               <a:t>District-level and satellite/weather API data for finer-grained seasonal risk modeling.</a:t>
             </a:r>
           </a:p>
           <a:p>
-            <a:pPr marL="285750" indent="-285750">
+            <a:pPr marL="285750" indent="-285750" algn="l">
               <a:lnSpc>
                 <a:spcPct val="140000"/>
               </a:lnSpc>
               <a:spcAft>
                 <a:spcPts val="900"/>
               </a:spcAft>
+              <a:buClr>
+                <a:schemeClr val="tx1">
+                  <a:lumMod val="95000"/>
+                  <a:lumOff val="5000"/>
+                </a:schemeClr>
+              </a:buClr>
               <a:buFont typeface="Arial"/>
               <a:buChar char="•"/>
             </a:pPr>
             <a:r>
-              <a:rPr lang="en-US" sz="2200" dirty="0"/>
+              <a:rPr lang="en-US" sz="2800" b="0" dirty="0">
+                <a:solidFill>
+                  <a:schemeClr val="tx1">
+                    <a:lumMod val="95000"/>
+                    <a:lumOff val="5000"/>
+                  </a:schemeClr>
+                </a:solidFill>
+                <a:latin typeface="+mn-lt"/>
+              </a:rPr>
               <a:t>An early-warning system for high-risk season-crop-state combinations.</a:t>
             </a:r>
+          </a:p>
+          <a:p>
+            <a:endParaRPr lang="en-IN" dirty="0"/>
           </a:p>
         </p:txBody>
       </p:sp>
     </p:spTree>
     <p:extLst>
       <p:ext uri="{BB962C8B-B14F-4D97-AF65-F5344CB8AC3E}">
-        <p14:creationId xmlns:p14="http://schemas.microsoft.com/office/powerpoint/2010/main" val="776828144"/>
+        <p14:creationId xmlns:p14="http://schemas.microsoft.com/office/powerpoint/2010/main" val="3401748718"/>
       </p:ext>
     </p:extLst>
   </p:cSld>
@@ -13438,7 +14427,7 @@
                                           </p:stCondLst>
                                         </p:cTn>
                                         <p:tgtEl>
-                                          <p:spTgt spid="4"/>
+                                          <p:spTgt spid="3"/>
                                         </p:tgtEl>
                                         <p:attrNameLst>
                                           <p:attrName>style.visibility</p:attrName>
@@ -13452,7 +14441,7 @@
                                       <p:cBhvr>
                                         <p:cTn id="7" dur="500" fill="hold"/>
                                         <p:tgtEl>
-                                          <p:spTgt spid="4"/>
+                                          <p:spTgt spid="3"/>
                                         </p:tgtEl>
                                         <p:attrNameLst>
                                           <p:attrName>ppt_w</p:attrName>
@@ -13475,7 +14464,7 @@
                                       <p:cBhvr>
                                         <p:cTn id="8" dur="500" fill="hold"/>
                                         <p:tgtEl>
-                                          <p:spTgt spid="4"/>
+                                          <p:spTgt spid="3"/>
                                         </p:tgtEl>
                                         <p:attrNameLst>
                                           <p:attrName>ppt_h</p:attrName>
@@ -13498,7 +14487,7 @@
                                       <p:cBhvr>
                                         <p:cTn id="9" dur="500"/>
                                         <p:tgtEl>
-                                          <p:spTgt spid="4"/>
+                                          <p:spTgt spid="3"/>
                                         </p:tgtEl>
                                       </p:cBhvr>
                                     </p:animEffect>
@@ -13524,7 +14513,7 @@
                             </p:stCondLst>
                             <p:childTnLst>
                               <p:par>
-                                <p:cTn id="12" presetID="42" presetClass="entr" presetSubtype="0" fill="hold" grpId="0" nodeType="clickEffect" nodePh="1">
+                                <p:cTn id="12" presetID="12" presetClass="entr" presetSubtype="4" fill="hold" grpId="0" nodeType="clickEffect" nodePh="1">
                                   <p:stCondLst>
                                     <p:cond delay="0"/>
                                   </p:stCondLst>
@@ -13542,7 +14531,7 @@
                                           </p:stCondLst>
                                         </p:cTn>
                                         <p:tgtEl>
-                                          <p:spTgt spid="7"/>
+                                          <p:spTgt spid="17"/>
                                         </p:tgtEl>
                                         <p:attrNameLst>
                                           <p:attrName>style.visibility</p:attrName>
@@ -13552,42 +14541,11 @@
                                         <p:strVal val="visible"/>
                                       </p:to>
                                     </p:set>
-                                    <p:animEffect transition="in" filter="fade">
-                                      <p:cBhvr>
-                                        <p:cTn id="14" dur="1000"/>
+                                    <p:anim calcmode="lin" valueType="num">
+                                      <p:cBhvr additive="base">
+                                        <p:cTn id="14" dur="500"/>
                                         <p:tgtEl>
-                                          <p:spTgt spid="7"/>
-                                        </p:tgtEl>
-                                      </p:cBhvr>
-                                    </p:animEffect>
-                                    <p:anim calcmode="lin" valueType="num">
-                                      <p:cBhvr>
-                                        <p:cTn id="15" dur="1000" fill="hold"/>
-                                        <p:tgtEl>
-                                          <p:spTgt spid="7"/>
-                                        </p:tgtEl>
-                                        <p:attrNameLst>
-                                          <p:attrName>ppt_x</p:attrName>
-                                        </p:attrNameLst>
-                                      </p:cBhvr>
-                                      <p:tavLst>
-                                        <p:tav tm="0">
-                                          <p:val>
-                                            <p:strVal val="#ppt_x"/>
-                                          </p:val>
-                                        </p:tav>
-                                        <p:tav tm="100000">
-                                          <p:val>
-                                            <p:strVal val="#ppt_x"/>
-                                          </p:val>
-                                        </p:tav>
-                                      </p:tavLst>
-                                    </p:anim>
-                                    <p:anim calcmode="lin" valueType="num">
-                                      <p:cBhvr>
-                                        <p:cTn id="16" dur="1000" fill="hold"/>
-                                        <p:tgtEl>
-                                          <p:spTgt spid="7"/>
+                                          <p:spTgt spid="17"/>
                                         </p:tgtEl>
                                         <p:attrNameLst>
                                           <p:attrName>ppt_y</p:attrName>
@@ -13596,7 +14554,7 @@
                                       <p:tavLst>
                                         <p:tav tm="0">
                                           <p:val>
-                                            <p:strVal val="#ppt_y+.1"/>
+                                            <p:strVal val="#ppt_y+#ppt_h*1.125000"/>
                                           </p:val>
                                         </p:tav>
                                         <p:tav tm="100000">
@@ -13606,6 +14564,14 @@
                                         </p:tav>
                                       </p:tavLst>
                                     </p:anim>
+                                    <p:animEffect transition="in" filter="wipe(up)">
+                                      <p:cBhvr>
+                                        <p:cTn id="15" dur="500"/>
+                                        <p:tgtEl>
+                                          <p:spTgt spid="17"/>
+                                        </p:tgtEl>
+                                      </p:cBhvr>
+                                    </p:animEffect>
                                   </p:childTnLst>
                                 </p:cTn>
                               </p:par>
@@ -13616,37 +14582,36 @@
                     </p:cTn>
                   </p:par>
                   <p:par>
-                    <p:cTn id="17" fill="hold">
+                    <p:cTn id="16" fill="hold">
                       <p:stCondLst>
                         <p:cond delay="indefinite"/>
                       </p:stCondLst>
                       <p:childTnLst>
                         <p:par>
-                          <p:cTn id="18" fill="hold">
+                          <p:cTn id="17" fill="hold">
                             <p:stCondLst>
                               <p:cond delay="0"/>
                             </p:stCondLst>
                             <p:childTnLst>
                               <p:par>
-                                <p:cTn id="19" presetID="42" presetClass="entr" presetSubtype="0" fill="hold" grpId="0" nodeType="clickEffect" nodePh="1">
+                                <p:cTn id="18" presetID="12" presetClass="entr" presetSubtype="4" fill="hold" grpId="0" nodeType="clickEffect">
                                   <p:stCondLst>
                                     <p:cond delay="0"/>
                                   </p:stCondLst>
-                                  <p:endCondLst>
-                                    <p:cond evt="begin" delay="0">
-                                      <p:tn val="19"/>
-                                    </p:cond>
-                                  </p:endCondLst>
                                   <p:childTnLst>
                                     <p:set>
                                       <p:cBhvr>
-                                        <p:cTn id="20" dur="1" fill="hold">
+                                        <p:cTn id="19" dur="1" fill="hold">
                                           <p:stCondLst>
                                             <p:cond delay="0"/>
                                           </p:stCondLst>
                                         </p:cTn>
                                         <p:tgtEl>
-                                          <p:spTgt spid="8"/>
+                                          <p:spTgt spid="31">
+                                            <p:txEl>
+                                              <p:pRg st="0" end="0"/>
+                                            </p:txEl>
+                                          </p:spTgt>
                                         </p:tgtEl>
                                         <p:attrNameLst>
                                           <p:attrName>style.visibility</p:attrName>
@@ -13656,42 +14621,15 @@
                                         <p:strVal val="visible"/>
                                       </p:to>
                                     </p:set>
-                                    <p:animEffect transition="in" filter="fade">
-                                      <p:cBhvr>
-                                        <p:cTn id="21" dur="1000"/>
+                                    <p:anim calcmode="lin" valueType="num">
+                                      <p:cBhvr additive="base">
+                                        <p:cTn id="20" dur="500"/>
                                         <p:tgtEl>
-                                          <p:spTgt spid="8"/>
-                                        </p:tgtEl>
-                                      </p:cBhvr>
-                                    </p:animEffect>
-                                    <p:anim calcmode="lin" valueType="num">
-                                      <p:cBhvr>
-                                        <p:cTn id="22" dur="1000" fill="hold"/>
-                                        <p:tgtEl>
-                                          <p:spTgt spid="8"/>
-                                        </p:tgtEl>
-                                        <p:attrNameLst>
-                                          <p:attrName>ppt_x</p:attrName>
-                                        </p:attrNameLst>
-                                      </p:cBhvr>
-                                      <p:tavLst>
-                                        <p:tav tm="0">
-                                          <p:val>
-                                            <p:strVal val="#ppt_x"/>
-                                          </p:val>
-                                        </p:tav>
-                                        <p:tav tm="100000">
-                                          <p:val>
-                                            <p:strVal val="#ppt_x"/>
-                                          </p:val>
-                                        </p:tav>
-                                      </p:tavLst>
-                                    </p:anim>
-                                    <p:anim calcmode="lin" valueType="num">
-                                      <p:cBhvr>
-                                        <p:cTn id="23" dur="1000" fill="hold"/>
-                                        <p:tgtEl>
-                                          <p:spTgt spid="8"/>
+                                          <p:spTgt spid="31">
+                                            <p:txEl>
+                                              <p:pRg st="0" end="0"/>
+                                            </p:txEl>
+                                          </p:spTgt>
                                         </p:tgtEl>
                                         <p:attrNameLst>
                                           <p:attrName>ppt_y</p:attrName>
@@ -13700,7 +14638,7 @@
                                       <p:tavLst>
                                         <p:tav tm="0">
                                           <p:val>
-                                            <p:strVal val="#ppt_y+.1"/>
+                                            <p:strVal val="#ppt_y+#ppt_h*1.125000"/>
                                           </p:val>
                                         </p:tav>
                                         <p:tav tm="100000">
@@ -13710,6 +14648,337 @@
                                         </p:tav>
                                       </p:tavLst>
                                     </p:anim>
+                                    <p:animEffect transition="in" filter="wipe(up)">
+                                      <p:cBhvr>
+                                        <p:cTn id="21" dur="500"/>
+                                        <p:tgtEl>
+                                          <p:spTgt spid="31">
+                                            <p:txEl>
+                                              <p:pRg st="0" end="0"/>
+                                            </p:txEl>
+                                          </p:spTgt>
+                                        </p:tgtEl>
+                                      </p:cBhvr>
+                                    </p:animEffect>
+                                  </p:childTnLst>
+                                </p:cTn>
+                              </p:par>
+                            </p:childTnLst>
+                          </p:cTn>
+                        </p:par>
+                      </p:childTnLst>
+                    </p:cTn>
+                  </p:par>
+                  <p:par>
+                    <p:cTn id="22" fill="hold">
+                      <p:stCondLst>
+                        <p:cond delay="indefinite"/>
+                      </p:stCondLst>
+                      <p:childTnLst>
+                        <p:par>
+                          <p:cTn id="23" fill="hold">
+                            <p:stCondLst>
+                              <p:cond delay="0"/>
+                            </p:stCondLst>
+                            <p:childTnLst>
+                              <p:par>
+                                <p:cTn id="24" presetID="12" presetClass="entr" presetSubtype="4" fill="hold" grpId="0" nodeType="clickEffect" nodePh="1">
+                                  <p:stCondLst>
+                                    <p:cond delay="0"/>
+                                  </p:stCondLst>
+                                  <p:endCondLst>
+                                    <p:cond evt="begin" delay="0">
+                                      <p:tn val="24"/>
+                                    </p:cond>
+                                  </p:endCondLst>
+                                  <p:childTnLst>
+                                    <p:set>
+                                      <p:cBhvr>
+                                        <p:cTn id="25" dur="1" fill="hold">
+                                          <p:stCondLst>
+                                            <p:cond delay="0"/>
+                                          </p:stCondLst>
+                                        </p:cTn>
+                                        <p:tgtEl>
+                                          <p:spTgt spid="20"/>
+                                        </p:tgtEl>
+                                        <p:attrNameLst>
+                                          <p:attrName>style.visibility</p:attrName>
+                                        </p:attrNameLst>
+                                      </p:cBhvr>
+                                      <p:to>
+                                        <p:strVal val="visible"/>
+                                      </p:to>
+                                    </p:set>
+                                    <p:anim calcmode="lin" valueType="num">
+                                      <p:cBhvr additive="base">
+                                        <p:cTn id="26" dur="500"/>
+                                        <p:tgtEl>
+                                          <p:spTgt spid="20"/>
+                                        </p:tgtEl>
+                                        <p:attrNameLst>
+                                          <p:attrName>ppt_y</p:attrName>
+                                        </p:attrNameLst>
+                                      </p:cBhvr>
+                                      <p:tavLst>
+                                        <p:tav tm="0">
+                                          <p:val>
+                                            <p:strVal val="#ppt_y+#ppt_h*1.125000"/>
+                                          </p:val>
+                                        </p:tav>
+                                        <p:tav tm="100000">
+                                          <p:val>
+                                            <p:strVal val="#ppt_y"/>
+                                          </p:val>
+                                        </p:tav>
+                                      </p:tavLst>
+                                    </p:anim>
+                                    <p:animEffect transition="in" filter="wipe(up)">
+                                      <p:cBhvr>
+                                        <p:cTn id="27" dur="500"/>
+                                        <p:tgtEl>
+                                          <p:spTgt spid="20"/>
+                                        </p:tgtEl>
+                                      </p:cBhvr>
+                                    </p:animEffect>
+                                  </p:childTnLst>
+                                </p:cTn>
+                              </p:par>
+                            </p:childTnLst>
+                          </p:cTn>
+                        </p:par>
+                      </p:childTnLst>
+                    </p:cTn>
+                  </p:par>
+                  <p:par>
+                    <p:cTn id="28" fill="hold">
+                      <p:stCondLst>
+                        <p:cond delay="indefinite"/>
+                      </p:stCondLst>
+                      <p:childTnLst>
+                        <p:par>
+                          <p:cTn id="29" fill="hold">
+                            <p:stCondLst>
+                              <p:cond delay="0"/>
+                            </p:stCondLst>
+                            <p:childTnLst>
+                              <p:par>
+                                <p:cTn id="30" presetID="12" presetClass="entr" presetSubtype="4" fill="hold" grpId="0" nodeType="clickEffect" nodePh="1">
+                                  <p:stCondLst>
+                                    <p:cond delay="0"/>
+                                  </p:stCondLst>
+                                  <p:endCondLst>
+                                    <p:cond evt="begin" delay="0">
+                                      <p:tn val="30"/>
+                                    </p:cond>
+                                  </p:endCondLst>
+                                  <p:childTnLst>
+                                    <p:set>
+                                      <p:cBhvr>
+                                        <p:cTn id="31" dur="1" fill="hold">
+                                          <p:stCondLst>
+                                            <p:cond delay="0"/>
+                                          </p:stCondLst>
+                                        </p:cTn>
+                                        <p:tgtEl>
+                                          <p:spTgt spid="30"/>
+                                        </p:tgtEl>
+                                        <p:attrNameLst>
+                                          <p:attrName>style.visibility</p:attrName>
+                                        </p:attrNameLst>
+                                      </p:cBhvr>
+                                      <p:to>
+                                        <p:strVal val="visible"/>
+                                      </p:to>
+                                    </p:set>
+                                    <p:anim calcmode="lin" valueType="num">
+                                      <p:cBhvr additive="base">
+                                        <p:cTn id="32" dur="500"/>
+                                        <p:tgtEl>
+                                          <p:spTgt spid="30"/>
+                                        </p:tgtEl>
+                                        <p:attrNameLst>
+                                          <p:attrName>ppt_y</p:attrName>
+                                        </p:attrNameLst>
+                                      </p:cBhvr>
+                                      <p:tavLst>
+                                        <p:tav tm="0">
+                                          <p:val>
+                                            <p:strVal val="#ppt_y+#ppt_h*1.125000"/>
+                                          </p:val>
+                                        </p:tav>
+                                        <p:tav tm="100000">
+                                          <p:val>
+                                            <p:strVal val="#ppt_y"/>
+                                          </p:val>
+                                        </p:tav>
+                                      </p:tavLst>
+                                    </p:anim>
+                                    <p:animEffect transition="in" filter="wipe(up)">
+                                      <p:cBhvr>
+                                        <p:cTn id="33" dur="500"/>
+                                        <p:tgtEl>
+                                          <p:spTgt spid="30"/>
+                                        </p:tgtEl>
+                                      </p:cBhvr>
+                                    </p:animEffect>
+                                  </p:childTnLst>
+                                </p:cTn>
+                              </p:par>
+                            </p:childTnLst>
+                          </p:cTn>
+                        </p:par>
+                      </p:childTnLst>
+                    </p:cTn>
+                  </p:par>
+                  <p:par>
+                    <p:cTn id="34" fill="hold">
+                      <p:stCondLst>
+                        <p:cond delay="indefinite"/>
+                      </p:stCondLst>
+                      <p:childTnLst>
+                        <p:par>
+                          <p:cTn id="35" fill="hold">
+                            <p:stCondLst>
+                              <p:cond delay="0"/>
+                            </p:stCondLst>
+                            <p:childTnLst>
+                              <p:par>
+                                <p:cTn id="36" presetID="12" presetClass="entr" presetSubtype="4" fill="hold" grpId="0" nodeType="clickEffect" nodePh="1">
+                                  <p:stCondLst>
+                                    <p:cond delay="0"/>
+                                  </p:stCondLst>
+                                  <p:endCondLst>
+                                    <p:cond evt="begin" delay="0">
+                                      <p:tn val="36"/>
+                                    </p:cond>
+                                  </p:endCondLst>
+                                  <p:childTnLst>
+                                    <p:set>
+                                      <p:cBhvr>
+                                        <p:cTn id="37" dur="1" fill="hold">
+                                          <p:stCondLst>
+                                            <p:cond delay="0"/>
+                                          </p:stCondLst>
+                                        </p:cTn>
+                                        <p:tgtEl>
+                                          <p:spTgt spid="23"/>
+                                        </p:tgtEl>
+                                        <p:attrNameLst>
+                                          <p:attrName>style.visibility</p:attrName>
+                                        </p:attrNameLst>
+                                      </p:cBhvr>
+                                      <p:to>
+                                        <p:strVal val="visible"/>
+                                      </p:to>
+                                    </p:set>
+                                    <p:anim calcmode="lin" valueType="num">
+                                      <p:cBhvr additive="base">
+                                        <p:cTn id="38" dur="500"/>
+                                        <p:tgtEl>
+                                          <p:spTgt spid="23"/>
+                                        </p:tgtEl>
+                                        <p:attrNameLst>
+                                          <p:attrName>ppt_y</p:attrName>
+                                        </p:attrNameLst>
+                                      </p:cBhvr>
+                                      <p:tavLst>
+                                        <p:tav tm="0">
+                                          <p:val>
+                                            <p:strVal val="#ppt_y+#ppt_h*1.125000"/>
+                                          </p:val>
+                                        </p:tav>
+                                        <p:tav tm="100000">
+                                          <p:val>
+                                            <p:strVal val="#ppt_y"/>
+                                          </p:val>
+                                        </p:tav>
+                                      </p:tavLst>
+                                    </p:anim>
+                                    <p:animEffect transition="in" filter="wipe(up)">
+                                      <p:cBhvr>
+                                        <p:cTn id="39" dur="500"/>
+                                        <p:tgtEl>
+                                          <p:spTgt spid="23"/>
+                                        </p:tgtEl>
+                                      </p:cBhvr>
+                                    </p:animEffect>
+                                  </p:childTnLst>
+                                </p:cTn>
+                              </p:par>
+                            </p:childTnLst>
+                          </p:cTn>
+                        </p:par>
+                      </p:childTnLst>
+                    </p:cTn>
+                  </p:par>
+                  <p:par>
+                    <p:cTn id="40" fill="hold">
+                      <p:stCondLst>
+                        <p:cond delay="indefinite"/>
+                      </p:stCondLst>
+                      <p:childTnLst>
+                        <p:par>
+                          <p:cTn id="41" fill="hold">
+                            <p:stCondLst>
+                              <p:cond delay="0"/>
+                            </p:stCondLst>
+                            <p:childTnLst>
+                              <p:par>
+                                <p:cTn id="42" presetID="12" presetClass="entr" presetSubtype="4" fill="hold" grpId="0" nodeType="clickEffect">
+                                  <p:stCondLst>
+                                    <p:cond delay="0"/>
+                                  </p:stCondLst>
+                                  <p:childTnLst>
+                                    <p:set>
+                                      <p:cBhvr>
+                                        <p:cTn id="43" dur="1" fill="hold">
+                                          <p:stCondLst>
+                                            <p:cond delay="0"/>
+                                          </p:stCondLst>
+                                        </p:cTn>
+                                        <p:tgtEl>
+                                          <p:spTgt spid="32"/>
+                                        </p:tgtEl>
+                                        <p:attrNameLst>
+                                          <p:attrName>style.visibility</p:attrName>
+                                        </p:attrNameLst>
+                                      </p:cBhvr>
+                                      <p:to>
+                                        <p:strVal val="visible"/>
+                                      </p:to>
+                                    </p:set>
+                                    <p:anim calcmode="lin" valueType="num">
+                                      <p:cBhvr additive="base">
+                                        <p:cTn id="44" dur="500"/>
+                                        <p:tgtEl>
+                                          <p:spTgt spid="32"/>
+                                        </p:tgtEl>
+                                        <p:attrNameLst>
+                                          <p:attrName>ppt_y</p:attrName>
+                                        </p:attrNameLst>
+                                      </p:cBhvr>
+                                      <p:tavLst>
+                                        <p:tav tm="0">
+                                          <p:val>
+                                            <p:strVal val="#ppt_y+#ppt_h*1.125000"/>
+                                          </p:val>
+                                        </p:tav>
+                                        <p:tav tm="100000">
+                                          <p:val>
+                                            <p:strVal val="#ppt_y"/>
+                                          </p:val>
+                                        </p:tav>
+                                      </p:tavLst>
+                                    </p:anim>
+                                    <p:animEffect transition="in" filter="wipe(up)">
+                                      <p:cBhvr>
+                                        <p:cTn id="45" dur="500"/>
+                                        <p:tgtEl>
+                                          <p:spTgt spid="32"/>
+                                        </p:tgtEl>
+                                      </p:cBhvr>
+                                    </p:animEffect>
                                   </p:childTnLst>
                                 </p:cTn>
                               </p:par>
@@ -13741,9 +15010,13 @@
       </p:par>
     </p:tnLst>
     <p:bldLst>
-      <p:bldP spid="4" grpId="0"/>
-      <p:bldP spid="7" grpId="0"/>
-      <p:bldP spid="8" grpId="0"/>
+      <p:bldP spid="3" grpId="0"/>
+      <p:bldP spid="31" grpId="0" build="p"/>
+      <p:bldP spid="17" grpId="0"/>
+      <p:bldP spid="20" grpId="0"/>
+      <p:bldP spid="23" grpId="0"/>
+      <p:bldP spid="30" grpId="0"/>
+      <p:bldP spid="32" grpId="0"/>
     </p:bldLst>
   </p:timing>
 </p:sld>
@@ -13754,13 +15027,7 @@
   <p:cSld>
     <p:spTree>
       <p:nvGrpSpPr>
-        <p:cNvPr id="1" name="">
-          <a:extLst>
-            <a:ext uri="{FF2B5EF4-FFF2-40B4-BE49-F238E27FC236}">
-              <a16:creationId xmlns:a16="http://schemas.microsoft.com/office/drawing/2014/main" id="{327316CE-193E-3D5D-C15A-98517303A13F}"/>
-            </a:ext>
-          </a:extLst>
-        </p:cNvPr>
+        <p:cNvPr id="1" name=""/>
         <p:cNvGrpSpPr/>
         <p:nvPr/>
       </p:nvGrpSpPr>
@@ -13772,12 +15039,1381 @@
           <a:chExt cx="0" cy="0"/>
         </a:xfrm>
       </p:grpSpPr>
+      <p:sp>
+        <p:nvSpPr>
+          <p:cNvPr id="3" name="Title 1">
+            <a:extLst>
+              <a:ext uri="{FF2B5EF4-FFF2-40B4-BE49-F238E27FC236}">
+                <a16:creationId xmlns:a16="http://schemas.microsoft.com/office/drawing/2014/main" id="{D88C20CF-C1EE-4092-B52D-FD4AB2AB2508}"/>
+              </a:ext>
+            </a:extLst>
+          </p:cNvPr>
+          <p:cNvSpPr>
+            <a:spLocks noGrp="1"/>
+          </p:cNvSpPr>
+          <p:nvPr>
+            <p:ph type="title"/>
+          </p:nvPr>
+        </p:nvSpPr>
+        <p:spPr>
+          <a:xfrm>
+            <a:off x="432000" y="286871"/>
+            <a:ext cx="4682709" cy="820569"/>
+          </a:xfrm>
+          <a:prstGeom prst="rect">
+            <a:avLst/>
+          </a:prstGeom>
+        </p:spPr>
+        <p:txBody>
+          <a:bodyPr anchor="ctr">
+            <a:normAutofit fontScale="90000"/>
+          </a:bodyPr>
+          <a:lstStyle/>
+          <a:p>
+            <a:pPr algn="ctr"/>
+            <a:r>
+              <a:rPr lang="en-US" sz="4800" b="1" dirty="0" err="1">
+                <a:solidFill>
+                  <a:schemeClr val="tx1"/>
+                </a:solidFill>
+              </a:rPr>
+              <a:t>Github</a:t>
+            </a:r>
+            <a:r>
+              <a:rPr lang="en-US" sz="4800" b="1" dirty="0">
+                <a:solidFill>
+                  <a:schemeClr val="tx1"/>
+                </a:solidFill>
+              </a:rPr>
+              <a:t> Link</a:t>
+            </a:r>
+          </a:p>
+        </p:txBody>
+      </p:sp>
+      <p:sp>
+        <p:nvSpPr>
+          <p:cNvPr id="31" name="Text Placeholder 30">
+            <a:extLst>
+              <a:ext uri="{FF2B5EF4-FFF2-40B4-BE49-F238E27FC236}">
+                <a16:creationId xmlns:a16="http://schemas.microsoft.com/office/drawing/2014/main" id="{97AB1F14-3A1E-4057-A473-9975BA59F012}"/>
+              </a:ext>
+            </a:extLst>
+          </p:cNvPr>
+          <p:cNvSpPr>
+            <a:spLocks noGrp="1"/>
+          </p:cNvSpPr>
+          <p:nvPr>
+            <p:ph type="body" sz="quarter" idx="13"/>
+          </p:nvPr>
+        </p:nvSpPr>
+        <p:spPr>
+          <a:xfrm>
+            <a:off x="3727865" y="4641925"/>
+            <a:ext cx="2139695" cy="1108635"/>
+          </a:xfrm>
+        </p:spPr>
+        <p:txBody>
+          <a:bodyPr>
+            <a:normAutofit/>
+          </a:bodyPr>
+          <a:lstStyle/>
+          <a:p>
+            <a:r>
+              <a:rPr lang="en-US" dirty="0"/>
+              <a:t>.</a:t>
+            </a:r>
+          </a:p>
+        </p:txBody>
+      </p:sp>
+      <p:sp>
+        <p:nvSpPr>
+          <p:cNvPr id="17" name="Text Placeholder 28">
+            <a:extLst>
+              <a:ext uri="{FF2B5EF4-FFF2-40B4-BE49-F238E27FC236}">
+                <a16:creationId xmlns:a16="http://schemas.microsoft.com/office/drawing/2014/main" id="{E212CE24-374D-44D0-8F39-0F5A36E42ED7}"/>
+              </a:ext>
+            </a:extLst>
+          </p:cNvPr>
+          <p:cNvSpPr txBox="1">
+            <a:spLocks/>
+          </p:cNvSpPr>
+          <p:nvPr/>
+        </p:nvSpPr>
+        <p:spPr>
+          <a:xfrm>
+            <a:off x="878337" y="4134780"/>
+            <a:ext cx="2596574" cy="453919"/>
+          </a:xfrm>
+          <a:prstGeom prst="rect">
+            <a:avLst/>
+          </a:prstGeom>
+        </p:spPr>
+        <p:txBody>
+          <a:bodyPr vert="horz" lIns="91440" tIns="45720" rIns="91440" bIns="45720" rtlCol="0">
+            <a:normAutofit lnSpcReduction="10000"/>
+          </a:bodyPr>
+          <a:lstStyle>
+            <a:lvl1pPr marL="0" indent="0" algn="ctr" defTabSz="457200" rtl="0" eaLnBrk="1" latinLnBrk="0" hangingPunct="1">
+              <a:spcBef>
+                <a:spcPts val="1000"/>
+              </a:spcBef>
+              <a:spcAft>
+                <a:spcPts val="0"/>
+              </a:spcAft>
+              <a:buClr>
+                <a:schemeClr val="accent1"/>
+              </a:buClr>
+              <a:buSzPct val="80000"/>
+              <a:buFont typeface="Wingdings 3" charset="2"/>
+              <a:buNone/>
+              <a:defRPr lang="en-US" sz="2000" b="1" kern="1200" dirty="0" smtClean="0">
+                <a:solidFill>
+                  <a:schemeClr val="accent4"/>
+                </a:solidFill>
+                <a:latin typeface="+mj-lt"/>
+                <a:ea typeface="+mn-ea"/>
+                <a:cs typeface="+mn-cs"/>
+              </a:defRPr>
+            </a:lvl1pPr>
+            <a:lvl2pPr marL="742950" indent="-285750" algn="l" defTabSz="457200" rtl="0" eaLnBrk="1" latinLnBrk="0" hangingPunct="1">
+              <a:spcBef>
+                <a:spcPts val="1000"/>
+              </a:spcBef>
+              <a:spcAft>
+                <a:spcPts val="0"/>
+              </a:spcAft>
+              <a:buClr>
+                <a:schemeClr val="accent1"/>
+              </a:buClr>
+              <a:buSzPct val="80000"/>
+              <a:buFont typeface="Wingdings 3" charset="2"/>
+              <a:buChar char=""/>
+              <a:defRPr sz="1600" kern="1200">
+                <a:solidFill>
+                  <a:schemeClr val="tx1">
+                    <a:lumMod val="75000"/>
+                    <a:lumOff val="25000"/>
+                  </a:schemeClr>
+                </a:solidFill>
+                <a:latin typeface="+mn-lt"/>
+                <a:ea typeface="+mn-ea"/>
+                <a:cs typeface="+mn-cs"/>
+              </a:defRPr>
+            </a:lvl2pPr>
+            <a:lvl3pPr marL="1143000" indent="-228600" algn="l" defTabSz="457200" rtl="0" eaLnBrk="1" latinLnBrk="0" hangingPunct="1">
+              <a:spcBef>
+                <a:spcPts val="1000"/>
+              </a:spcBef>
+              <a:spcAft>
+                <a:spcPts val="0"/>
+              </a:spcAft>
+              <a:buClr>
+                <a:schemeClr val="accent1"/>
+              </a:buClr>
+              <a:buSzPct val="80000"/>
+              <a:buFont typeface="Wingdings 3" charset="2"/>
+              <a:buChar char=""/>
+              <a:defRPr sz="1400" kern="1200">
+                <a:solidFill>
+                  <a:schemeClr val="tx1">
+                    <a:lumMod val="75000"/>
+                    <a:lumOff val="25000"/>
+                  </a:schemeClr>
+                </a:solidFill>
+                <a:latin typeface="+mn-lt"/>
+                <a:ea typeface="+mn-ea"/>
+                <a:cs typeface="+mn-cs"/>
+              </a:defRPr>
+            </a:lvl3pPr>
+            <a:lvl4pPr marL="1600200" indent="-228600" algn="l" defTabSz="457200" rtl="0" eaLnBrk="1" latinLnBrk="0" hangingPunct="1">
+              <a:spcBef>
+                <a:spcPts val="1000"/>
+              </a:spcBef>
+              <a:spcAft>
+                <a:spcPts val="0"/>
+              </a:spcAft>
+              <a:buClr>
+                <a:schemeClr val="accent1"/>
+              </a:buClr>
+              <a:buSzPct val="80000"/>
+              <a:buFont typeface="Wingdings 3" charset="2"/>
+              <a:buChar char=""/>
+              <a:defRPr sz="1200" kern="1200">
+                <a:solidFill>
+                  <a:schemeClr val="tx1">
+                    <a:lumMod val="75000"/>
+                    <a:lumOff val="25000"/>
+                  </a:schemeClr>
+                </a:solidFill>
+                <a:latin typeface="+mn-lt"/>
+                <a:ea typeface="+mn-ea"/>
+                <a:cs typeface="+mn-cs"/>
+              </a:defRPr>
+            </a:lvl4pPr>
+            <a:lvl5pPr marL="2057400" indent="-228600" algn="l" defTabSz="457200" rtl="0" eaLnBrk="1" latinLnBrk="0" hangingPunct="1">
+              <a:spcBef>
+                <a:spcPts val="1000"/>
+              </a:spcBef>
+              <a:spcAft>
+                <a:spcPts val="0"/>
+              </a:spcAft>
+              <a:buClr>
+                <a:schemeClr val="accent1"/>
+              </a:buClr>
+              <a:buSzPct val="80000"/>
+              <a:buFont typeface="Wingdings 3" charset="2"/>
+              <a:buChar char=""/>
+              <a:defRPr sz="1200" kern="1200">
+                <a:solidFill>
+                  <a:schemeClr val="tx1">
+                    <a:lumMod val="75000"/>
+                    <a:lumOff val="25000"/>
+                  </a:schemeClr>
+                </a:solidFill>
+                <a:latin typeface="+mn-lt"/>
+                <a:ea typeface="+mn-ea"/>
+                <a:cs typeface="+mn-cs"/>
+              </a:defRPr>
+            </a:lvl5pPr>
+            <a:lvl6pPr marL="2514600" indent="-228600" algn="l" defTabSz="457200" rtl="0" eaLnBrk="1" latinLnBrk="0" hangingPunct="1">
+              <a:spcBef>
+                <a:spcPts val="1000"/>
+              </a:spcBef>
+              <a:spcAft>
+                <a:spcPts val="0"/>
+              </a:spcAft>
+              <a:buClr>
+                <a:schemeClr val="accent1"/>
+              </a:buClr>
+              <a:buSzPct val="80000"/>
+              <a:buFont typeface="Wingdings 3" charset="2"/>
+              <a:buChar char=""/>
+              <a:defRPr sz="1200" kern="1200">
+                <a:solidFill>
+                  <a:schemeClr val="tx1">
+                    <a:lumMod val="75000"/>
+                    <a:lumOff val="25000"/>
+                  </a:schemeClr>
+                </a:solidFill>
+                <a:latin typeface="+mn-lt"/>
+                <a:ea typeface="+mn-ea"/>
+                <a:cs typeface="+mn-cs"/>
+              </a:defRPr>
+            </a:lvl6pPr>
+            <a:lvl7pPr marL="2971800" indent="-228600" algn="l" defTabSz="457200" rtl="0" eaLnBrk="1" latinLnBrk="0" hangingPunct="1">
+              <a:spcBef>
+                <a:spcPts val="1000"/>
+              </a:spcBef>
+              <a:spcAft>
+                <a:spcPts val="0"/>
+              </a:spcAft>
+              <a:buClr>
+                <a:schemeClr val="accent1"/>
+              </a:buClr>
+              <a:buSzPct val="80000"/>
+              <a:buFont typeface="Wingdings 3" charset="2"/>
+              <a:buChar char=""/>
+              <a:defRPr sz="1200" kern="1200">
+                <a:solidFill>
+                  <a:schemeClr val="tx1">
+                    <a:lumMod val="75000"/>
+                    <a:lumOff val="25000"/>
+                  </a:schemeClr>
+                </a:solidFill>
+                <a:latin typeface="+mn-lt"/>
+                <a:ea typeface="+mn-ea"/>
+                <a:cs typeface="+mn-cs"/>
+              </a:defRPr>
+            </a:lvl7pPr>
+            <a:lvl8pPr marL="3429000" indent="-228600" algn="l" defTabSz="457200" rtl="0" eaLnBrk="1" latinLnBrk="0" hangingPunct="1">
+              <a:spcBef>
+                <a:spcPts val="1000"/>
+              </a:spcBef>
+              <a:spcAft>
+                <a:spcPts val="0"/>
+              </a:spcAft>
+              <a:buClr>
+                <a:schemeClr val="accent1"/>
+              </a:buClr>
+              <a:buSzPct val="80000"/>
+              <a:buFont typeface="Wingdings 3" charset="2"/>
+              <a:buChar char=""/>
+              <a:defRPr sz="1200" kern="1200">
+                <a:solidFill>
+                  <a:schemeClr val="tx1">
+                    <a:lumMod val="75000"/>
+                    <a:lumOff val="25000"/>
+                  </a:schemeClr>
+                </a:solidFill>
+                <a:latin typeface="+mn-lt"/>
+                <a:ea typeface="+mn-ea"/>
+                <a:cs typeface="+mn-cs"/>
+              </a:defRPr>
+            </a:lvl8pPr>
+            <a:lvl9pPr marL="3886200" indent="-228600" algn="l" defTabSz="457200" rtl="0" eaLnBrk="1" latinLnBrk="0" hangingPunct="1">
+              <a:spcBef>
+                <a:spcPts val="1000"/>
+              </a:spcBef>
+              <a:spcAft>
+                <a:spcPts val="0"/>
+              </a:spcAft>
+              <a:buClr>
+                <a:schemeClr val="accent1"/>
+              </a:buClr>
+              <a:buSzPct val="80000"/>
+              <a:buFont typeface="Wingdings 3" charset="2"/>
+              <a:buChar char=""/>
+              <a:defRPr sz="1200" kern="1200">
+                <a:solidFill>
+                  <a:schemeClr val="tx1">
+                    <a:lumMod val="75000"/>
+                    <a:lumOff val="25000"/>
+                  </a:schemeClr>
+                </a:solidFill>
+                <a:latin typeface="+mn-lt"/>
+                <a:ea typeface="+mn-ea"/>
+                <a:cs typeface="+mn-cs"/>
+              </a:defRPr>
+            </a:lvl9pPr>
+          </a:lstStyle>
+          <a:p>
+            <a:endParaRPr lang="en-IN" sz="2400" dirty="0"/>
+          </a:p>
+        </p:txBody>
+      </p:sp>
+      <p:sp>
+        <p:nvSpPr>
+          <p:cNvPr id="20" name="Text Placeholder 28">
+            <a:extLst>
+              <a:ext uri="{FF2B5EF4-FFF2-40B4-BE49-F238E27FC236}">
+                <a16:creationId xmlns:a16="http://schemas.microsoft.com/office/drawing/2014/main" id="{A09A5BC1-0E62-4E6B-A590-951A87D4B4FE}"/>
+              </a:ext>
+            </a:extLst>
+          </p:cNvPr>
+          <p:cNvSpPr txBox="1">
+            <a:spLocks/>
+          </p:cNvSpPr>
+          <p:nvPr/>
+        </p:nvSpPr>
+        <p:spPr>
+          <a:xfrm>
+            <a:off x="5353508" y="3962573"/>
+            <a:ext cx="2596574" cy="453919"/>
+          </a:xfrm>
+          <a:prstGeom prst="rect">
+            <a:avLst/>
+          </a:prstGeom>
+        </p:spPr>
+        <p:txBody>
+          <a:bodyPr vert="horz" lIns="91440" tIns="45720" rIns="91440" bIns="45720" rtlCol="0">
+            <a:normAutofit/>
+          </a:bodyPr>
+          <a:lstStyle>
+            <a:lvl1pPr marL="0" indent="0" algn="ctr" defTabSz="457200" rtl="0" eaLnBrk="1" latinLnBrk="0" hangingPunct="1">
+              <a:spcBef>
+                <a:spcPts val="1000"/>
+              </a:spcBef>
+              <a:spcAft>
+                <a:spcPts val="0"/>
+              </a:spcAft>
+              <a:buClr>
+                <a:schemeClr val="accent1"/>
+              </a:buClr>
+              <a:buSzPct val="80000"/>
+              <a:buFont typeface="Wingdings 3" charset="2"/>
+              <a:buNone/>
+              <a:defRPr lang="en-US" sz="2000" b="1" kern="1200" dirty="0" smtClean="0">
+                <a:solidFill>
+                  <a:schemeClr val="accent4"/>
+                </a:solidFill>
+                <a:latin typeface="+mj-lt"/>
+                <a:ea typeface="+mn-ea"/>
+                <a:cs typeface="+mn-cs"/>
+              </a:defRPr>
+            </a:lvl1pPr>
+            <a:lvl2pPr marL="742950" indent="-285750" algn="l" defTabSz="457200" rtl="0" eaLnBrk="1" latinLnBrk="0" hangingPunct="1">
+              <a:spcBef>
+                <a:spcPts val="1000"/>
+              </a:spcBef>
+              <a:spcAft>
+                <a:spcPts val="0"/>
+              </a:spcAft>
+              <a:buClr>
+                <a:schemeClr val="accent1"/>
+              </a:buClr>
+              <a:buSzPct val="80000"/>
+              <a:buFont typeface="Wingdings 3" charset="2"/>
+              <a:buChar char=""/>
+              <a:defRPr sz="1600" kern="1200">
+                <a:solidFill>
+                  <a:schemeClr val="tx1">
+                    <a:lumMod val="75000"/>
+                    <a:lumOff val="25000"/>
+                  </a:schemeClr>
+                </a:solidFill>
+                <a:latin typeface="+mn-lt"/>
+                <a:ea typeface="+mn-ea"/>
+                <a:cs typeface="+mn-cs"/>
+              </a:defRPr>
+            </a:lvl2pPr>
+            <a:lvl3pPr marL="1143000" indent="-228600" algn="l" defTabSz="457200" rtl="0" eaLnBrk="1" latinLnBrk="0" hangingPunct="1">
+              <a:spcBef>
+                <a:spcPts val="1000"/>
+              </a:spcBef>
+              <a:spcAft>
+                <a:spcPts val="0"/>
+              </a:spcAft>
+              <a:buClr>
+                <a:schemeClr val="accent1"/>
+              </a:buClr>
+              <a:buSzPct val="80000"/>
+              <a:buFont typeface="Wingdings 3" charset="2"/>
+              <a:buChar char=""/>
+              <a:defRPr sz="1400" kern="1200">
+                <a:solidFill>
+                  <a:schemeClr val="tx1">
+                    <a:lumMod val="75000"/>
+                    <a:lumOff val="25000"/>
+                  </a:schemeClr>
+                </a:solidFill>
+                <a:latin typeface="+mn-lt"/>
+                <a:ea typeface="+mn-ea"/>
+                <a:cs typeface="+mn-cs"/>
+              </a:defRPr>
+            </a:lvl3pPr>
+            <a:lvl4pPr marL="1600200" indent="-228600" algn="l" defTabSz="457200" rtl="0" eaLnBrk="1" latinLnBrk="0" hangingPunct="1">
+              <a:spcBef>
+                <a:spcPts val="1000"/>
+              </a:spcBef>
+              <a:spcAft>
+                <a:spcPts val="0"/>
+              </a:spcAft>
+              <a:buClr>
+                <a:schemeClr val="accent1"/>
+              </a:buClr>
+              <a:buSzPct val="80000"/>
+              <a:buFont typeface="Wingdings 3" charset="2"/>
+              <a:buChar char=""/>
+              <a:defRPr sz="1200" kern="1200">
+                <a:solidFill>
+                  <a:schemeClr val="tx1">
+                    <a:lumMod val="75000"/>
+                    <a:lumOff val="25000"/>
+                  </a:schemeClr>
+                </a:solidFill>
+                <a:latin typeface="+mn-lt"/>
+                <a:ea typeface="+mn-ea"/>
+                <a:cs typeface="+mn-cs"/>
+              </a:defRPr>
+            </a:lvl4pPr>
+            <a:lvl5pPr marL="2057400" indent="-228600" algn="l" defTabSz="457200" rtl="0" eaLnBrk="1" latinLnBrk="0" hangingPunct="1">
+              <a:spcBef>
+                <a:spcPts val="1000"/>
+              </a:spcBef>
+              <a:spcAft>
+                <a:spcPts val="0"/>
+              </a:spcAft>
+              <a:buClr>
+                <a:schemeClr val="accent1"/>
+              </a:buClr>
+              <a:buSzPct val="80000"/>
+              <a:buFont typeface="Wingdings 3" charset="2"/>
+              <a:buChar char=""/>
+              <a:defRPr sz="1200" kern="1200">
+                <a:solidFill>
+                  <a:schemeClr val="tx1">
+                    <a:lumMod val="75000"/>
+                    <a:lumOff val="25000"/>
+                  </a:schemeClr>
+                </a:solidFill>
+                <a:latin typeface="+mn-lt"/>
+                <a:ea typeface="+mn-ea"/>
+                <a:cs typeface="+mn-cs"/>
+              </a:defRPr>
+            </a:lvl5pPr>
+            <a:lvl6pPr marL="2514600" indent="-228600" algn="l" defTabSz="457200" rtl="0" eaLnBrk="1" latinLnBrk="0" hangingPunct="1">
+              <a:spcBef>
+                <a:spcPts val="1000"/>
+              </a:spcBef>
+              <a:spcAft>
+                <a:spcPts val="0"/>
+              </a:spcAft>
+              <a:buClr>
+                <a:schemeClr val="accent1"/>
+              </a:buClr>
+              <a:buSzPct val="80000"/>
+              <a:buFont typeface="Wingdings 3" charset="2"/>
+              <a:buChar char=""/>
+              <a:defRPr sz="1200" kern="1200">
+                <a:solidFill>
+                  <a:schemeClr val="tx1">
+                    <a:lumMod val="75000"/>
+                    <a:lumOff val="25000"/>
+                  </a:schemeClr>
+                </a:solidFill>
+                <a:latin typeface="+mn-lt"/>
+                <a:ea typeface="+mn-ea"/>
+                <a:cs typeface="+mn-cs"/>
+              </a:defRPr>
+            </a:lvl6pPr>
+            <a:lvl7pPr marL="2971800" indent="-228600" algn="l" defTabSz="457200" rtl="0" eaLnBrk="1" latinLnBrk="0" hangingPunct="1">
+              <a:spcBef>
+                <a:spcPts val="1000"/>
+              </a:spcBef>
+              <a:spcAft>
+                <a:spcPts val="0"/>
+              </a:spcAft>
+              <a:buClr>
+                <a:schemeClr val="accent1"/>
+              </a:buClr>
+              <a:buSzPct val="80000"/>
+              <a:buFont typeface="Wingdings 3" charset="2"/>
+              <a:buChar char=""/>
+              <a:defRPr sz="1200" kern="1200">
+                <a:solidFill>
+                  <a:schemeClr val="tx1">
+                    <a:lumMod val="75000"/>
+                    <a:lumOff val="25000"/>
+                  </a:schemeClr>
+                </a:solidFill>
+                <a:latin typeface="+mn-lt"/>
+                <a:ea typeface="+mn-ea"/>
+                <a:cs typeface="+mn-cs"/>
+              </a:defRPr>
+            </a:lvl7pPr>
+            <a:lvl8pPr marL="3429000" indent="-228600" algn="l" defTabSz="457200" rtl="0" eaLnBrk="1" latinLnBrk="0" hangingPunct="1">
+              <a:spcBef>
+                <a:spcPts val="1000"/>
+              </a:spcBef>
+              <a:spcAft>
+                <a:spcPts val="0"/>
+              </a:spcAft>
+              <a:buClr>
+                <a:schemeClr val="accent1"/>
+              </a:buClr>
+              <a:buSzPct val="80000"/>
+              <a:buFont typeface="Wingdings 3" charset="2"/>
+              <a:buChar char=""/>
+              <a:defRPr sz="1200" kern="1200">
+                <a:solidFill>
+                  <a:schemeClr val="tx1">
+                    <a:lumMod val="75000"/>
+                    <a:lumOff val="25000"/>
+                  </a:schemeClr>
+                </a:solidFill>
+                <a:latin typeface="+mn-lt"/>
+                <a:ea typeface="+mn-ea"/>
+                <a:cs typeface="+mn-cs"/>
+              </a:defRPr>
+            </a:lvl8pPr>
+            <a:lvl9pPr marL="3886200" indent="-228600" algn="l" defTabSz="457200" rtl="0" eaLnBrk="1" latinLnBrk="0" hangingPunct="1">
+              <a:spcBef>
+                <a:spcPts val="1000"/>
+              </a:spcBef>
+              <a:spcAft>
+                <a:spcPts val="0"/>
+              </a:spcAft>
+              <a:buClr>
+                <a:schemeClr val="accent1"/>
+              </a:buClr>
+              <a:buSzPct val="80000"/>
+              <a:buFont typeface="Wingdings 3" charset="2"/>
+              <a:buChar char=""/>
+              <a:defRPr sz="1200" kern="1200">
+                <a:solidFill>
+                  <a:schemeClr val="tx1">
+                    <a:lumMod val="75000"/>
+                    <a:lumOff val="25000"/>
+                  </a:schemeClr>
+                </a:solidFill>
+                <a:latin typeface="+mn-lt"/>
+                <a:ea typeface="+mn-ea"/>
+                <a:cs typeface="+mn-cs"/>
+              </a:defRPr>
+            </a:lvl9pPr>
+          </a:lstStyle>
+          <a:p>
+            <a:endParaRPr lang="en-IN" sz="2200" dirty="0"/>
+          </a:p>
+        </p:txBody>
+      </p:sp>
+      <p:sp>
+        <p:nvSpPr>
+          <p:cNvPr id="23" name="Text Placeholder 28">
+            <a:extLst>
+              <a:ext uri="{FF2B5EF4-FFF2-40B4-BE49-F238E27FC236}">
+                <a16:creationId xmlns:a16="http://schemas.microsoft.com/office/drawing/2014/main" id="{9E6B148F-F3B6-4E6B-9B85-645C039858E8}"/>
+              </a:ext>
+            </a:extLst>
+          </p:cNvPr>
+          <p:cNvSpPr txBox="1">
+            <a:spLocks/>
+          </p:cNvSpPr>
+          <p:nvPr/>
+        </p:nvSpPr>
+        <p:spPr>
+          <a:xfrm>
+            <a:off x="7789163" y="3962572"/>
+            <a:ext cx="2596574" cy="453919"/>
+          </a:xfrm>
+          <a:prstGeom prst="rect">
+            <a:avLst/>
+          </a:prstGeom>
+        </p:spPr>
+        <p:txBody>
+          <a:bodyPr vert="horz" lIns="91440" tIns="45720" rIns="91440" bIns="45720" rtlCol="0">
+            <a:normAutofit/>
+          </a:bodyPr>
+          <a:lstStyle>
+            <a:lvl1pPr marL="0" indent="0" algn="ctr" defTabSz="457200" rtl="0" eaLnBrk="1" latinLnBrk="0" hangingPunct="1">
+              <a:spcBef>
+                <a:spcPts val="1000"/>
+              </a:spcBef>
+              <a:spcAft>
+                <a:spcPts val="0"/>
+              </a:spcAft>
+              <a:buClr>
+                <a:schemeClr val="accent1"/>
+              </a:buClr>
+              <a:buSzPct val="80000"/>
+              <a:buFont typeface="Wingdings 3" charset="2"/>
+              <a:buNone/>
+              <a:defRPr lang="en-US" sz="2000" b="1" kern="1200" dirty="0" smtClean="0">
+                <a:solidFill>
+                  <a:schemeClr val="accent4"/>
+                </a:solidFill>
+                <a:latin typeface="+mj-lt"/>
+                <a:ea typeface="+mn-ea"/>
+                <a:cs typeface="+mn-cs"/>
+              </a:defRPr>
+            </a:lvl1pPr>
+            <a:lvl2pPr marL="742950" indent="-285750" algn="l" defTabSz="457200" rtl="0" eaLnBrk="1" latinLnBrk="0" hangingPunct="1">
+              <a:spcBef>
+                <a:spcPts val="1000"/>
+              </a:spcBef>
+              <a:spcAft>
+                <a:spcPts val="0"/>
+              </a:spcAft>
+              <a:buClr>
+                <a:schemeClr val="accent1"/>
+              </a:buClr>
+              <a:buSzPct val="80000"/>
+              <a:buFont typeface="Wingdings 3" charset="2"/>
+              <a:buChar char=""/>
+              <a:defRPr sz="1600" kern="1200">
+                <a:solidFill>
+                  <a:schemeClr val="tx1">
+                    <a:lumMod val="75000"/>
+                    <a:lumOff val="25000"/>
+                  </a:schemeClr>
+                </a:solidFill>
+                <a:latin typeface="+mn-lt"/>
+                <a:ea typeface="+mn-ea"/>
+                <a:cs typeface="+mn-cs"/>
+              </a:defRPr>
+            </a:lvl2pPr>
+            <a:lvl3pPr marL="1143000" indent="-228600" algn="l" defTabSz="457200" rtl="0" eaLnBrk="1" latinLnBrk="0" hangingPunct="1">
+              <a:spcBef>
+                <a:spcPts val="1000"/>
+              </a:spcBef>
+              <a:spcAft>
+                <a:spcPts val="0"/>
+              </a:spcAft>
+              <a:buClr>
+                <a:schemeClr val="accent1"/>
+              </a:buClr>
+              <a:buSzPct val="80000"/>
+              <a:buFont typeface="Wingdings 3" charset="2"/>
+              <a:buChar char=""/>
+              <a:defRPr sz="1400" kern="1200">
+                <a:solidFill>
+                  <a:schemeClr val="tx1">
+                    <a:lumMod val="75000"/>
+                    <a:lumOff val="25000"/>
+                  </a:schemeClr>
+                </a:solidFill>
+                <a:latin typeface="+mn-lt"/>
+                <a:ea typeface="+mn-ea"/>
+                <a:cs typeface="+mn-cs"/>
+              </a:defRPr>
+            </a:lvl3pPr>
+            <a:lvl4pPr marL="1600200" indent="-228600" algn="l" defTabSz="457200" rtl="0" eaLnBrk="1" latinLnBrk="0" hangingPunct="1">
+              <a:spcBef>
+                <a:spcPts val="1000"/>
+              </a:spcBef>
+              <a:spcAft>
+                <a:spcPts val="0"/>
+              </a:spcAft>
+              <a:buClr>
+                <a:schemeClr val="accent1"/>
+              </a:buClr>
+              <a:buSzPct val="80000"/>
+              <a:buFont typeface="Wingdings 3" charset="2"/>
+              <a:buChar char=""/>
+              <a:defRPr sz="1200" kern="1200">
+                <a:solidFill>
+                  <a:schemeClr val="tx1">
+                    <a:lumMod val="75000"/>
+                    <a:lumOff val="25000"/>
+                  </a:schemeClr>
+                </a:solidFill>
+                <a:latin typeface="+mn-lt"/>
+                <a:ea typeface="+mn-ea"/>
+                <a:cs typeface="+mn-cs"/>
+              </a:defRPr>
+            </a:lvl4pPr>
+            <a:lvl5pPr marL="2057400" indent="-228600" algn="l" defTabSz="457200" rtl="0" eaLnBrk="1" latinLnBrk="0" hangingPunct="1">
+              <a:spcBef>
+                <a:spcPts val="1000"/>
+              </a:spcBef>
+              <a:spcAft>
+                <a:spcPts val="0"/>
+              </a:spcAft>
+              <a:buClr>
+                <a:schemeClr val="accent1"/>
+              </a:buClr>
+              <a:buSzPct val="80000"/>
+              <a:buFont typeface="Wingdings 3" charset="2"/>
+              <a:buChar char=""/>
+              <a:defRPr sz="1200" kern="1200">
+                <a:solidFill>
+                  <a:schemeClr val="tx1">
+                    <a:lumMod val="75000"/>
+                    <a:lumOff val="25000"/>
+                  </a:schemeClr>
+                </a:solidFill>
+                <a:latin typeface="+mn-lt"/>
+                <a:ea typeface="+mn-ea"/>
+                <a:cs typeface="+mn-cs"/>
+              </a:defRPr>
+            </a:lvl5pPr>
+            <a:lvl6pPr marL="2514600" indent="-228600" algn="l" defTabSz="457200" rtl="0" eaLnBrk="1" latinLnBrk="0" hangingPunct="1">
+              <a:spcBef>
+                <a:spcPts val="1000"/>
+              </a:spcBef>
+              <a:spcAft>
+                <a:spcPts val="0"/>
+              </a:spcAft>
+              <a:buClr>
+                <a:schemeClr val="accent1"/>
+              </a:buClr>
+              <a:buSzPct val="80000"/>
+              <a:buFont typeface="Wingdings 3" charset="2"/>
+              <a:buChar char=""/>
+              <a:defRPr sz="1200" kern="1200">
+                <a:solidFill>
+                  <a:schemeClr val="tx1">
+                    <a:lumMod val="75000"/>
+                    <a:lumOff val="25000"/>
+                  </a:schemeClr>
+                </a:solidFill>
+                <a:latin typeface="+mn-lt"/>
+                <a:ea typeface="+mn-ea"/>
+                <a:cs typeface="+mn-cs"/>
+              </a:defRPr>
+            </a:lvl6pPr>
+            <a:lvl7pPr marL="2971800" indent="-228600" algn="l" defTabSz="457200" rtl="0" eaLnBrk="1" latinLnBrk="0" hangingPunct="1">
+              <a:spcBef>
+                <a:spcPts val="1000"/>
+              </a:spcBef>
+              <a:spcAft>
+                <a:spcPts val="0"/>
+              </a:spcAft>
+              <a:buClr>
+                <a:schemeClr val="accent1"/>
+              </a:buClr>
+              <a:buSzPct val="80000"/>
+              <a:buFont typeface="Wingdings 3" charset="2"/>
+              <a:buChar char=""/>
+              <a:defRPr sz="1200" kern="1200">
+                <a:solidFill>
+                  <a:schemeClr val="tx1">
+                    <a:lumMod val="75000"/>
+                    <a:lumOff val="25000"/>
+                  </a:schemeClr>
+                </a:solidFill>
+                <a:latin typeface="+mn-lt"/>
+                <a:ea typeface="+mn-ea"/>
+                <a:cs typeface="+mn-cs"/>
+              </a:defRPr>
+            </a:lvl7pPr>
+            <a:lvl8pPr marL="3429000" indent="-228600" algn="l" defTabSz="457200" rtl="0" eaLnBrk="1" latinLnBrk="0" hangingPunct="1">
+              <a:spcBef>
+                <a:spcPts val="1000"/>
+              </a:spcBef>
+              <a:spcAft>
+                <a:spcPts val="0"/>
+              </a:spcAft>
+              <a:buClr>
+                <a:schemeClr val="accent1"/>
+              </a:buClr>
+              <a:buSzPct val="80000"/>
+              <a:buFont typeface="Wingdings 3" charset="2"/>
+              <a:buChar char=""/>
+              <a:defRPr sz="1200" kern="1200">
+                <a:solidFill>
+                  <a:schemeClr val="tx1">
+                    <a:lumMod val="75000"/>
+                    <a:lumOff val="25000"/>
+                  </a:schemeClr>
+                </a:solidFill>
+                <a:latin typeface="+mn-lt"/>
+                <a:ea typeface="+mn-ea"/>
+                <a:cs typeface="+mn-cs"/>
+              </a:defRPr>
+            </a:lvl8pPr>
+            <a:lvl9pPr marL="3886200" indent="-228600" algn="l" defTabSz="457200" rtl="0" eaLnBrk="1" latinLnBrk="0" hangingPunct="1">
+              <a:spcBef>
+                <a:spcPts val="1000"/>
+              </a:spcBef>
+              <a:spcAft>
+                <a:spcPts val="0"/>
+              </a:spcAft>
+              <a:buClr>
+                <a:schemeClr val="accent1"/>
+              </a:buClr>
+              <a:buSzPct val="80000"/>
+              <a:buFont typeface="Wingdings 3" charset="2"/>
+              <a:buChar char=""/>
+              <a:defRPr sz="1200" kern="1200">
+                <a:solidFill>
+                  <a:schemeClr val="tx1">
+                    <a:lumMod val="75000"/>
+                    <a:lumOff val="25000"/>
+                  </a:schemeClr>
+                </a:solidFill>
+                <a:latin typeface="+mn-lt"/>
+                <a:ea typeface="+mn-ea"/>
+                <a:cs typeface="+mn-cs"/>
+              </a:defRPr>
+            </a:lvl9pPr>
+          </a:lstStyle>
+          <a:p>
+            <a:endParaRPr lang="en-IN" sz="2200" dirty="0"/>
+          </a:p>
+        </p:txBody>
+      </p:sp>
+      <p:sp>
+        <p:nvSpPr>
+          <p:cNvPr id="30" name="Text Placeholder 30">
+            <a:extLst>
+              <a:ext uri="{FF2B5EF4-FFF2-40B4-BE49-F238E27FC236}">
+                <a16:creationId xmlns:a16="http://schemas.microsoft.com/office/drawing/2014/main" id="{D3BF02F6-2753-476A-8046-A85AE3A49748}"/>
+              </a:ext>
+            </a:extLst>
+          </p:cNvPr>
+          <p:cNvSpPr txBox="1">
+            <a:spLocks/>
+          </p:cNvSpPr>
+          <p:nvPr/>
+        </p:nvSpPr>
+        <p:spPr>
+          <a:xfrm>
+            <a:off x="6096000" y="4641925"/>
+            <a:ext cx="2139695" cy="1108635"/>
+          </a:xfrm>
+          <a:prstGeom prst="rect">
+            <a:avLst/>
+          </a:prstGeom>
+        </p:spPr>
+        <p:txBody>
+          <a:bodyPr vert="horz" lIns="91440" tIns="45720" rIns="91440" bIns="45720" rtlCol="0">
+            <a:normAutofit/>
+          </a:bodyPr>
+          <a:lstStyle>
+            <a:lvl1pPr marL="0" indent="0" algn="ctr" defTabSz="457200" rtl="0" eaLnBrk="1" latinLnBrk="0" hangingPunct="1">
+              <a:spcBef>
+                <a:spcPts val="1000"/>
+              </a:spcBef>
+              <a:spcAft>
+                <a:spcPts val="0"/>
+              </a:spcAft>
+              <a:buClr>
+                <a:schemeClr val="accent1"/>
+              </a:buClr>
+              <a:buSzPct val="80000"/>
+              <a:buFont typeface="Wingdings 3" charset="2"/>
+              <a:buNone/>
+              <a:defRPr lang="en-US" sz="1600" kern="1200" dirty="0" smtClean="0">
+                <a:solidFill>
+                  <a:schemeClr val="tx1"/>
+                </a:solidFill>
+                <a:latin typeface="+mn-lt"/>
+                <a:ea typeface="+mn-ea"/>
+                <a:cs typeface="+mn-cs"/>
+              </a:defRPr>
+            </a:lvl1pPr>
+            <a:lvl2pPr marL="742950" indent="-285750" algn="l" defTabSz="457200" rtl="0" eaLnBrk="1" latinLnBrk="0" hangingPunct="1">
+              <a:spcBef>
+                <a:spcPts val="1000"/>
+              </a:spcBef>
+              <a:spcAft>
+                <a:spcPts val="0"/>
+              </a:spcAft>
+              <a:buClr>
+                <a:schemeClr val="accent1"/>
+              </a:buClr>
+              <a:buSzPct val="80000"/>
+              <a:buFont typeface="Wingdings 3" charset="2"/>
+              <a:buChar char=""/>
+              <a:defRPr sz="1600" kern="1200">
+                <a:solidFill>
+                  <a:schemeClr val="tx1">
+                    <a:lumMod val="75000"/>
+                    <a:lumOff val="25000"/>
+                  </a:schemeClr>
+                </a:solidFill>
+                <a:latin typeface="+mn-lt"/>
+                <a:ea typeface="+mn-ea"/>
+                <a:cs typeface="+mn-cs"/>
+              </a:defRPr>
+            </a:lvl2pPr>
+            <a:lvl3pPr marL="1143000" indent="-228600" algn="l" defTabSz="457200" rtl="0" eaLnBrk="1" latinLnBrk="0" hangingPunct="1">
+              <a:spcBef>
+                <a:spcPts val="1000"/>
+              </a:spcBef>
+              <a:spcAft>
+                <a:spcPts val="0"/>
+              </a:spcAft>
+              <a:buClr>
+                <a:schemeClr val="accent1"/>
+              </a:buClr>
+              <a:buSzPct val="80000"/>
+              <a:buFont typeface="Wingdings 3" charset="2"/>
+              <a:buChar char=""/>
+              <a:defRPr sz="1400" kern="1200">
+                <a:solidFill>
+                  <a:schemeClr val="tx1">
+                    <a:lumMod val="75000"/>
+                    <a:lumOff val="25000"/>
+                  </a:schemeClr>
+                </a:solidFill>
+                <a:latin typeface="+mn-lt"/>
+                <a:ea typeface="+mn-ea"/>
+                <a:cs typeface="+mn-cs"/>
+              </a:defRPr>
+            </a:lvl3pPr>
+            <a:lvl4pPr marL="1600200" indent="-228600" algn="l" defTabSz="457200" rtl="0" eaLnBrk="1" latinLnBrk="0" hangingPunct="1">
+              <a:spcBef>
+                <a:spcPts val="1000"/>
+              </a:spcBef>
+              <a:spcAft>
+                <a:spcPts val="0"/>
+              </a:spcAft>
+              <a:buClr>
+                <a:schemeClr val="accent1"/>
+              </a:buClr>
+              <a:buSzPct val="80000"/>
+              <a:buFont typeface="Wingdings 3" charset="2"/>
+              <a:buChar char=""/>
+              <a:defRPr sz="1200" kern="1200">
+                <a:solidFill>
+                  <a:schemeClr val="tx1">
+                    <a:lumMod val="75000"/>
+                    <a:lumOff val="25000"/>
+                  </a:schemeClr>
+                </a:solidFill>
+                <a:latin typeface="+mn-lt"/>
+                <a:ea typeface="+mn-ea"/>
+                <a:cs typeface="+mn-cs"/>
+              </a:defRPr>
+            </a:lvl4pPr>
+            <a:lvl5pPr marL="2057400" indent="-228600" algn="l" defTabSz="457200" rtl="0" eaLnBrk="1" latinLnBrk="0" hangingPunct="1">
+              <a:spcBef>
+                <a:spcPts val="1000"/>
+              </a:spcBef>
+              <a:spcAft>
+                <a:spcPts val="0"/>
+              </a:spcAft>
+              <a:buClr>
+                <a:schemeClr val="accent1"/>
+              </a:buClr>
+              <a:buSzPct val="80000"/>
+              <a:buFont typeface="Wingdings 3" charset="2"/>
+              <a:buChar char=""/>
+              <a:defRPr sz="1200" kern="1200">
+                <a:solidFill>
+                  <a:schemeClr val="tx1">
+                    <a:lumMod val="75000"/>
+                    <a:lumOff val="25000"/>
+                  </a:schemeClr>
+                </a:solidFill>
+                <a:latin typeface="+mn-lt"/>
+                <a:ea typeface="+mn-ea"/>
+                <a:cs typeface="+mn-cs"/>
+              </a:defRPr>
+            </a:lvl5pPr>
+            <a:lvl6pPr marL="2514600" indent="-228600" algn="l" defTabSz="457200" rtl="0" eaLnBrk="1" latinLnBrk="0" hangingPunct="1">
+              <a:spcBef>
+                <a:spcPts val="1000"/>
+              </a:spcBef>
+              <a:spcAft>
+                <a:spcPts val="0"/>
+              </a:spcAft>
+              <a:buClr>
+                <a:schemeClr val="accent1"/>
+              </a:buClr>
+              <a:buSzPct val="80000"/>
+              <a:buFont typeface="Wingdings 3" charset="2"/>
+              <a:buChar char=""/>
+              <a:defRPr sz="1200" kern="1200">
+                <a:solidFill>
+                  <a:schemeClr val="tx1">
+                    <a:lumMod val="75000"/>
+                    <a:lumOff val="25000"/>
+                  </a:schemeClr>
+                </a:solidFill>
+                <a:latin typeface="+mn-lt"/>
+                <a:ea typeface="+mn-ea"/>
+                <a:cs typeface="+mn-cs"/>
+              </a:defRPr>
+            </a:lvl6pPr>
+            <a:lvl7pPr marL="2971800" indent="-228600" algn="l" defTabSz="457200" rtl="0" eaLnBrk="1" latinLnBrk="0" hangingPunct="1">
+              <a:spcBef>
+                <a:spcPts val="1000"/>
+              </a:spcBef>
+              <a:spcAft>
+                <a:spcPts val="0"/>
+              </a:spcAft>
+              <a:buClr>
+                <a:schemeClr val="accent1"/>
+              </a:buClr>
+              <a:buSzPct val="80000"/>
+              <a:buFont typeface="Wingdings 3" charset="2"/>
+              <a:buChar char=""/>
+              <a:defRPr sz="1200" kern="1200">
+                <a:solidFill>
+                  <a:schemeClr val="tx1">
+                    <a:lumMod val="75000"/>
+                    <a:lumOff val="25000"/>
+                  </a:schemeClr>
+                </a:solidFill>
+                <a:latin typeface="+mn-lt"/>
+                <a:ea typeface="+mn-ea"/>
+                <a:cs typeface="+mn-cs"/>
+              </a:defRPr>
+            </a:lvl7pPr>
+            <a:lvl8pPr marL="3429000" indent="-228600" algn="l" defTabSz="457200" rtl="0" eaLnBrk="1" latinLnBrk="0" hangingPunct="1">
+              <a:spcBef>
+                <a:spcPts val="1000"/>
+              </a:spcBef>
+              <a:spcAft>
+                <a:spcPts val="0"/>
+              </a:spcAft>
+              <a:buClr>
+                <a:schemeClr val="accent1"/>
+              </a:buClr>
+              <a:buSzPct val="80000"/>
+              <a:buFont typeface="Wingdings 3" charset="2"/>
+              <a:buChar char=""/>
+              <a:defRPr sz="1200" kern="1200">
+                <a:solidFill>
+                  <a:schemeClr val="tx1">
+                    <a:lumMod val="75000"/>
+                    <a:lumOff val="25000"/>
+                  </a:schemeClr>
+                </a:solidFill>
+                <a:latin typeface="+mn-lt"/>
+                <a:ea typeface="+mn-ea"/>
+                <a:cs typeface="+mn-cs"/>
+              </a:defRPr>
+            </a:lvl8pPr>
+            <a:lvl9pPr marL="3886200" indent="-228600" algn="l" defTabSz="457200" rtl="0" eaLnBrk="1" latinLnBrk="0" hangingPunct="1">
+              <a:spcBef>
+                <a:spcPts val="1000"/>
+              </a:spcBef>
+              <a:spcAft>
+                <a:spcPts val="0"/>
+              </a:spcAft>
+              <a:buClr>
+                <a:schemeClr val="accent1"/>
+              </a:buClr>
+              <a:buSzPct val="80000"/>
+              <a:buFont typeface="Wingdings 3" charset="2"/>
+              <a:buChar char=""/>
+              <a:defRPr sz="1200" kern="1200">
+                <a:solidFill>
+                  <a:schemeClr val="tx1">
+                    <a:lumMod val="75000"/>
+                    <a:lumOff val="25000"/>
+                  </a:schemeClr>
+                </a:solidFill>
+                <a:latin typeface="+mn-lt"/>
+                <a:ea typeface="+mn-ea"/>
+                <a:cs typeface="+mn-cs"/>
+              </a:defRPr>
+            </a:lvl9pPr>
+          </a:lstStyle>
+          <a:p>
+            <a:endParaRPr lang="en-GB" dirty="0"/>
+          </a:p>
+        </p:txBody>
+      </p:sp>
+      <p:sp>
+        <p:nvSpPr>
+          <p:cNvPr id="32" name="Text Placeholder 30">
+            <a:extLst>
+              <a:ext uri="{FF2B5EF4-FFF2-40B4-BE49-F238E27FC236}">
+                <a16:creationId xmlns:a16="http://schemas.microsoft.com/office/drawing/2014/main" id="{B993AB29-3A3A-4473-8AC8-86E859C97321}"/>
+              </a:ext>
+            </a:extLst>
+          </p:cNvPr>
+          <p:cNvSpPr txBox="1">
+            <a:spLocks/>
+          </p:cNvSpPr>
+          <p:nvPr/>
+        </p:nvSpPr>
+        <p:spPr>
+          <a:xfrm>
+            <a:off x="8591363" y="4641925"/>
+            <a:ext cx="2139695" cy="1108635"/>
+          </a:xfrm>
+          <a:prstGeom prst="rect">
+            <a:avLst/>
+          </a:prstGeom>
+        </p:spPr>
+        <p:txBody>
+          <a:bodyPr vert="horz" lIns="91440" tIns="45720" rIns="91440" bIns="45720" rtlCol="0">
+            <a:normAutofit/>
+          </a:bodyPr>
+          <a:lstStyle>
+            <a:lvl1pPr marL="0" indent="0" algn="ctr" defTabSz="457200" rtl="0" eaLnBrk="1" latinLnBrk="0" hangingPunct="1">
+              <a:spcBef>
+                <a:spcPts val="1000"/>
+              </a:spcBef>
+              <a:spcAft>
+                <a:spcPts val="0"/>
+              </a:spcAft>
+              <a:buClr>
+                <a:schemeClr val="accent1"/>
+              </a:buClr>
+              <a:buSzPct val="80000"/>
+              <a:buFont typeface="Wingdings 3" charset="2"/>
+              <a:buNone/>
+              <a:defRPr lang="en-US" sz="1600" kern="1200" dirty="0" smtClean="0">
+                <a:solidFill>
+                  <a:schemeClr val="tx1"/>
+                </a:solidFill>
+                <a:latin typeface="+mn-lt"/>
+                <a:ea typeface="+mn-ea"/>
+                <a:cs typeface="+mn-cs"/>
+              </a:defRPr>
+            </a:lvl1pPr>
+            <a:lvl2pPr marL="742950" indent="-285750" algn="l" defTabSz="457200" rtl="0" eaLnBrk="1" latinLnBrk="0" hangingPunct="1">
+              <a:spcBef>
+                <a:spcPts val="1000"/>
+              </a:spcBef>
+              <a:spcAft>
+                <a:spcPts val="0"/>
+              </a:spcAft>
+              <a:buClr>
+                <a:schemeClr val="accent1"/>
+              </a:buClr>
+              <a:buSzPct val="80000"/>
+              <a:buFont typeface="Wingdings 3" charset="2"/>
+              <a:buChar char=""/>
+              <a:defRPr sz="1600" kern="1200">
+                <a:solidFill>
+                  <a:schemeClr val="tx1">
+                    <a:lumMod val="75000"/>
+                    <a:lumOff val="25000"/>
+                  </a:schemeClr>
+                </a:solidFill>
+                <a:latin typeface="+mn-lt"/>
+                <a:ea typeface="+mn-ea"/>
+                <a:cs typeface="+mn-cs"/>
+              </a:defRPr>
+            </a:lvl2pPr>
+            <a:lvl3pPr marL="1143000" indent="-228600" algn="l" defTabSz="457200" rtl="0" eaLnBrk="1" latinLnBrk="0" hangingPunct="1">
+              <a:spcBef>
+                <a:spcPts val="1000"/>
+              </a:spcBef>
+              <a:spcAft>
+                <a:spcPts val="0"/>
+              </a:spcAft>
+              <a:buClr>
+                <a:schemeClr val="accent1"/>
+              </a:buClr>
+              <a:buSzPct val="80000"/>
+              <a:buFont typeface="Wingdings 3" charset="2"/>
+              <a:buChar char=""/>
+              <a:defRPr sz="1400" kern="1200">
+                <a:solidFill>
+                  <a:schemeClr val="tx1">
+                    <a:lumMod val="75000"/>
+                    <a:lumOff val="25000"/>
+                  </a:schemeClr>
+                </a:solidFill>
+                <a:latin typeface="+mn-lt"/>
+                <a:ea typeface="+mn-ea"/>
+                <a:cs typeface="+mn-cs"/>
+              </a:defRPr>
+            </a:lvl3pPr>
+            <a:lvl4pPr marL="1600200" indent="-228600" algn="l" defTabSz="457200" rtl="0" eaLnBrk="1" latinLnBrk="0" hangingPunct="1">
+              <a:spcBef>
+                <a:spcPts val="1000"/>
+              </a:spcBef>
+              <a:spcAft>
+                <a:spcPts val="0"/>
+              </a:spcAft>
+              <a:buClr>
+                <a:schemeClr val="accent1"/>
+              </a:buClr>
+              <a:buSzPct val="80000"/>
+              <a:buFont typeface="Wingdings 3" charset="2"/>
+              <a:buChar char=""/>
+              <a:defRPr sz="1200" kern="1200">
+                <a:solidFill>
+                  <a:schemeClr val="tx1">
+                    <a:lumMod val="75000"/>
+                    <a:lumOff val="25000"/>
+                  </a:schemeClr>
+                </a:solidFill>
+                <a:latin typeface="+mn-lt"/>
+                <a:ea typeface="+mn-ea"/>
+                <a:cs typeface="+mn-cs"/>
+              </a:defRPr>
+            </a:lvl4pPr>
+            <a:lvl5pPr marL="2057400" indent="-228600" algn="l" defTabSz="457200" rtl="0" eaLnBrk="1" latinLnBrk="0" hangingPunct="1">
+              <a:spcBef>
+                <a:spcPts val="1000"/>
+              </a:spcBef>
+              <a:spcAft>
+                <a:spcPts val="0"/>
+              </a:spcAft>
+              <a:buClr>
+                <a:schemeClr val="accent1"/>
+              </a:buClr>
+              <a:buSzPct val="80000"/>
+              <a:buFont typeface="Wingdings 3" charset="2"/>
+              <a:buChar char=""/>
+              <a:defRPr sz="1200" kern="1200">
+                <a:solidFill>
+                  <a:schemeClr val="tx1">
+                    <a:lumMod val="75000"/>
+                    <a:lumOff val="25000"/>
+                  </a:schemeClr>
+                </a:solidFill>
+                <a:latin typeface="+mn-lt"/>
+                <a:ea typeface="+mn-ea"/>
+                <a:cs typeface="+mn-cs"/>
+              </a:defRPr>
+            </a:lvl5pPr>
+            <a:lvl6pPr marL="2514600" indent="-228600" algn="l" defTabSz="457200" rtl="0" eaLnBrk="1" latinLnBrk="0" hangingPunct="1">
+              <a:spcBef>
+                <a:spcPts val="1000"/>
+              </a:spcBef>
+              <a:spcAft>
+                <a:spcPts val="0"/>
+              </a:spcAft>
+              <a:buClr>
+                <a:schemeClr val="accent1"/>
+              </a:buClr>
+              <a:buSzPct val="80000"/>
+              <a:buFont typeface="Wingdings 3" charset="2"/>
+              <a:buChar char=""/>
+              <a:defRPr sz="1200" kern="1200">
+                <a:solidFill>
+                  <a:schemeClr val="tx1">
+                    <a:lumMod val="75000"/>
+                    <a:lumOff val="25000"/>
+                  </a:schemeClr>
+                </a:solidFill>
+                <a:latin typeface="+mn-lt"/>
+                <a:ea typeface="+mn-ea"/>
+                <a:cs typeface="+mn-cs"/>
+              </a:defRPr>
+            </a:lvl6pPr>
+            <a:lvl7pPr marL="2971800" indent="-228600" algn="l" defTabSz="457200" rtl="0" eaLnBrk="1" latinLnBrk="0" hangingPunct="1">
+              <a:spcBef>
+                <a:spcPts val="1000"/>
+              </a:spcBef>
+              <a:spcAft>
+                <a:spcPts val="0"/>
+              </a:spcAft>
+              <a:buClr>
+                <a:schemeClr val="accent1"/>
+              </a:buClr>
+              <a:buSzPct val="80000"/>
+              <a:buFont typeface="Wingdings 3" charset="2"/>
+              <a:buChar char=""/>
+              <a:defRPr sz="1200" kern="1200">
+                <a:solidFill>
+                  <a:schemeClr val="tx1">
+                    <a:lumMod val="75000"/>
+                    <a:lumOff val="25000"/>
+                  </a:schemeClr>
+                </a:solidFill>
+                <a:latin typeface="+mn-lt"/>
+                <a:ea typeface="+mn-ea"/>
+                <a:cs typeface="+mn-cs"/>
+              </a:defRPr>
+            </a:lvl7pPr>
+            <a:lvl8pPr marL="3429000" indent="-228600" algn="l" defTabSz="457200" rtl="0" eaLnBrk="1" latinLnBrk="0" hangingPunct="1">
+              <a:spcBef>
+                <a:spcPts val="1000"/>
+              </a:spcBef>
+              <a:spcAft>
+                <a:spcPts val="0"/>
+              </a:spcAft>
+              <a:buClr>
+                <a:schemeClr val="accent1"/>
+              </a:buClr>
+              <a:buSzPct val="80000"/>
+              <a:buFont typeface="Wingdings 3" charset="2"/>
+              <a:buChar char=""/>
+              <a:defRPr sz="1200" kern="1200">
+                <a:solidFill>
+                  <a:schemeClr val="tx1">
+                    <a:lumMod val="75000"/>
+                    <a:lumOff val="25000"/>
+                  </a:schemeClr>
+                </a:solidFill>
+                <a:latin typeface="+mn-lt"/>
+                <a:ea typeface="+mn-ea"/>
+                <a:cs typeface="+mn-cs"/>
+              </a:defRPr>
+            </a:lvl8pPr>
+            <a:lvl9pPr marL="3886200" indent="-228600" algn="l" defTabSz="457200" rtl="0" eaLnBrk="1" latinLnBrk="0" hangingPunct="1">
+              <a:spcBef>
+                <a:spcPts val="1000"/>
+              </a:spcBef>
+              <a:spcAft>
+                <a:spcPts val="0"/>
+              </a:spcAft>
+              <a:buClr>
+                <a:schemeClr val="accent1"/>
+              </a:buClr>
+              <a:buSzPct val="80000"/>
+              <a:buFont typeface="Wingdings 3" charset="2"/>
+              <a:buChar char=""/>
+              <a:defRPr sz="1200" kern="1200">
+                <a:solidFill>
+                  <a:schemeClr val="tx1">
+                    <a:lumMod val="75000"/>
+                    <a:lumOff val="25000"/>
+                  </a:schemeClr>
+                </a:solidFill>
+                <a:latin typeface="+mn-lt"/>
+                <a:ea typeface="+mn-ea"/>
+                <a:cs typeface="+mn-cs"/>
+              </a:defRPr>
+            </a:lvl9pPr>
+          </a:lstStyle>
+          <a:p>
+            <a:r>
+              <a:rPr lang="en-GB" dirty="0"/>
+              <a:t>.</a:t>
+            </a:r>
+          </a:p>
+        </p:txBody>
+      </p:sp>
       <p:pic>
         <p:nvPicPr>
-          <p:cNvPr id="5" name="Picture 4">
+          <p:cNvPr id="15" name="Picture 14">
             <a:extLst>
               <a:ext uri="{FF2B5EF4-FFF2-40B4-BE49-F238E27FC236}">
-                <a16:creationId xmlns:a16="http://schemas.microsoft.com/office/drawing/2014/main" id="{3D44118A-0276-9E2F-E0E8-85CEE9F1E0C7}"/>
+                <a16:creationId xmlns:a16="http://schemas.microsoft.com/office/drawing/2014/main" id="{BD3F9E86-2FB3-4DB3-9343-59D594F350A0}"/>
               </a:ext>
             </a:extLst>
           </p:cNvPr>
@@ -13803,10 +16439,10 @@
       </p:pic>
       <p:sp>
         <p:nvSpPr>
-          <p:cNvPr id="4" name="Title 3">
+          <p:cNvPr id="12" name="Text Placeholder 11">
             <a:extLst>
               <a:ext uri="{FF2B5EF4-FFF2-40B4-BE49-F238E27FC236}">
-                <a16:creationId xmlns:a16="http://schemas.microsoft.com/office/drawing/2014/main" id="{901A2257-2F98-CB88-038E-C0F1D0A1A363}"/>
+                <a16:creationId xmlns:a16="http://schemas.microsoft.com/office/drawing/2014/main" id="{BC277FD7-925B-4C3D-A364-118403201507}"/>
               </a:ext>
             </a:extLst>
           </p:cNvPr>
@@ -13814,599 +16450,23 @@
             <a:spLocks noGrp="1"/>
           </p:cNvSpPr>
           <p:nvPr>
-            <p:ph type="title"/>
+            <p:ph type="body" sz="quarter" idx="12"/>
           </p:nvPr>
         </p:nvSpPr>
         <p:spPr>
           <a:xfrm>
-            <a:off x="675957" y="535508"/>
-            <a:ext cx="4735798" cy="666078"/>
+            <a:off x="675957" y="1595718"/>
+            <a:ext cx="9346584" cy="3137647"/>
           </a:xfrm>
         </p:spPr>
         <p:txBody>
           <a:bodyPr>
-            <a:normAutofit fontScale="90000"/>
+            <a:normAutofit fontScale="40000" lnSpcReduction="20000"/>
           </a:bodyPr>
           <a:lstStyle/>
           <a:p>
             <a:r>
-              <a:rPr lang="en-IN" sz="4000" dirty="0"/>
-              <a:t>GitHub Link</a:t>
-            </a:r>
-          </a:p>
-        </p:txBody>
-      </p:sp>
-      <p:sp>
-        <p:nvSpPr>
-          <p:cNvPr id="7" name="Text Placeholder 30">
-            <a:extLst>
-              <a:ext uri="{FF2B5EF4-FFF2-40B4-BE49-F238E27FC236}">
-                <a16:creationId xmlns:a16="http://schemas.microsoft.com/office/drawing/2014/main" id="{AF1C8809-654A-4DD1-BB18-87B8B6C020B9}"/>
-              </a:ext>
-            </a:extLst>
-          </p:cNvPr>
-          <p:cNvSpPr txBox="1">
-            <a:spLocks/>
-          </p:cNvSpPr>
-          <p:nvPr/>
-        </p:nvSpPr>
-        <p:spPr>
-          <a:xfrm>
-            <a:off x="320982" y="1275371"/>
-            <a:ext cx="3343561" cy="666078"/>
-          </a:xfrm>
-          <a:prstGeom prst="rect">
-            <a:avLst/>
-          </a:prstGeom>
-        </p:spPr>
-        <p:txBody>
-          <a:bodyPr vert="horz" lIns="91440" tIns="45720" rIns="91440" bIns="45720" rtlCol="0">
-            <a:normAutofit/>
-          </a:bodyPr>
-          <a:lstStyle>
-            <a:lvl1pPr marL="0" indent="0" algn="ctr" defTabSz="457200" rtl="0" eaLnBrk="1" latinLnBrk="0" hangingPunct="1">
-              <a:spcBef>
-                <a:spcPts val="1000"/>
-              </a:spcBef>
-              <a:spcAft>
-                <a:spcPts val="0"/>
-              </a:spcAft>
-              <a:buClr>
-                <a:schemeClr val="accent1"/>
-              </a:buClr>
-              <a:buSzPct val="80000"/>
-              <a:buFont typeface="Wingdings 3" charset="2"/>
-              <a:buNone/>
-              <a:defRPr lang="en-US" sz="1600" kern="1200" dirty="0" smtClean="0">
-                <a:solidFill>
-                  <a:schemeClr val="tx1"/>
-                </a:solidFill>
-                <a:latin typeface="+mn-lt"/>
-                <a:ea typeface="+mn-ea"/>
-                <a:cs typeface="+mn-cs"/>
-              </a:defRPr>
-            </a:lvl1pPr>
-            <a:lvl2pPr marL="742950" indent="-285750" algn="l" defTabSz="457200" rtl="0" eaLnBrk="1" latinLnBrk="0" hangingPunct="1">
-              <a:spcBef>
-                <a:spcPts val="1000"/>
-              </a:spcBef>
-              <a:spcAft>
-                <a:spcPts val="0"/>
-              </a:spcAft>
-              <a:buClr>
-                <a:schemeClr val="accent1"/>
-              </a:buClr>
-              <a:buSzPct val="80000"/>
-              <a:buFont typeface="Wingdings 3" charset="2"/>
-              <a:buChar char=""/>
-              <a:defRPr sz="1600" kern="1200">
-                <a:solidFill>
-                  <a:schemeClr val="tx1">
-                    <a:lumMod val="75000"/>
-                    <a:lumOff val="25000"/>
-                  </a:schemeClr>
-                </a:solidFill>
-                <a:latin typeface="+mn-lt"/>
-                <a:ea typeface="+mn-ea"/>
-                <a:cs typeface="+mn-cs"/>
-              </a:defRPr>
-            </a:lvl2pPr>
-            <a:lvl3pPr marL="1143000" indent="-228600" algn="l" defTabSz="457200" rtl="0" eaLnBrk="1" latinLnBrk="0" hangingPunct="1">
-              <a:spcBef>
-                <a:spcPts val="1000"/>
-              </a:spcBef>
-              <a:spcAft>
-                <a:spcPts val="0"/>
-              </a:spcAft>
-              <a:buClr>
-                <a:schemeClr val="accent1"/>
-              </a:buClr>
-              <a:buSzPct val="80000"/>
-              <a:buFont typeface="Wingdings 3" charset="2"/>
-              <a:buChar char=""/>
-              <a:defRPr sz="1400" kern="1200">
-                <a:solidFill>
-                  <a:schemeClr val="tx1">
-                    <a:lumMod val="75000"/>
-                    <a:lumOff val="25000"/>
-                  </a:schemeClr>
-                </a:solidFill>
-                <a:latin typeface="+mn-lt"/>
-                <a:ea typeface="+mn-ea"/>
-                <a:cs typeface="+mn-cs"/>
-              </a:defRPr>
-            </a:lvl3pPr>
-            <a:lvl4pPr marL="1600200" indent="-228600" algn="l" defTabSz="457200" rtl="0" eaLnBrk="1" latinLnBrk="0" hangingPunct="1">
-              <a:spcBef>
-                <a:spcPts val="1000"/>
-              </a:spcBef>
-              <a:spcAft>
-                <a:spcPts val="0"/>
-              </a:spcAft>
-              <a:buClr>
-                <a:schemeClr val="accent1"/>
-              </a:buClr>
-              <a:buSzPct val="80000"/>
-              <a:buFont typeface="Wingdings 3" charset="2"/>
-              <a:buChar char=""/>
-              <a:defRPr sz="1200" kern="1200">
-                <a:solidFill>
-                  <a:schemeClr val="tx1">
-                    <a:lumMod val="75000"/>
-                    <a:lumOff val="25000"/>
-                  </a:schemeClr>
-                </a:solidFill>
-                <a:latin typeface="+mn-lt"/>
-                <a:ea typeface="+mn-ea"/>
-                <a:cs typeface="+mn-cs"/>
-              </a:defRPr>
-            </a:lvl4pPr>
-            <a:lvl5pPr marL="2057400" indent="-228600" algn="l" defTabSz="457200" rtl="0" eaLnBrk="1" latinLnBrk="0" hangingPunct="1">
-              <a:spcBef>
-                <a:spcPts val="1000"/>
-              </a:spcBef>
-              <a:spcAft>
-                <a:spcPts val="0"/>
-              </a:spcAft>
-              <a:buClr>
-                <a:schemeClr val="accent1"/>
-              </a:buClr>
-              <a:buSzPct val="80000"/>
-              <a:buFont typeface="Wingdings 3" charset="2"/>
-              <a:buChar char=""/>
-              <a:defRPr sz="1200" kern="1200">
-                <a:solidFill>
-                  <a:schemeClr val="tx1">
-                    <a:lumMod val="75000"/>
-                    <a:lumOff val="25000"/>
-                  </a:schemeClr>
-                </a:solidFill>
-                <a:latin typeface="+mn-lt"/>
-                <a:ea typeface="+mn-ea"/>
-                <a:cs typeface="+mn-cs"/>
-              </a:defRPr>
-            </a:lvl5pPr>
-            <a:lvl6pPr marL="2514600" indent="-228600" algn="l" defTabSz="457200" rtl="0" eaLnBrk="1" latinLnBrk="0" hangingPunct="1">
-              <a:spcBef>
-                <a:spcPts val="1000"/>
-              </a:spcBef>
-              <a:spcAft>
-                <a:spcPts val="0"/>
-              </a:spcAft>
-              <a:buClr>
-                <a:schemeClr val="accent1"/>
-              </a:buClr>
-              <a:buSzPct val="80000"/>
-              <a:buFont typeface="Wingdings 3" charset="2"/>
-              <a:buChar char=""/>
-              <a:defRPr sz="1200" kern="1200">
-                <a:solidFill>
-                  <a:schemeClr val="tx1">
-                    <a:lumMod val="75000"/>
-                    <a:lumOff val="25000"/>
-                  </a:schemeClr>
-                </a:solidFill>
-                <a:latin typeface="+mn-lt"/>
-                <a:ea typeface="+mn-ea"/>
-                <a:cs typeface="+mn-cs"/>
-              </a:defRPr>
-            </a:lvl6pPr>
-            <a:lvl7pPr marL="2971800" indent="-228600" algn="l" defTabSz="457200" rtl="0" eaLnBrk="1" latinLnBrk="0" hangingPunct="1">
-              <a:spcBef>
-                <a:spcPts val="1000"/>
-              </a:spcBef>
-              <a:spcAft>
-                <a:spcPts val="0"/>
-              </a:spcAft>
-              <a:buClr>
-                <a:schemeClr val="accent1"/>
-              </a:buClr>
-              <a:buSzPct val="80000"/>
-              <a:buFont typeface="Wingdings 3" charset="2"/>
-              <a:buChar char=""/>
-              <a:defRPr sz="1200" kern="1200">
-                <a:solidFill>
-                  <a:schemeClr val="tx1">
-                    <a:lumMod val="75000"/>
-                    <a:lumOff val="25000"/>
-                  </a:schemeClr>
-                </a:solidFill>
-                <a:latin typeface="+mn-lt"/>
-                <a:ea typeface="+mn-ea"/>
-                <a:cs typeface="+mn-cs"/>
-              </a:defRPr>
-            </a:lvl7pPr>
-            <a:lvl8pPr marL="3429000" indent="-228600" algn="l" defTabSz="457200" rtl="0" eaLnBrk="1" latinLnBrk="0" hangingPunct="1">
-              <a:spcBef>
-                <a:spcPts val="1000"/>
-              </a:spcBef>
-              <a:spcAft>
-                <a:spcPts val="0"/>
-              </a:spcAft>
-              <a:buClr>
-                <a:schemeClr val="accent1"/>
-              </a:buClr>
-              <a:buSzPct val="80000"/>
-              <a:buFont typeface="Wingdings 3" charset="2"/>
-              <a:buChar char=""/>
-              <a:defRPr sz="1200" kern="1200">
-                <a:solidFill>
-                  <a:schemeClr val="tx1">
-                    <a:lumMod val="75000"/>
-                    <a:lumOff val="25000"/>
-                  </a:schemeClr>
-                </a:solidFill>
-                <a:latin typeface="+mn-lt"/>
-                <a:ea typeface="+mn-ea"/>
-                <a:cs typeface="+mn-cs"/>
-              </a:defRPr>
-            </a:lvl8pPr>
-            <a:lvl9pPr marL="3886200" indent="-228600" algn="l" defTabSz="457200" rtl="0" eaLnBrk="1" latinLnBrk="0" hangingPunct="1">
-              <a:spcBef>
-                <a:spcPts val="1000"/>
-              </a:spcBef>
-              <a:spcAft>
-                <a:spcPts val="0"/>
-              </a:spcAft>
-              <a:buClr>
-                <a:schemeClr val="accent1"/>
-              </a:buClr>
-              <a:buSzPct val="80000"/>
-              <a:buFont typeface="Wingdings 3" charset="2"/>
-              <a:buChar char=""/>
-              <a:defRPr sz="1200" kern="1200">
-                <a:solidFill>
-                  <a:schemeClr val="tx1">
-                    <a:lumMod val="75000"/>
-                    <a:lumOff val="25000"/>
-                  </a:schemeClr>
-                </a:solidFill>
-                <a:latin typeface="+mn-lt"/>
-                <a:ea typeface="+mn-ea"/>
-                <a:cs typeface="+mn-cs"/>
-              </a:defRPr>
-            </a:lvl9pPr>
-          </a:lstStyle>
-          <a:p>
-            <a:endParaRPr lang="en-GB" sz="2000" dirty="0"/>
-          </a:p>
-        </p:txBody>
-      </p:sp>
-      <p:sp>
-        <p:nvSpPr>
-          <p:cNvPr id="8" name="Text Placeholder 30">
-            <a:extLst>
-              <a:ext uri="{FF2B5EF4-FFF2-40B4-BE49-F238E27FC236}">
-                <a16:creationId xmlns:a16="http://schemas.microsoft.com/office/drawing/2014/main" id="{0F7D0B46-DEEA-1B5E-FE84-59D11F3B1105}"/>
-              </a:ext>
-            </a:extLst>
-          </p:cNvPr>
-          <p:cNvSpPr txBox="1">
-            <a:spLocks/>
-          </p:cNvSpPr>
-          <p:nvPr/>
-        </p:nvSpPr>
-        <p:spPr>
-          <a:xfrm>
-            <a:off x="4345694" y="1275371"/>
-            <a:ext cx="3343561" cy="666078"/>
-          </a:xfrm>
-          <a:prstGeom prst="rect">
-            <a:avLst/>
-          </a:prstGeom>
-        </p:spPr>
-        <p:txBody>
-          <a:bodyPr vert="horz" lIns="91440" tIns="45720" rIns="91440" bIns="45720" rtlCol="0">
-            <a:normAutofit/>
-          </a:bodyPr>
-          <a:lstStyle>
-            <a:lvl1pPr marL="0" indent="0" algn="ctr" defTabSz="457200" rtl="0" eaLnBrk="1" latinLnBrk="0" hangingPunct="1">
-              <a:spcBef>
-                <a:spcPts val="1000"/>
-              </a:spcBef>
-              <a:spcAft>
-                <a:spcPts val="0"/>
-              </a:spcAft>
-              <a:buClr>
-                <a:schemeClr val="accent1"/>
-              </a:buClr>
-              <a:buSzPct val="80000"/>
-              <a:buFont typeface="Wingdings 3" charset="2"/>
-              <a:buNone/>
-              <a:defRPr lang="en-US" sz="1600" kern="1200" dirty="0" smtClean="0">
-                <a:solidFill>
-                  <a:schemeClr val="tx1"/>
-                </a:solidFill>
-                <a:latin typeface="+mn-lt"/>
-                <a:ea typeface="+mn-ea"/>
-                <a:cs typeface="+mn-cs"/>
-              </a:defRPr>
-            </a:lvl1pPr>
-            <a:lvl2pPr marL="742950" indent="-285750" algn="l" defTabSz="457200" rtl="0" eaLnBrk="1" latinLnBrk="0" hangingPunct="1">
-              <a:spcBef>
-                <a:spcPts val="1000"/>
-              </a:spcBef>
-              <a:spcAft>
-                <a:spcPts val="0"/>
-              </a:spcAft>
-              <a:buClr>
-                <a:schemeClr val="accent1"/>
-              </a:buClr>
-              <a:buSzPct val="80000"/>
-              <a:buFont typeface="Wingdings 3" charset="2"/>
-              <a:buChar char=""/>
-              <a:defRPr sz="1600" kern="1200">
-                <a:solidFill>
-                  <a:schemeClr val="tx1">
-                    <a:lumMod val="75000"/>
-                    <a:lumOff val="25000"/>
-                  </a:schemeClr>
-                </a:solidFill>
-                <a:latin typeface="+mn-lt"/>
-                <a:ea typeface="+mn-ea"/>
-                <a:cs typeface="+mn-cs"/>
-              </a:defRPr>
-            </a:lvl2pPr>
-            <a:lvl3pPr marL="1143000" indent="-228600" algn="l" defTabSz="457200" rtl="0" eaLnBrk="1" latinLnBrk="0" hangingPunct="1">
-              <a:spcBef>
-                <a:spcPts val="1000"/>
-              </a:spcBef>
-              <a:spcAft>
-                <a:spcPts val="0"/>
-              </a:spcAft>
-              <a:buClr>
-                <a:schemeClr val="accent1"/>
-              </a:buClr>
-              <a:buSzPct val="80000"/>
-              <a:buFont typeface="Wingdings 3" charset="2"/>
-              <a:buChar char=""/>
-              <a:defRPr sz="1400" kern="1200">
-                <a:solidFill>
-                  <a:schemeClr val="tx1">
-                    <a:lumMod val="75000"/>
-                    <a:lumOff val="25000"/>
-                  </a:schemeClr>
-                </a:solidFill>
-                <a:latin typeface="+mn-lt"/>
-                <a:ea typeface="+mn-ea"/>
-                <a:cs typeface="+mn-cs"/>
-              </a:defRPr>
-            </a:lvl3pPr>
-            <a:lvl4pPr marL="1600200" indent="-228600" algn="l" defTabSz="457200" rtl="0" eaLnBrk="1" latinLnBrk="0" hangingPunct="1">
-              <a:spcBef>
-                <a:spcPts val="1000"/>
-              </a:spcBef>
-              <a:spcAft>
-                <a:spcPts val="0"/>
-              </a:spcAft>
-              <a:buClr>
-                <a:schemeClr val="accent1"/>
-              </a:buClr>
-              <a:buSzPct val="80000"/>
-              <a:buFont typeface="Wingdings 3" charset="2"/>
-              <a:buChar char=""/>
-              <a:defRPr sz="1200" kern="1200">
-                <a:solidFill>
-                  <a:schemeClr val="tx1">
-                    <a:lumMod val="75000"/>
-                    <a:lumOff val="25000"/>
-                  </a:schemeClr>
-                </a:solidFill>
-                <a:latin typeface="+mn-lt"/>
-                <a:ea typeface="+mn-ea"/>
-                <a:cs typeface="+mn-cs"/>
-              </a:defRPr>
-            </a:lvl4pPr>
-            <a:lvl5pPr marL="2057400" indent="-228600" algn="l" defTabSz="457200" rtl="0" eaLnBrk="1" latinLnBrk="0" hangingPunct="1">
-              <a:spcBef>
-                <a:spcPts val="1000"/>
-              </a:spcBef>
-              <a:spcAft>
-                <a:spcPts val="0"/>
-              </a:spcAft>
-              <a:buClr>
-                <a:schemeClr val="accent1"/>
-              </a:buClr>
-              <a:buSzPct val="80000"/>
-              <a:buFont typeface="Wingdings 3" charset="2"/>
-              <a:buChar char=""/>
-              <a:defRPr sz="1200" kern="1200">
-                <a:solidFill>
-                  <a:schemeClr val="tx1">
-                    <a:lumMod val="75000"/>
-                    <a:lumOff val="25000"/>
-                  </a:schemeClr>
-                </a:solidFill>
-                <a:latin typeface="+mn-lt"/>
-                <a:ea typeface="+mn-ea"/>
-                <a:cs typeface="+mn-cs"/>
-              </a:defRPr>
-            </a:lvl5pPr>
-            <a:lvl6pPr marL="2514600" indent="-228600" algn="l" defTabSz="457200" rtl="0" eaLnBrk="1" latinLnBrk="0" hangingPunct="1">
-              <a:spcBef>
-                <a:spcPts val="1000"/>
-              </a:spcBef>
-              <a:spcAft>
-                <a:spcPts val="0"/>
-              </a:spcAft>
-              <a:buClr>
-                <a:schemeClr val="accent1"/>
-              </a:buClr>
-              <a:buSzPct val="80000"/>
-              <a:buFont typeface="Wingdings 3" charset="2"/>
-              <a:buChar char=""/>
-              <a:defRPr sz="1200" kern="1200">
-                <a:solidFill>
-                  <a:schemeClr val="tx1">
-                    <a:lumMod val="75000"/>
-                    <a:lumOff val="25000"/>
-                  </a:schemeClr>
-                </a:solidFill>
-                <a:latin typeface="+mn-lt"/>
-                <a:ea typeface="+mn-ea"/>
-                <a:cs typeface="+mn-cs"/>
-              </a:defRPr>
-            </a:lvl6pPr>
-            <a:lvl7pPr marL="2971800" indent="-228600" algn="l" defTabSz="457200" rtl="0" eaLnBrk="1" latinLnBrk="0" hangingPunct="1">
-              <a:spcBef>
-                <a:spcPts val="1000"/>
-              </a:spcBef>
-              <a:spcAft>
-                <a:spcPts val="0"/>
-              </a:spcAft>
-              <a:buClr>
-                <a:schemeClr val="accent1"/>
-              </a:buClr>
-              <a:buSzPct val="80000"/>
-              <a:buFont typeface="Wingdings 3" charset="2"/>
-              <a:buChar char=""/>
-              <a:defRPr sz="1200" kern="1200">
-                <a:solidFill>
-                  <a:schemeClr val="tx1">
-                    <a:lumMod val="75000"/>
-                    <a:lumOff val="25000"/>
-                  </a:schemeClr>
-                </a:solidFill>
-                <a:latin typeface="+mn-lt"/>
-                <a:ea typeface="+mn-ea"/>
-                <a:cs typeface="+mn-cs"/>
-              </a:defRPr>
-            </a:lvl7pPr>
-            <a:lvl8pPr marL="3429000" indent="-228600" algn="l" defTabSz="457200" rtl="0" eaLnBrk="1" latinLnBrk="0" hangingPunct="1">
-              <a:spcBef>
-                <a:spcPts val="1000"/>
-              </a:spcBef>
-              <a:spcAft>
-                <a:spcPts val="0"/>
-              </a:spcAft>
-              <a:buClr>
-                <a:schemeClr val="accent1"/>
-              </a:buClr>
-              <a:buSzPct val="80000"/>
-              <a:buFont typeface="Wingdings 3" charset="2"/>
-              <a:buChar char=""/>
-              <a:defRPr sz="1200" kern="1200">
-                <a:solidFill>
-                  <a:schemeClr val="tx1">
-                    <a:lumMod val="75000"/>
-                    <a:lumOff val="25000"/>
-                  </a:schemeClr>
-                </a:solidFill>
-                <a:latin typeface="+mn-lt"/>
-                <a:ea typeface="+mn-ea"/>
-                <a:cs typeface="+mn-cs"/>
-              </a:defRPr>
-            </a:lvl8pPr>
-            <a:lvl9pPr marL="3886200" indent="-228600" algn="l" defTabSz="457200" rtl="0" eaLnBrk="1" latinLnBrk="0" hangingPunct="1">
-              <a:spcBef>
-                <a:spcPts val="1000"/>
-              </a:spcBef>
-              <a:spcAft>
-                <a:spcPts val="0"/>
-              </a:spcAft>
-              <a:buClr>
-                <a:schemeClr val="accent1"/>
-              </a:buClr>
-              <a:buSzPct val="80000"/>
-              <a:buFont typeface="Wingdings 3" charset="2"/>
-              <a:buChar char=""/>
-              <a:defRPr sz="1200" kern="1200">
-                <a:solidFill>
-                  <a:schemeClr val="tx1">
-                    <a:lumMod val="75000"/>
-                    <a:lumOff val="25000"/>
-                  </a:schemeClr>
-                </a:solidFill>
-                <a:latin typeface="+mn-lt"/>
-                <a:ea typeface="+mn-ea"/>
-                <a:cs typeface="+mn-cs"/>
-              </a:defRPr>
-            </a:lvl9pPr>
-          </a:lstStyle>
-          <a:p>
-            <a:endParaRPr lang="en-GB" sz="2000" dirty="0"/>
-          </a:p>
-        </p:txBody>
-      </p:sp>
-      <p:sp>
-        <p:nvSpPr>
-          <p:cNvPr id="22" name="GitHub Body"/>
-          <p:cNvSpPr txBox="1">
-            <a:spLocks noGrp="1"/>
-          </p:cNvSpPr>
-          <p:nvPr/>
-        </p:nvSpPr>
-        <p:spPr>
-          <a:xfrm>
-            <a:off x="320982" y="1792941"/>
-            <a:ext cx="9997394" cy="3272119"/>
-          </a:xfrm>
-        </p:spPr>
-        <p:txBody>
-          <a:bodyPr>
-            <a:normAutofit fontScale="25000" lnSpcReduction="20000"/>
-          </a:bodyPr>
-          <a:lstStyle/>
-          <a:p>
-            <a:pPr>
-              <a:spcBef>
-                <a:spcPts val="1200"/>
-              </a:spcBef>
-            </a:pPr>
-            <a:endParaRPr lang="en-US" sz="2000" dirty="0"/>
-          </a:p>
-          <a:p>
-            <a:pPr>
-              <a:spcBef>
-                <a:spcPts val="1200"/>
-              </a:spcBef>
-            </a:pPr>
-            <a:endParaRPr lang="en-US" sz="2000" dirty="0"/>
-          </a:p>
-          <a:p>
-            <a:pPr>
-              <a:spcBef>
-                <a:spcPts val="1200"/>
-              </a:spcBef>
-            </a:pPr>
-            <a:endParaRPr lang="en-US" sz="2000" dirty="0"/>
-          </a:p>
-          <a:p>
-            <a:pPr>
-              <a:spcBef>
-                <a:spcPts val="1200"/>
-              </a:spcBef>
-            </a:pPr>
-            <a:endParaRPr lang="en-US" sz="2000" dirty="0"/>
-          </a:p>
-          <a:p>
-            <a:pPr>
-              <a:spcBef>
-                <a:spcPts val="1200"/>
-              </a:spcBef>
-            </a:pPr>
-            <a:r>
-              <a:rPr lang="en-US" sz="14400" b="1" dirty="0">
+              <a:rPr lang="en-US" sz="9600" b="1" dirty="0">
                 <a:solidFill>
                   <a:schemeClr val="accent1">
                     <a:lumMod val="50000"/>
@@ -14425,12 +16485,7 @@
             </a:r>
           </a:p>
           <a:p>
-            <a:pPr>
-              <a:spcBef>
-                <a:spcPts val="1200"/>
-              </a:spcBef>
-            </a:pPr>
-            <a:endParaRPr lang="en-US" sz="14400" b="1" dirty="0">
+            <a:endParaRPr lang="en-US" sz="9600" dirty="0">
               <a:solidFill>
                 <a:schemeClr val="accent1">
                   <a:lumMod val="50000"/>
@@ -14447,39 +16502,74 @@
             </a:endParaRPr>
           </a:p>
           <a:p>
-            <a:pPr>
-              <a:spcBef>
-                <a:spcPts val="1200"/>
-              </a:spcBef>
-            </a:pPr>
             <a:r>
-              <a:rPr lang="en-US" sz="9600" dirty="0"/>
+              <a:rPr lang="en-US" sz="6200" dirty="0">
+                <a:solidFill>
+                  <a:schemeClr val="tx1">
+                    <a:lumMod val="85000"/>
+                    <a:lumOff val="15000"/>
+                  </a:schemeClr>
+                </a:solidFill>
+              </a:rPr>
               <a:t>Repository contains the executed </a:t>
             </a:r>
             <a:r>
-              <a:rPr lang="en-US" sz="9600" dirty="0" err="1"/>
+              <a:rPr lang="en-US" sz="6200" dirty="0" err="1">
+                <a:solidFill>
+                  <a:schemeClr val="tx1">
+                    <a:lumMod val="85000"/>
+                    <a:lumOff val="15000"/>
+                  </a:schemeClr>
+                </a:solidFill>
+              </a:rPr>
               <a:t>Jupyter</a:t>
             </a:r>
             <a:r>
-              <a:rPr lang="en-US" sz="9600" dirty="0"/>
+              <a:rPr lang="en-US" sz="6200" dirty="0">
+                <a:solidFill>
+                  <a:schemeClr val="tx1">
+                    <a:lumMod val="85000"/>
+                    <a:lumOff val="15000"/>
+                  </a:schemeClr>
+                </a:solidFill>
+              </a:rPr>
               <a:t> Notebook, the dataset, and this presentation</a:t>
             </a:r>
-            <a:endParaRPr lang="en-IN" sz="9600" dirty="0"/>
+            <a:endParaRPr lang="en-IN" sz="6200" dirty="0">
+              <a:solidFill>
+                <a:schemeClr val="tx1">
+                  <a:lumMod val="85000"/>
+                  <a:lumOff val="15000"/>
+                </a:schemeClr>
+              </a:solidFill>
+            </a:endParaRPr>
           </a:p>
           <a:p>
-            <a:pPr>
-              <a:spcBef>
-                <a:spcPts val="1200"/>
-              </a:spcBef>
-            </a:pPr>
-            <a:endParaRPr lang="en-US" sz="2000" dirty="0"/>
+            <a:endParaRPr lang="en-US" sz="9600" b="1" dirty="0">
+              <a:solidFill>
+                <a:schemeClr val="accent1">
+                  <a:lumMod val="50000"/>
+                </a:schemeClr>
+              </a:solidFill>
+              <a:latin typeface="Arial Rounded MT Bold" panose="020F0704030504030204" pitchFamily="34" charset="0"/>
+              <a:hlinkClick r:id="rId3">
+                <a:extLst>
+                  <a:ext uri="{A12FA001-AC4F-418D-AE19-62706E023703}">
+                    <ahyp:hlinkClr xmlns:ahyp="http://schemas.microsoft.com/office/drawing/2018/hyperlinkcolor" val="tx"/>
+                  </a:ext>
+                </a:extLst>
+              </a:hlinkClick>
+            </a:endParaRPr>
+          </a:p>
+          <a:p>
+            <a:endParaRPr lang="en-IN" dirty="0"/>
           </a:p>
         </p:txBody>
       </p:sp>
     </p:spTree>
     <p:extLst>
       <p:ext uri="{BB962C8B-B14F-4D97-AF65-F5344CB8AC3E}">
-        <p14:creationId xmlns:p14="http://schemas.microsoft.com/office/powerpoint/2010/main" val="3863610428"/>
+        <p14:creationId xmlns:p14="http://schemas.microsoft.com/office/powerpoint/2010/main" val="403887915"/>
       </p:ext>
     </p:extLst>
   </p:cSld>
@@ -14520,7 +16610,7 @@
                                           </p:stCondLst>
                                         </p:cTn>
                                         <p:tgtEl>
-                                          <p:spTgt spid="4"/>
+                                          <p:spTgt spid="3"/>
                                         </p:tgtEl>
                                         <p:attrNameLst>
                                           <p:attrName>style.visibility</p:attrName>
@@ -14534,7 +16624,7 @@
                                       <p:cBhvr>
                                         <p:cTn id="7" dur="500" fill="hold"/>
                                         <p:tgtEl>
-                                          <p:spTgt spid="4"/>
+                                          <p:spTgt spid="3"/>
                                         </p:tgtEl>
                                         <p:attrNameLst>
                                           <p:attrName>ppt_w</p:attrName>
@@ -14557,7 +16647,7 @@
                                       <p:cBhvr>
                                         <p:cTn id="8" dur="500" fill="hold"/>
                                         <p:tgtEl>
-                                          <p:spTgt spid="4"/>
+                                          <p:spTgt spid="3"/>
                                         </p:tgtEl>
                                         <p:attrNameLst>
                                           <p:attrName>ppt_h</p:attrName>
@@ -14580,7 +16670,7 @@
                                       <p:cBhvr>
                                         <p:cTn id="9" dur="500"/>
                                         <p:tgtEl>
-                                          <p:spTgt spid="4"/>
+                                          <p:spTgt spid="3"/>
                                         </p:tgtEl>
                                       </p:cBhvr>
                                     </p:animEffect>
@@ -14606,7 +16696,7 @@
                             </p:stCondLst>
                             <p:childTnLst>
                               <p:par>
-                                <p:cTn id="12" presetID="42" presetClass="entr" presetSubtype="0" fill="hold" grpId="0" nodeType="clickEffect" nodePh="1">
+                                <p:cTn id="12" presetID="12" presetClass="entr" presetSubtype="4" fill="hold" grpId="0" nodeType="clickEffect" nodePh="1">
                                   <p:stCondLst>
                                     <p:cond delay="0"/>
                                   </p:stCondLst>
@@ -14624,7 +16714,7 @@
                                           </p:stCondLst>
                                         </p:cTn>
                                         <p:tgtEl>
-                                          <p:spTgt spid="7"/>
+                                          <p:spTgt spid="17"/>
                                         </p:tgtEl>
                                         <p:attrNameLst>
                                           <p:attrName>style.visibility</p:attrName>
@@ -14634,42 +16724,11 @@
                                         <p:strVal val="visible"/>
                                       </p:to>
                                     </p:set>
-                                    <p:animEffect transition="in" filter="fade">
-                                      <p:cBhvr>
-                                        <p:cTn id="14" dur="1000"/>
+                                    <p:anim calcmode="lin" valueType="num">
+                                      <p:cBhvr additive="base">
+                                        <p:cTn id="14" dur="500"/>
                                         <p:tgtEl>
-                                          <p:spTgt spid="7"/>
-                                        </p:tgtEl>
-                                      </p:cBhvr>
-                                    </p:animEffect>
-                                    <p:anim calcmode="lin" valueType="num">
-                                      <p:cBhvr>
-                                        <p:cTn id="15" dur="1000" fill="hold"/>
-                                        <p:tgtEl>
-                                          <p:spTgt spid="7"/>
-                                        </p:tgtEl>
-                                        <p:attrNameLst>
-                                          <p:attrName>ppt_x</p:attrName>
-                                        </p:attrNameLst>
-                                      </p:cBhvr>
-                                      <p:tavLst>
-                                        <p:tav tm="0">
-                                          <p:val>
-                                            <p:strVal val="#ppt_x"/>
-                                          </p:val>
-                                        </p:tav>
-                                        <p:tav tm="100000">
-                                          <p:val>
-                                            <p:strVal val="#ppt_x"/>
-                                          </p:val>
-                                        </p:tav>
-                                      </p:tavLst>
-                                    </p:anim>
-                                    <p:anim calcmode="lin" valueType="num">
-                                      <p:cBhvr>
-                                        <p:cTn id="16" dur="1000" fill="hold"/>
-                                        <p:tgtEl>
-                                          <p:spTgt spid="7"/>
+                                          <p:spTgt spid="17"/>
                                         </p:tgtEl>
                                         <p:attrNameLst>
                                           <p:attrName>ppt_y</p:attrName>
@@ -14678,7 +16737,7 @@
                                       <p:tavLst>
                                         <p:tav tm="0">
                                           <p:val>
-                                            <p:strVal val="#ppt_y+.1"/>
+                                            <p:strVal val="#ppt_y+#ppt_h*1.125000"/>
                                           </p:val>
                                         </p:tav>
                                         <p:tav tm="100000">
@@ -14688,6 +16747,14 @@
                                         </p:tav>
                                       </p:tavLst>
                                     </p:anim>
+                                    <p:animEffect transition="in" filter="wipe(up)">
+                                      <p:cBhvr>
+                                        <p:cTn id="15" dur="500"/>
+                                        <p:tgtEl>
+                                          <p:spTgt spid="17"/>
+                                        </p:tgtEl>
+                                      </p:cBhvr>
+                                    </p:animEffect>
                                   </p:childTnLst>
                                 </p:cTn>
                               </p:par>
@@ -14698,37 +16765,36 @@
                     </p:cTn>
                   </p:par>
                   <p:par>
-                    <p:cTn id="17" fill="hold">
+                    <p:cTn id="16" fill="hold">
                       <p:stCondLst>
                         <p:cond delay="indefinite"/>
                       </p:stCondLst>
                       <p:childTnLst>
                         <p:par>
-                          <p:cTn id="18" fill="hold">
+                          <p:cTn id="17" fill="hold">
                             <p:stCondLst>
                               <p:cond delay="0"/>
                             </p:stCondLst>
                             <p:childTnLst>
                               <p:par>
-                                <p:cTn id="19" presetID="42" presetClass="entr" presetSubtype="0" fill="hold" grpId="0" nodeType="clickEffect" nodePh="1">
+                                <p:cTn id="18" presetID="12" presetClass="entr" presetSubtype="4" fill="hold" grpId="0" nodeType="clickEffect">
                                   <p:stCondLst>
                                     <p:cond delay="0"/>
                                   </p:stCondLst>
-                                  <p:endCondLst>
-                                    <p:cond evt="begin" delay="0">
-                                      <p:tn val="19"/>
-                                    </p:cond>
-                                  </p:endCondLst>
                                   <p:childTnLst>
                                     <p:set>
                                       <p:cBhvr>
-                                        <p:cTn id="20" dur="1" fill="hold">
+                                        <p:cTn id="19" dur="1" fill="hold">
                                           <p:stCondLst>
                                             <p:cond delay="0"/>
                                           </p:stCondLst>
                                         </p:cTn>
                                         <p:tgtEl>
-                                          <p:spTgt spid="8"/>
+                                          <p:spTgt spid="31">
+                                            <p:txEl>
+                                              <p:pRg st="0" end="0"/>
+                                            </p:txEl>
+                                          </p:spTgt>
                                         </p:tgtEl>
                                         <p:attrNameLst>
                                           <p:attrName>style.visibility</p:attrName>
@@ -14738,42 +16804,15 @@
                                         <p:strVal val="visible"/>
                                       </p:to>
                                     </p:set>
-                                    <p:animEffect transition="in" filter="fade">
-                                      <p:cBhvr>
-                                        <p:cTn id="21" dur="1000"/>
+                                    <p:anim calcmode="lin" valueType="num">
+                                      <p:cBhvr additive="base">
+                                        <p:cTn id="20" dur="500"/>
                                         <p:tgtEl>
-                                          <p:spTgt spid="8"/>
-                                        </p:tgtEl>
-                                      </p:cBhvr>
-                                    </p:animEffect>
-                                    <p:anim calcmode="lin" valueType="num">
-                                      <p:cBhvr>
-                                        <p:cTn id="22" dur="1000" fill="hold"/>
-                                        <p:tgtEl>
-                                          <p:spTgt spid="8"/>
-                                        </p:tgtEl>
-                                        <p:attrNameLst>
-                                          <p:attrName>ppt_x</p:attrName>
-                                        </p:attrNameLst>
-                                      </p:cBhvr>
-                                      <p:tavLst>
-                                        <p:tav tm="0">
-                                          <p:val>
-                                            <p:strVal val="#ppt_x"/>
-                                          </p:val>
-                                        </p:tav>
-                                        <p:tav tm="100000">
-                                          <p:val>
-                                            <p:strVal val="#ppt_x"/>
-                                          </p:val>
-                                        </p:tav>
-                                      </p:tavLst>
-                                    </p:anim>
-                                    <p:anim calcmode="lin" valueType="num">
-                                      <p:cBhvr>
-                                        <p:cTn id="23" dur="1000" fill="hold"/>
-                                        <p:tgtEl>
-                                          <p:spTgt spid="8"/>
+                                          <p:spTgt spid="31">
+                                            <p:txEl>
+                                              <p:pRg st="0" end="0"/>
+                                            </p:txEl>
+                                          </p:spTgt>
                                         </p:tgtEl>
                                         <p:attrNameLst>
                                           <p:attrName>ppt_y</p:attrName>
@@ -14782,7 +16821,7 @@
                                       <p:tavLst>
                                         <p:tav tm="0">
                                           <p:val>
-                                            <p:strVal val="#ppt_y+.1"/>
+                                            <p:strVal val="#ppt_y+#ppt_h*1.125000"/>
                                           </p:val>
                                         </p:tav>
                                         <p:tav tm="100000">
@@ -14792,6 +16831,337 @@
                                         </p:tav>
                                       </p:tavLst>
                                     </p:anim>
+                                    <p:animEffect transition="in" filter="wipe(up)">
+                                      <p:cBhvr>
+                                        <p:cTn id="21" dur="500"/>
+                                        <p:tgtEl>
+                                          <p:spTgt spid="31">
+                                            <p:txEl>
+                                              <p:pRg st="0" end="0"/>
+                                            </p:txEl>
+                                          </p:spTgt>
+                                        </p:tgtEl>
+                                      </p:cBhvr>
+                                    </p:animEffect>
+                                  </p:childTnLst>
+                                </p:cTn>
+                              </p:par>
+                            </p:childTnLst>
+                          </p:cTn>
+                        </p:par>
+                      </p:childTnLst>
+                    </p:cTn>
+                  </p:par>
+                  <p:par>
+                    <p:cTn id="22" fill="hold">
+                      <p:stCondLst>
+                        <p:cond delay="indefinite"/>
+                      </p:stCondLst>
+                      <p:childTnLst>
+                        <p:par>
+                          <p:cTn id="23" fill="hold">
+                            <p:stCondLst>
+                              <p:cond delay="0"/>
+                            </p:stCondLst>
+                            <p:childTnLst>
+                              <p:par>
+                                <p:cTn id="24" presetID="12" presetClass="entr" presetSubtype="4" fill="hold" grpId="0" nodeType="clickEffect" nodePh="1">
+                                  <p:stCondLst>
+                                    <p:cond delay="0"/>
+                                  </p:stCondLst>
+                                  <p:endCondLst>
+                                    <p:cond evt="begin" delay="0">
+                                      <p:tn val="24"/>
+                                    </p:cond>
+                                  </p:endCondLst>
+                                  <p:childTnLst>
+                                    <p:set>
+                                      <p:cBhvr>
+                                        <p:cTn id="25" dur="1" fill="hold">
+                                          <p:stCondLst>
+                                            <p:cond delay="0"/>
+                                          </p:stCondLst>
+                                        </p:cTn>
+                                        <p:tgtEl>
+                                          <p:spTgt spid="20"/>
+                                        </p:tgtEl>
+                                        <p:attrNameLst>
+                                          <p:attrName>style.visibility</p:attrName>
+                                        </p:attrNameLst>
+                                      </p:cBhvr>
+                                      <p:to>
+                                        <p:strVal val="visible"/>
+                                      </p:to>
+                                    </p:set>
+                                    <p:anim calcmode="lin" valueType="num">
+                                      <p:cBhvr additive="base">
+                                        <p:cTn id="26" dur="500"/>
+                                        <p:tgtEl>
+                                          <p:spTgt spid="20"/>
+                                        </p:tgtEl>
+                                        <p:attrNameLst>
+                                          <p:attrName>ppt_y</p:attrName>
+                                        </p:attrNameLst>
+                                      </p:cBhvr>
+                                      <p:tavLst>
+                                        <p:tav tm="0">
+                                          <p:val>
+                                            <p:strVal val="#ppt_y+#ppt_h*1.125000"/>
+                                          </p:val>
+                                        </p:tav>
+                                        <p:tav tm="100000">
+                                          <p:val>
+                                            <p:strVal val="#ppt_y"/>
+                                          </p:val>
+                                        </p:tav>
+                                      </p:tavLst>
+                                    </p:anim>
+                                    <p:animEffect transition="in" filter="wipe(up)">
+                                      <p:cBhvr>
+                                        <p:cTn id="27" dur="500"/>
+                                        <p:tgtEl>
+                                          <p:spTgt spid="20"/>
+                                        </p:tgtEl>
+                                      </p:cBhvr>
+                                    </p:animEffect>
+                                  </p:childTnLst>
+                                </p:cTn>
+                              </p:par>
+                            </p:childTnLst>
+                          </p:cTn>
+                        </p:par>
+                      </p:childTnLst>
+                    </p:cTn>
+                  </p:par>
+                  <p:par>
+                    <p:cTn id="28" fill="hold">
+                      <p:stCondLst>
+                        <p:cond delay="indefinite"/>
+                      </p:stCondLst>
+                      <p:childTnLst>
+                        <p:par>
+                          <p:cTn id="29" fill="hold">
+                            <p:stCondLst>
+                              <p:cond delay="0"/>
+                            </p:stCondLst>
+                            <p:childTnLst>
+                              <p:par>
+                                <p:cTn id="30" presetID="12" presetClass="entr" presetSubtype="4" fill="hold" grpId="0" nodeType="clickEffect" nodePh="1">
+                                  <p:stCondLst>
+                                    <p:cond delay="0"/>
+                                  </p:stCondLst>
+                                  <p:endCondLst>
+                                    <p:cond evt="begin" delay="0">
+                                      <p:tn val="30"/>
+                                    </p:cond>
+                                  </p:endCondLst>
+                                  <p:childTnLst>
+                                    <p:set>
+                                      <p:cBhvr>
+                                        <p:cTn id="31" dur="1" fill="hold">
+                                          <p:stCondLst>
+                                            <p:cond delay="0"/>
+                                          </p:stCondLst>
+                                        </p:cTn>
+                                        <p:tgtEl>
+                                          <p:spTgt spid="30"/>
+                                        </p:tgtEl>
+                                        <p:attrNameLst>
+                                          <p:attrName>style.visibility</p:attrName>
+                                        </p:attrNameLst>
+                                      </p:cBhvr>
+                                      <p:to>
+                                        <p:strVal val="visible"/>
+                                      </p:to>
+                                    </p:set>
+                                    <p:anim calcmode="lin" valueType="num">
+                                      <p:cBhvr additive="base">
+                                        <p:cTn id="32" dur="500"/>
+                                        <p:tgtEl>
+                                          <p:spTgt spid="30"/>
+                                        </p:tgtEl>
+                                        <p:attrNameLst>
+                                          <p:attrName>ppt_y</p:attrName>
+                                        </p:attrNameLst>
+                                      </p:cBhvr>
+                                      <p:tavLst>
+                                        <p:tav tm="0">
+                                          <p:val>
+                                            <p:strVal val="#ppt_y+#ppt_h*1.125000"/>
+                                          </p:val>
+                                        </p:tav>
+                                        <p:tav tm="100000">
+                                          <p:val>
+                                            <p:strVal val="#ppt_y"/>
+                                          </p:val>
+                                        </p:tav>
+                                      </p:tavLst>
+                                    </p:anim>
+                                    <p:animEffect transition="in" filter="wipe(up)">
+                                      <p:cBhvr>
+                                        <p:cTn id="33" dur="500"/>
+                                        <p:tgtEl>
+                                          <p:spTgt spid="30"/>
+                                        </p:tgtEl>
+                                      </p:cBhvr>
+                                    </p:animEffect>
+                                  </p:childTnLst>
+                                </p:cTn>
+                              </p:par>
+                            </p:childTnLst>
+                          </p:cTn>
+                        </p:par>
+                      </p:childTnLst>
+                    </p:cTn>
+                  </p:par>
+                  <p:par>
+                    <p:cTn id="34" fill="hold">
+                      <p:stCondLst>
+                        <p:cond delay="indefinite"/>
+                      </p:stCondLst>
+                      <p:childTnLst>
+                        <p:par>
+                          <p:cTn id="35" fill="hold">
+                            <p:stCondLst>
+                              <p:cond delay="0"/>
+                            </p:stCondLst>
+                            <p:childTnLst>
+                              <p:par>
+                                <p:cTn id="36" presetID="12" presetClass="entr" presetSubtype="4" fill="hold" grpId="0" nodeType="clickEffect" nodePh="1">
+                                  <p:stCondLst>
+                                    <p:cond delay="0"/>
+                                  </p:stCondLst>
+                                  <p:endCondLst>
+                                    <p:cond evt="begin" delay="0">
+                                      <p:tn val="36"/>
+                                    </p:cond>
+                                  </p:endCondLst>
+                                  <p:childTnLst>
+                                    <p:set>
+                                      <p:cBhvr>
+                                        <p:cTn id="37" dur="1" fill="hold">
+                                          <p:stCondLst>
+                                            <p:cond delay="0"/>
+                                          </p:stCondLst>
+                                        </p:cTn>
+                                        <p:tgtEl>
+                                          <p:spTgt spid="23"/>
+                                        </p:tgtEl>
+                                        <p:attrNameLst>
+                                          <p:attrName>style.visibility</p:attrName>
+                                        </p:attrNameLst>
+                                      </p:cBhvr>
+                                      <p:to>
+                                        <p:strVal val="visible"/>
+                                      </p:to>
+                                    </p:set>
+                                    <p:anim calcmode="lin" valueType="num">
+                                      <p:cBhvr additive="base">
+                                        <p:cTn id="38" dur="500"/>
+                                        <p:tgtEl>
+                                          <p:spTgt spid="23"/>
+                                        </p:tgtEl>
+                                        <p:attrNameLst>
+                                          <p:attrName>ppt_y</p:attrName>
+                                        </p:attrNameLst>
+                                      </p:cBhvr>
+                                      <p:tavLst>
+                                        <p:tav tm="0">
+                                          <p:val>
+                                            <p:strVal val="#ppt_y+#ppt_h*1.125000"/>
+                                          </p:val>
+                                        </p:tav>
+                                        <p:tav tm="100000">
+                                          <p:val>
+                                            <p:strVal val="#ppt_y"/>
+                                          </p:val>
+                                        </p:tav>
+                                      </p:tavLst>
+                                    </p:anim>
+                                    <p:animEffect transition="in" filter="wipe(up)">
+                                      <p:cBhvr>
+                                        <p:cTn id="39" dur="500"/>
+                                        <p:tgtEl>
+                                          <p:spTgt spid="23"/>
+                                        </p:tgtEl>
+                                      </p:cBhvr>
+                                    </p:animEffect>
+                                  </p:childTnLst>
+                                </p:cTn>
+                              </p:par>
+                            </p:childTnLst>
+                          </p:cTn>
+                        </p:par>
+                      </p:childTnLst>
+                    </p:cTn>
+                  </p:par>
+                  <p:par>
+                    <p:cTn id="40" fill="hold">
+                      <p:stCondLst>
+                        <p:cond delay="indefinite"/>
+                      </p:stCondLst>
+                      <p:childTnLst>
+                        <p:par>
+                          <p:cTn id="41" fill="hold">
+                            <p:stCondLst>
+                              <p:cond delay="0"/>
+                            </p:stCondLst>
+                            <p:childTnLst>
+                              <p:par>
+                                <p:cTn id="42" presetID="12" presetClass="entr" presetSubtype="4" fill="hold" grpId="0" nodeType="clickEffect">
+                                  <p:stCondLst>
+                                    <p:cond delay="0"/>
+                                  </p:stCondLst>
+                                  <p:childTnLst>
+                                    <p:set>
+                                      <p:cBhvr>
+                                        <p:cTn id="43" dur="1" fill="hold">
+                                          <p:stCondLst>
+                                            <p:cond delay="0"/>
+                                          </p:stCondLst>
+                                        </p:cTn>
+                                        <p:tgtEl>
+                                          <p:spTgt spid="32"/>
+                                        </p:tgtEl>
+                                        <p:attrNameLst>
+                                          <p:attrName>style.visibility</p:attrName>
+                                        </p:attrNameLst>
+                                      </p:cBhvr>
+                                      <p:to>
+                                        <p:strVal val="visible"/>
+                                      </p:to>
+                                    </p:set>
+                                    <p:anim calcmode="lin" valueType="num">
+                                      <p:cBhvr additive="base">
+                                        <p:cTn id="44" dur="500"/>
+                                        <p:tgtEl>
+                                          <p:spTgt spid="32"/>
+                                        </p:tgtEl>
+                                        <p:attrNameLst>
+                                          <p:attrName>ppt_y</p:attrName>
+                                        </p:attrNameLst>
+                                      </p:cBhvr>
+                                      <p:tavLst>
+                                        <p:tav tm="0">
+                                          <p:val>
+                                            <p:strVal val="#ppt_y+#ppt_h*1.125000"/>
+                                          </p:val>
+                                        </p:tav>
+                                        <p:tav tm="100000">
+                                          <p:val>
+                                            <p:strVal val="#ppt_y"/>
+                                          </p:val>
+                                        </p:tav>
+                                      </p:tavLst>
+                                    </p:anim>
+                                    <p:animEffect transition="in" filter="wipe(up)">
+                                      <p:cBhvr>
+                                        <p:cTn id="45" dur="500"/>
+                                        <p:tgtEl>
+                                          <p:spTgt spid="32"/>
+                                        </p:tgtEl>
+                                      </p:cBhvr>
+                                    </p:animEffect>
                                   </p:childTnLst>
                                 </p:cTn>
                               </p:par>
@@ -14823,9 +17193,13 @@
       </p:par>
     </p:tnLst>
     <p:bldLst>
-      <p:bldP spid="4" grpId="0"/>
-      <p:bldP spid="7" grpId="0"/>
-      <p:bldP spid="8" grpId="0"/>
+      <p:bldP spid="3" grpId="0"/>
+      <p:bldP spid="31" grpId="0" build="p"/>
+      <p:bldP spid="17" grpId="0"/>
+      <p:bldP spid="20" grpId="0"/>
+      <p:bldP spid="23" grpId="0"/>
+      <p:bldP spid="30" grpId="0"/>
+      <p:bldP spid="32" grpId="0"/>
     </p:bldLst>
   </p:timing>
 </p:sld>
@@ -17264,7 +19638,7 @@
     </p:spTree>
     <p:extLst>
       <p:ext uri="{BB962C8B-B14F-4D97-AF65-F5344CB8AC3E}">
-        <p14:creationId xmlns:p14="http://schemas.microsoft.com/office/powerpoint/2010/main" val="3401748718"/>
+        <p14:creationId xmlns:p14="http://schemas.microsoft.com/office/powerpoint/2010/main" val="3308496198"/>
       </p:ext>
     </p:extLst>
   </p:cSld>
@@ -18721,7 +21095,7 @@
               <a:buChar char="•"/>
             </a:pPr>
             <a:r>
-              <a:rPr lang="en-US" sz="2000" dirty="0"/>
+              <a:rPr lang="en-US" dirty="0"/>
               <a:t>Analyzes 4,000 farm records across 8 Indian states, 8 crops and 3 cropping seasons (Kharif, Rabi, Zaid) to uncover how environmental, resource and economic factors shift across seasons.</a:t>
             </a:r>
           </a:p>
@@ -18737,7 +21111,7 @@
               <a:buChar char="•"/>
             </a:pPr>
             <a:r>
-              <a:rPr lang="en-US" sz="2000" dirty="0"/>
+              <a:rPr lang="en-US" dirty="0"/>
               <a:t>Cleans and prepares raw data — season-wise missing value imputation and crop-aware outlier checks — before analysis.</a:t>
             </a:r>
           </a:p>
@@ -18753,7 +21127,7 @@
               <a:buChar char="•"/>
             </a:pPr>
             <a:r>
-              <a:rPr lang="en-US" sz="2000" dirty="0"/>
+              <a:rPr lang="en-US" dirty="0"/>
               <a:t>Uses Python (Pandas, Seaborn, SciPy) to compare yield, cost, profit, water use and disease risk across seasons through visual and statistical (ANOVA) methods.</a:t>
             </a:r>
           </a:p>
@@ -18769,7 +21143,7 @@
               <a:buChar char="•"/>
             </a:pPr>
             <a:r>
-              <a:rPr lang="en-US" sz="2000" dirty="0"/>
+              <a:rPr lang="en-US" dirty="0"/>
               <a:t>Key finding: profit and financial risk vary far more significantly by season than yield does — Zaid is the smallest, driest and financially riskiest season.</a:t>
             </a:r>
           </a:p>
@@ -18785,7 +21159,7 @@
               <a:buChar char="•"/>
             </a:pPr>
             <a:r>
-              <a:rPr lang="en-US" sz="2000" dirty="0"/>
+              <a:rPr lang="en-US" dirty="0"/>
               <a:t>Delivers evidence-based recommendations for season-specific irrigation, pest-budget and crop planning.</a:t>
             </a:r>
           </a:p>
@@ -25606,21 +27980,21 @@
 </file>
 
 <file path=customXml/item2.xml><?xml version="1.0" encoding="utf-8"?>
+<p:properties xmlns:p="http://schemas.microsoft.com/office/2006/metadata/properties" xmlns:xsi="http://www.w3.org/2001/XMLSchema-instance" xmlns:pc="http://schemas.microsoft.com/office/infopath/2007/PartnerControls">
+  <documentManagement>
+    <Status xmlns="71af3243-3dd4-4a8d-8c0d-dd76da1f02a5">Not started</Status>
+    <MediaServiceKeyPoints xmlns="71af3243-3dd4-4a8d-8c0d-dd76da1f02a5" xsi:nil="true"/>
+  </documentManagement>
+</p:properties>
+</file>
+
+<file path=customXml/item3.xml><?xml version="1.0" encoding="utf-8"?>
 <?mso-contentType ?>
 <FormTemplates xmlns="http://schemas.microsoft.com/sharepoint/v3/contenttype/forms">
   <Display>DocumentLibraryForm</Display>
   <Edit>DocumentLibraryForm</Edit>
   <New>DocumentLibraryForm</New>
 </FormTemplates>
-</file>
-
-<file path=customXml/item3.xml><?xml version="1.0" encoding="utf-8"?>
-<p:properties xmlns:p="http://schemas.microsoft.com/office/2006/metadata/properties" xmlns:xsi="http://www.w3.org/2001/XMLSchema-instance" xmlns:pc="http://schemas.microsoft.com/office/infopath/2007/PartnerControls">
-  <documentManagement>
-    <Status xmlns="71af3243-3dd4-4a8d-8c0d-dd76da1f02a5">Not started</Status>
-    <MediaServiceKeyPoints xmlns="71af3243-3dd4-4a8d-8c0d-dd76da1f02a5" xsi:nil="true"/>
-  </documentManagement>
-</p:properties>
 </file>
 
 <file path=customXml/itemProps1.xml><?xml version="1.0" encoding="utf-8"?>
@@ -25643,14 +28017,6 @@
 </file>
 
 <file path=customXml/itemProps2.xml><?xml version="1.0" encoding="utf-8"?>
-<ds:datastoreItem xmlns:ds="http://schemas.openxmlformats.org/officeDocument/2006/customXml" ds:itemID="{05D99ABA-76CE-4A8E-B5F0-C051B96628DE}">
-  <ds:schemaRefs>
-    <ds:schemaRef ds:uri="http://schemas.microsoft.com/sharepoint/v3/contenttype/forms"/>
-  </ds:schemaRefs>
-</ds:datastoreItem>
-</file>
-
-<file path=customXml/itemProps3.xml><?xml version="1.0" encoding="utf-8"?>
 <ds:datastoreItem xmlns:ds="http://schemas.openxmlformats.org/officeDocument/2006/customXml" ds:itemID="{4DEA9014-ED64-4558-B1E1-D03F0EE32BEB}">
   <ds:schemaRefs>
     <ds:schemaRef ds:uri="http://schemas.microsoft.com/office/2006/metadata/properties"/>
@@ -25658,4 +28024,12 @@
     <ds:schemaRef ds:uri="71af3243-3dd4-4a8d-8c0d-dd76da1f02a5"/>
   </ds:schemaRefs>
 </ds:datastoreItem>
+</file>
+
+<file path=customXml/itemProps3.xml><?xml version="1.0" encoding="utf-8"?>
+<ds:datastoreItem xmlns:ds="http://schemas.openxmlformats.org/officeDocument/2006/customXml" ds:itemID="{05D99ABA-76CE-4A8E-B5F0-C051B96628DE}">
+  <ds:schemaRefs>
+    <ds:schemaRef ds:uri="http://schemas.microsoft.com/sharepoint/v3/contenttype/forms"/>
+  </ds:schemaRefs>
+</ds:datastoreItem>
 </file>
--- a/Vidhya_Majee___VOIS_Major_Project_PPT_Seasonal_Agriculture_Performance_Analysis.pptx
+++ b/Vidhya_Majee___VOIS_Major_Project_PPT_Seasonal_Agriculture_Performance_Analysis.pptx
@@ -200,7 +200,7 @@
   <pc:docChgLst>
     <pc:chgData name="Vidhya Majee" userId="641a53838c14f1ed" providerId="LiveId" clId="{EF730085-4CDC-4C53-9EAC-0409C9C577CF}"/>
     <pc:docChg chg="undo custSel addSld delSld modSld sldOrd modSection">
-      <pc:chgData name="Vidhya Majee" userId="641a53838c14f1ed" providerId="LiveId" clId="{EF730085-4CDC-4C53-9EAC-0409C9C577CF}" dt="2026-09-05T05:41:33.308" v="510" actId="47"/>
+      <pc:chgData name="Vidhya Majee" userId="641a53838c14f1ed" providerId="LiveId" clId="{EF730085-4CDC-4C53-9EAC-0409C9C577CF}" dt="2026-09-05T05:44:24.902" v="511" actId="207"/>
       <pc:docMkLst>
         <pc:docMk/>
       </pc:docMkLst>
@@ -639,7 +639,7 @@
         </pc:sldMkLst>
       </pc:sldChg>
       <pc:sldChg chg="modSp add mod modAnim">
-        <pc:chgData name="Vidhya Majee" userId="641a53838c14f1ed" providerId="LiveId" clId="{EF730085-4CDC-4C53-9EAC-0409C9C577CF}" dt="2026-09-05T05:41:18.418" v="508" actId="207"/>
+        <pc:chgData name="Vidhya Majee" userId="641a53838c14f1ed" providerId="LiveId" clId="{EF730085-4CDC-4C53-9EAC-0409C9C577CF}" dt="2026-09-05T05:44:24.902" v="511" actId="207"/>
         <pc:sldMkLst>
           <pc:docMk/>
           <pc:sldMk cId="403887915" sldId="348"/>
@@ -653,7 +653,7 @@
           </ac:spMkLst>
         </pc:spChg>
         <pc:spChg chg="mod">
-          <ac:chgData name="Vidhya Majee" userId="641a53838c14f1ed" providerId="LiveId" clId="{EF730085-4CDC-4C53-9EAC-0409C9C577CF}" dt="2026-09-05T05:41:18.418" v="508" actId="207"/>
+          <ac:chgData name="Vidhya Majee" userId="641a53838c14f1ed" providerId="LiveId" clId="{EF730085-4CDC-4C53-9EAC-0409C9C577CF}" dt="2026-09-05T05:44:24.902" v="511" actId="207"/>
           <ac:spMkLst>
             <pc:docMk/>
             <pc:sldMk cId="403887915" sldId="348"/>
@@ -16468,7 +16468,7 @@
             <a:r>
               <a:rPr lang="en-US" sz="9600" b="1" dirty="0">
                 <a:solidFill>
-                  <a:schemeClr val="accent1">
+                  <a:schemeClr val="accent2">
                     <a:lumMod val="50000"/>
                   </a:schemeClr>
                 </a:solidFill>
@@ -27980,21 +27980,21 @@
 </file>
 
 <file path=customXml/item2.xml><?xml version="1.0" encoding="utf-8"?>
+<?mso-contentType ?>
+<FormTemplates xmlns="http://schemas.microsoft.com/sharepoint/v3/contenttype/forms">
+  <Display>DocumentLibraryForm</Display>
+  <Edit>DocumentLibraryForm</Edit>
+  <New>DocumentLibraryForm</New>
+</FormTemplates>
+</file>
+
+<file path=customXml/item3.xml><?xml version="1.0" encoding="utf-8"?>
 <p:properties xmlns:p="http://schemas.microsoft.com/office/2006/metadata/properties" xmlns:xsi="http://www.w3.org/2001/XMLSchema-instance" xmlns:pc="http://schemas.microsoft.com/office/infopath/2007/PartnerControls">
   <documentManagement>
     <Status xmlns="71af3243-3dd4-4a8d-8c0d-dd76da1f02a5">Not started</Status>
     <MediaServiceKeyPoints xmlns="71af3243-3dd4-4a8d-8c0d-dd76da1f02a5" xsi:nil="true"/>
   </documentManagement>
 </p:properties>
-</file>
-
-<file path=customXml/item3.xml><?xml version="1.0" encoding="utf-8"?>
-<?mso-contentType ?>
-<FormTemplates xmlns="http://schemas.microsoft.com/sharepoint/v3/contenttype/forms">
-  <Display>DocumentLibraryForm</Display>
-  <Edit>DocumentLibraryForm</Edit>
-  <New>DocumentLibraryForm</New>
-</FormTemplates>
 </file>
 
 <file path=customXml/itemProps1.xml><?xml version="1.0" encoding="utf-8"?>
@@ -28017,6 +28017,14 @@
 </file>
 
 <file path=customXml/itemProps2.xml><?xml version="1.0" encoding="utf-8"?>
+<ds:datastoreItem xmlns:ds="http://schemas.openxmlformats.org/officeDocument/2006/customXml" ds:itemID="{05D99ABA-76CE-4A8E-B5F0-C051B96628DE}">
+  <ds:schemaRefs>
+    <ds:schemaRef ds:uri="http://schemas.microsoft.com/sharepoint/v3/contenttype/forms"/>
+  </ds:schemaRefs>
+</ds:datastoreItem>
+</file>
+
+<file path=customXml/itemProps3.xml><?xml version="1.0" encoding="utf-8"?>
 <ds:datastoreItem xmlns:ds="http://schemas.openxmlformats.org/officeDocument/2006/customXml" ds:itemID="{4DEA9014-ED64-4558-B1E1-D03F0EE32BEB}">
   <ds:schemaRefs>
     <ds:schemaRef ds:uri="http://schemas.microsoft.com/office/2006/metadata/properties"/>
@@ -28024,12 +28032,4 @@
     <ds:schemaRef ds:uri="71af3243-3dd4-4a8d-8c0d-dd76da1f02a5"/>
   </ds:schemaRefs>
 </ds:datastoreItem>
-</file>
-
-<file path=customXml/itemProps3.xml><?xml version="1.0" encoding="utf-8"?>
-<ds:datastoreItem xmlns:ds="http://schemas.openxmlformats.org/officeDocument/2006/customXml" ds:itemID="{05D99ABA-76CE-4A8E-B5F0-C051B96628DE}">
-  <ds:schemaRefs>
-    <ds:schemaRef ds:uri="http://schemas.microsoft.com/sharepoint/v3/contenttype/forms"/>
-  </ds:schemaRefs>
-</ds:datastoreItem>
 </file>
--- a/Vidhya_Majee___VOIS_Major_Project_PPT_Seasonal_Agriculture_Performance_Analysis.pptx
+++ b/Vidhya_Majee___VOIS_Major_Project_PPT_Seasonal_Agriculture_Performance_Analysis.pptx
@@ -200,7 +200,7 @@
   <pc:docChgLst>
     <pc:chgData name="Vidhya Majee" userId="641a53838c14f1ed" providerId="LiveId" clId="{EF730085-4CDC-4C53-9EAC-0409C9C577CF}"/>
     <pc:docChg chg="undo custSel addSld delSld modSld sldOrd modSection">
-      <pc:chgData name="Vidhya Majee" userId="641a53838c14f1ed" providerId="LiveId" clId="{EF730085-4CDC-4C53-9EAC-0409C9C577CF}" dt="2026-09-05T05:44:24.902" v="511" actId="207"/>
+      <pc:chgData name="Vidhya Majee" userId="641a53838c14f1ed" providerId="LiveId" clId="{EF730085-4CDC-4C53-9EAC-0409C9C577CF}" dt="2026-09-05T05:46:34.949" v="513" actId="207"/>
       <pc:docMkLst>
         <pc:docMk/>
       </pc:docMkLst>
@@ -639,7 +639,7 @@
         </pc:sldMkLst>
       </pc:sldChg>
       <pc:sldChg chg="modSp add mod modAnim">
-        <pc:chgData name="Vidhya Majee" userId="641a53838c14f1ed" providerId="LiveId" clId="{EF730085-4CDC-4C53-9EAC-0409C9C577CF}" dt="2026-09-05T05:44:24.902" v="511" actId="207"/>
+        <pc:chgData name="Vidhya Majee" userId="641a53838c14f1ed" providerId="LiveId" clId="{EF730085-4CDC-4C53-9EAC-0409C9C577CF}" dt="2026-09-05T05:46:34.949" v="513" actId="207"/>
         <pc:sldMkLst>
           <pc:docMk/>
           <pc:sldMk cId="403887915" sldId="348"/>
@@ -653,7 +653,7 @@
           </ac:spMkLst>
         </pc:spChg>
         <pc:spChg chg="mod">
-          <ac:chgData name="Vidhya Majee" userId="641a53838c14f1ed" providerId="LiveId" clId="{EF730085-4CDC-4C53-9EAC-0409C9C577CF}" dt="2026-09-05T05:44:24.902" v="511" actId="207"/>
+          <ac:chgData name="Vidhya Majee" userId="641a53838c14f1ed" providerId="LiveId" clId="{EF730085-4CDC-4C53-9EAC-0409C9C577CF}" dt="2026-09-05T05:46:34.949" v="513" actId="207"/>
           <ac:spMkLst>
             <pc:docMk/>
             <pc:sldMk cId="403887915" sldId="348"/>
@@ -16468,8 +16468,9 @@
             <a:r>
               <a:rPr lang="en-US" sz="9600" b="1" dirty="0">
                 <a:solidFill>
-                  <a:schemeClr val="accent2">
-                    <a:lumMod val="50000"/>
+                  <a:schemeClr val="tx1">
+                    <a:lumMod val="95000"/>
+                    <a:lumOff val="5000"/>
                   </a:schemeClr>
                 </a:solidFill>
                 <a:latin typeface="Arial Rounded MT Bold" panose="020F0704030504030204" pitchFamily="34" charset="0"/>
@@ -27980,21 +27981,21 @@
 </file>
 
 <file path=customXml/item2.xml><?xml version="1.0" encoding="utf-8"?>
+<p:properties xmlns:p="http://schemas.microsoft.com/office/2006/metadata/properties" xmlns:xsi="http://www.w3.org/2001/XMLSchema-instance" xmlns:pc="http://schemas.microsoft.com/office/infopath/2007/PartnerControls">
+  <documentManagement>
+    <Status xmlns="71af3243-3dd4-4a8d-8c0d-dd76da1f02a5">Not started</Status>
+    <MediaServiceKeyPoints xmlns="71af3243-3dd4-4a8d-8c0d-dd76da1f02a5" xsi:nil="true"/>
+  </documentManagement>
+</p:properties>
+</file>
+
+<file path=customXml/item3.xml><?xml version="1.0" encoding="utf-8"?>
 <?mso-contentType ?>
 <FormTemplates xmlns="http://schemas.microsoft.com/sharepoint/v3/contenttype/forms">
   <Display>DocumentLibraryForm</Display>
   <Edit>DocumentLibraryForm</Edit>
   <New>DocumentLibraryForm</New>
 </FormTemplates>
-</file>
-
-<file path=customXml/item3.xml><?xml version="1.0" encoding="utf-8"?>
-<p:properties xmlns:p="http://schemas.microsoft.com/office/2006/metadata/properties" xmlns:xsi="http://www.w3.org/2001/XMLSchema-instance" xmlns:pc="http://schemas.microsoft.com/office/infopath/2007/PartnerControls">
-  <documentManagement>
-    <Status xmlns="71af3243-3dd4-4a8d-8c0d-dd76da1f02a5">Not started</Status>
-    <MediaServiceKeyPoints xmlns="71af3243-3dd4-4a8d-8c0d-dd76da1f02a5" xsi:nil="true"/>
-  </documentManagement>
-</p:properties>
 </file>
 
 <file path=customXml/itemProps1.xml><?xml version="1.0" encoding="utf-8"?>
@@ -28017,14 +28018,6 @@
 </file>
 
 <file path=customXml/itemProps2.xml><?xml version="1.0" encoding="utf-8"?>
-<ds:datastoreItem xmlns:ds="http://schemas.openxmlformats.org/officeDocument/2006/customXml" ds:itemID="{05D99ABA-76CE-4A8E-B5F0-C051B96628DE}">
-  <ds:schemaRefs>
-    <ds:schemaRef ds:uri="http://schemas.microsoft.com/sharepoint/v3/contenttype/forms"/>
-  </ds:schemaRefs>
-</ds:datastoreItem>
-</file>
-
-<file path=customXml/itemProps3.xml><?xml version="1.0" encoding="utf-8"?>
 <ds:datastoreItem xmlns:ds="http://schemas.openxmlformats.org/officeDocument/2006/customXml" ds:itemID="{4DEA9014-ED64-4558-B1E1-D03F0EE32BEB}">
   <ds:schemaRefs>
     <ds:schemaRef ds:uri="http://schemas.microsoft.com/office/2006/metadata/properties"/>
@@ -28032,4 +28025,12 @@
     <ds:schemaRef ds:uri="71af3243-3dd4-4a8d-8c0d-dd76da1f02a5"/>
   </ds:schemaRefs>
 </ds:datastoreItem>
+</file>
+
+<file path=customXml/itemProps3.xml><?xml version="1.0" encoding="utf-8"?>
+<ds:datastoreItem xmlns:ds="http://schemas.openxmlformats.org/officeDocument/2006/customXml" ds:itemID="{05D99ABA-76CE-4A8E-B5F0-C051B96628DE}">
+  <ds:schemaRefs>
+    <ds:schemaRef ds:uri="http://schemas.microsoft.com/sharepoint/v3/contenttype/forms"/>
+  </ds:schemaRefs>
+</ds:datastoreItem>
 </file>